--- a/负荷预测持续学习路演/负荷预测持续学习路演.pptx
+++ b/负荷预测持续学习路演/负荷预测持续学习路演.pptx
@@ -5685,7 +5685,7 @@
   <p:cSld>
     <p:spTree>
       <p:nvGrpSpPr>
-        <p:cNvPr id="104" name="" descr="&lt;Slide style={{ width: 1280, height: 720, background: '#FFFFFF', display: 'flex', flexDirection: 'column', padding: '22px 64px 16px 64px' }}&gt;&#10;    &lt;Box&gt;&#10;        &lt;Text style={{ fontSize: 32, fontWeight: 'bold', color: '#0A1D37' }}&gt;我们卖的不是模型，而是让 Agent 可靠工作的 Harness&lt;/Text&gt;&#10;        &lt;Text style={{ fontSize: 16, color: '#64748B', marginTop: 6 }}&gt;Harness 把数据、工具、约束和反馈组织起来——让通用 Agent 成为垂直智能体&lt;/Text&gt;&#10;    &lt;/Box&gt;&#10;&#10;    &lt;Box style={{ flexDirection: 'row', gap: 28, flex: 1, marginTop: 16, alignItems: 'stretch' }}&gt;&#10;        &lt;Box style={{ width: 700, position: 'relative', height: 500 }}&gt;&#10;            &lt;Box style={{ position: 'absolute', left: 349, top: 92, width: 2, height: 66, background: '#CBD5E1' }} /&gt;&#10;            &lt;Box style={{ position: 'absolute', left: 202, top: 242, width: 68, height: 2, background: '#CBD5E1' }} /&gt;&#10;            &lt;Box style={{ position: 'absolute', left: 430, top: 242, width: 68, height: 2, background: '#CBD5E1' }} /&gt;&#10;            &lt;Box style={{ position: 'absolute', left: 349, top: 318, width: 2, height: 74, background: '#CBD5E1' }} /&gt;&#10;            &lt;Box style={{ position: 'absolute', left: 210, top: 8, width: 280, height: 84, background: '#FFFFFF', border: '1.5px solid #E2E8F0', borderRadius: 10, alignItems: 'center', justifyContent: 'center', padding: 10 }}&gt;&#10;                &lt;Text style={{ fontSize: 16.5, fontWeight: 'bold', color: '#0A1D37' }}&gt;① 数据上下文（读取）&lt;/Text&gt;&#10;                &lt;Text style={{ fontSize: 12, color: '#64748B', marginTop: 6, textAlign: 'center' }}&gt;新增负荷 · 天气 · 历史分布 · 模型表现 · EDM 日志&lt;/Text&gt;&#10;            &lt;/Box&gt;&#10;            &lt;Box style={{ position: 'absolute', left: 2, top: 198, width: 200, height: 92, background: '#FFFFFF', border: '1.5px solid #E2E8F0', borderRadius: 10, alignItems: 'center', justifyContent: 'center', padding: 10 }}&gt;&#10;                &lt;Text style={{ fontSize: 16.5, fontWeight: 'bold', color: '#0A1D37' }}&gt;② EDM&lt;/Text&gt;&#10;                &lt;Text style={{ fontSize: 12, color: '#64748B', marginTop: 6, textAlign: 'center' }}&gt;数据漂移检测 · 结论沉淀为日志与上下文&lt;/Text&gt;&#10;            &lt;/Box&gt;&#10;            &lt;Box style={{ position: 'absolute', left: 498, top: 198, width: 200, height: 92, background: '#FFFFFF', border: '1.5px solid #E2E8F0', borderRadius: 10, alignItems: 'center', justifyContent: 'center', padding: 10 }}&gt;&#10;                &lt;Text style={{ fontSize: 16.5, fontWeight: 'bold', color: '#0A1D37' }}&gt;③ 训练验证&lt;/Text&gt;&#10;                &lt;Text style={{ fontSize: 12, color: '#64748B', marginTop: 6, textAlign: 'center' }}&gt;训练 Skill · 时序验证统一口径&lt;/Text&gt;&#10;            &lt;/Box&gt;&#10;            &lt;Box style={{ position: 'absolute', left: 210, top: 392, width: 280, height: 84, background: '#FFFFFF', border: '1.5px solid #E2E8F0', borderRadius: 10, alignItems: 'center', justifyContent: 'center', padding: 10 }}&gt;&#10;                &lt;Text style={{ fontSize: 16.5, fontWeight: 'bold', color: '#0A1D37' }}&gt;④ 发布约束&lt;/Text&gt;&#10;                &lt;Text style={{ fontSize: 12, color: '#64748B', marginTop: 6, textAlign: 'center' }}&gt;只能使用已到达数据 · 版本化管理&lt;/Text&gt;&#10;            &lt;/Box&gt;&#10;            &lt;Box style={{ position: 'absolute', left: 270, top: 158, width: 160, height: 160, borderRadius: 80, background: '#22D3EE', alignItems: 'center', justifyContent: 'center' }}&gt;&#10;                &lt;Text style={{ fontSize: 27, fontWeight: 'bold', color: '#0A1D37' }}&gt;Agent&lt;/Text&gt;&#10;                &lt;Text style={{ fontSize: 12, color: '#0A1D37', opacity: 0.72, marginTop: 4 }}&gt;垂直智能体&lt;/Text&gt;&#10;            &lt;/Box&gt;&#10;            &lt;Text style={{ position: 'absolute', left: 0, top: 486, width: 700, fontSize: 13, color: '#94A3B8', textAlign: 'center' }}&gt;Agent 决定何时学、怎么学；Harness 保证它学得可靠、可审计&lt;/Text&gt;&#10;            &lt;Box style={{ position: 'absolute', left: 175, top: 512, width: 350, flexDirection: 'row', justifyContent: 'center', gap: 8 }}&gt;&#10;                &lt;Box style={{ padding: '3px 10px', background: '#F1F5F9', borderRadius: 6 }}&gt;&#10;                    &lt;Text style={{ fontSize: 11.5, color: '#64748B' }}&gt;数据&lt;/Text&gt;&#10;                &lt;/Box&gt;&#10;                &lt;Box style={{ padding: '3px 10px', background: '#F1F5F9', borderRadius: 6 }}&gt;&#10;                    &lt;Text style={{ fontSize: 11.5, color: '#64748B' }}&gt;工具&lt;/Text&gt;&#10;                &lt;/Box&gt;&#10;                &lt;Box style={{ padding: '3px 10px', background: '#F1F5F9', borderRadius: 6 }}&gt;&#10;                    &lt;Text style={{ fontSize: 11.5, color: '#64748B' }}&gt;约束&lt;/Text&gt;&#10;                &lt;/Box&gt;&#10;                &lt;Box style={{ padding: '3px 10px', background: '#F1F5F9', borderRadius: 6 }}&gt;&#10;                    &lt;Text style={{ fontSize: 11.5, color: '#64748B' }}&gt;反馈&lt;/Text&gt;&#10;                &lt;/Box&gt;&#10;                &lt;Text style={{ fontSize: 11.5, color: '#94A3B8', alignSelf: 'center' }}&gt;—— Harness 四要素&lt;/Text&gt;&#10;            &lt;/Box&gt;&#10;        &lt;/Box&gt;&#10;&#10;        &lt;Box style={{ flex: 1, display: 'flex', flexDirection: 'column' }}&gt;&#10;            &lt;Text style={{ fontSize: 19, fontWeight: 'bold', color: '#0A1D37' }}&gt;一句话定义&lt;/Text&gt;&#10;            &lt;Box style={{ borderLeft: '4px solid #22D3EE', background: 'rgba(34,211,238,0.07)', borderRadius: '0 10px 10px 0', padding: 14, marginTop: 10 }}&gt;&#10;                &lt;Text style={{ fontSize: 15, color: '#0F2039', lineHeight: 1.8 }}&gt;Harness 把数据、工具、约束和反馈组织起来，让通用 Agent 成为负荷预测持续学习的垂直智能体。&lt;/Text&gt;&#10;            &lt;/Box&gt;&#10;            &lt;Box style={{ marginTop: 16 }}&gt;&#10;                &lt;Text style={{ fontSize: 15, fontWeight: 'bold', color: '#0A1D37' }}&gt;Agent 读取&lt;/Text&gt;&#10;                &lt;Text style={{ fontSize: 13, color: '#64748B', marginTop: 4, lineHeight: 1.7 }}&gt;新增负荷、天气、历史分布、模型表现、EDM 日志&lt;/Text&gt;&#10;                &lt;Text style={{ fontSize: 12, color: '#94A3B8', marginTop: 4 }}&gt;→ 自主判断是否学习、如何学习&lt;/Text&gt;&#10;            &lt;/Box&gt;&#10;            &lt;Box style={{ marginTop: 12, paddingBottom: 12, borderBottom: '1px solid #E2E8F0' }}&gt;&#10;                &lt;Text style={{ fontSize: 15, fontWeight: 'bold', color: '#0A1D37' }}&gt;Harness 提供&lt;/Text&gt;&#10;                &lt;Text style={{ fontSize: 13, color: '#64748B', marginTop: 4, lineHeight: 1.7 }}&gt;EDM、训练、验证与部署能力，并限制其只能使用已到达数据&lt;/Text&gt;&#10;                &lt;Text style={{ fontSize: 12, color: '#94A3B8', marginTop: 4 }}&gt;→ 能力标准化，不依赖特定算法团队&lt;/Text&gt;&#10;            &lt;/Box&gt;&#10;            &lt;Box style={{ borderLeft: '4px solid #0A1D37', background: '#F8FAFC', borderRadius: '0 10px 10px 0', padding: 14, marginTop: 16 }}&gt;&#10;                &lt;Text style={{ fontSize: 16, fontWeight: 'bold', color: '#0A1D37' }}&gt;约束是卖点&lt;/Text&gt;&#10;                &lt;Text style={{ fontSize: 13, color: '#0F2039', lineHeight: 1.8, marginTop: 6 }}&gt;Agent 可自主决定如何学习，但只能在 Harness 划定的数据边界与验证口径内行动——这正是产业客户需要的『可审计的自主权』。&lt;/Text&gt;&#10;            &lt;/Box&gt;&#10;            &lt;Box style={{ borderLeft: '4px solid #F59E0B', background: '#FFFBEB', borderRadius: '0 10px 10px 0', padding: 14, marginTop: 12 }}&gt;&#10;                &lt;Text style={{ fontSize: 16, fontWeight: 'bold', color: '#0A1D37' }}&gt;为什么是工程问题&lt;/Text&gt;&#10;                &lt;Text style={{ fontSize: 13, color: '#0F2039', lineHeight: 1.8, marginTop: 6 }}&gt;模型会不会过时，不再取决于算法团队是否在场——持续学习成为标准化、可复用、可审计的工程能力。&lt;/Text&gt;&#10;            &lt;/Box&gt;&#10;        &lt;/Box&gt;&#10;    &lt;/Box&gt;&#10;&#10;    &lt;Box style={{ flexDirection: 'row', marginTop: 12, alignItems: 'center' }}&gt;&#10;        &lt;Text style={{ fontSize: 12, color: '#94A3B8' }}&gt;负荷预测持续学习引擎 · 方案定义&lt;/Text&gt;&#10;        &lt;Box style={{ marginLeft: 'auto', flexDirection: 'row', alignItems: 'center', gap: 8 }}&gt;&#10;            &lt;Box style={{ width: 10, height: 10, background: '#22D3EE' }} /&gt;&#10;            &lt;Text style={{ fontSize: 13, color: '#64748B' }}&gt;CLE · 03 / 07&lt;/Text&gt;&#10;        &lt;/Box&gt;&#10;    &lt;/Box&gt;&#10;&lt;/Slide&gt;"/>
+        <p:cNvPr id="104" name="" descr="&lt;Slide style={{ width: 1280, height: 720, background: '#FFFFFF', display: 'flex', flexDirection: 'column', padding: '22px 64px 16px 64px' }}&gt;&#10;    &lt;Box&gt;&#10;        &lt;Text style={{ fontSize: 32, fontWeight: 'bold', color: '#0A1D37' }}&gt;我们卖的不是模型，而是让 Agent 可靠工作的 Harness&lt;/Text&gt;&#10;        &lt;Text style={{ fontSize: 16, color: '#64748B', marginTop: 6 }}&gt;Harness 把数据、工具、约束和反馈组织起来——让通用 Agent 成为垂直智能体&lt;/Text&gt;&#10;    &lt;/Box&gt;&#10;&#10;    &lt;Box style={{ flexDirection: 'row', gap: 28, flex: 1, marginTop: 16, alignItems: 'stretch' }}&gt;&#10;        &lt;Box style={{ width: 700, position: 'relative', height: 545 }}&gt;&#10;            {/* L1 交互层 */}&#10;            &lt;Box style={{ position: 'absolute', left: 0, top: 0, width: 700, height: 54, background: '#F8FAFC', border: '1px solid #E2E8F0', borderRadius: 10, flexDirection: 'row', alignItems: 'center' }}&gt;&#10;                &lt;Box style={{ width: 100, alignItems: 'center' }}&gt;&#10;                    &lt;Text style={{ fontSize: 13.5, fontWeight: 'bold', color: '#475569' }}&gt;交互层&lt;/Text&gt;&#10;                &lt;/Box&gt;&#10;                &lt;Box style={{ flex: 1, flexDirection: 'row', gap: 8, alignItems: 'center' }}&gt;&#10;                    &lt;Box style={{ padding: '5px 12px', background: '#FFFFFF', border: '1px solid #CBD5E1', borderRadius: 6 }}&gt;&#10;                        &lt;Text style={{ fontSize: 12, color: '#0F2039' }}&gt;聊天入口（自然语言）&lt;/Text&gt;&#10;                    &lt;/Box&gt;&#10;                    &lt;Box style={{ padding: '5px 12px', background: '#FFFFFF', border: '1px solid #CBD5E1', borderRadius: 6 }}&gt;&#10;                        &lt;Text style={{ fontSize: 12, color: '#0F2039' }}&gt;Cron 定时任务&lt;/Text&gt;&#10;                    &lt;/Box&gt;&#10;                    &lt;Box style={{ padding: '5px 12px', background: '#FFFFFF', border: '1px solid #CBD5E1', borderRadius: 6 }}&gt;&#10;                        &lt;Text style={{ fontSize: 12, color: '#0F2039' }}&gt;EDM 日志沉淀&lt;/Text&gt;&#10;                    &lt;/Box&gt;&#10;                &lt;/Box&gt;&#10;            &lt;/Box&gt;&#10;            {/* 箭头 1 */}&#10;            &lt;Box style={{ position: 'absolute', left: 0, top: 55, width: 700, height: 16, flexDirection: 'row', justifyContent: 'center', alignItems: 'center', gap: 6 }}&gt;&#10;                &lt;Text style={{ fontSize: 14, color: '#94A3B8' }}&gt;↓&lt;/Text&gt;&#10;                &lt;Text style={{ fontSize: 11, color: '#94A3B8' }}&gt;自然语言 / 定时触发&lt;/Text&gt;&#10;            &lt;/Box&gt;&#10;            {/* L2 Agent 层 */}&#10;            &lt;Box style={{ position: 'absolute', left: 0, top: 72, width: 700, height: 60, background: '#22D3EE', borderRadius: 10, flexDirection: 'row', alignItems: 'center' }}&gt;&#10;                &lt;Box style={{ width: 100, alignItems: 'center' }}&gt;&#10;                    &lt;Text style={{ fontSize: 13.5, fontWeight: 'bold', color: '#0A1D37' }}&gt;Agent 层&lt;/Text&gt;&#10;                &lt;/Box&gt;&#10;                &lt;Box style={{ flex: 1, flexDirection: 'column' }}&gt;&#10;                    &lt;Text style={{ fontSize: 15, fontWeight: 'bold', color: '#0A1D37' }}&gt;垂直智能体 —— 决定何时学、怎么学&lt;/Text&gt;&#10;                    &lt;Text style={{ fontSize: 11.5, color: '#0A1D37', opacity: 0.72, marginTop: 3 }}&gt;读取数据上下文与 EDM 日志 · 在约束内自主判断是否更新、如何更新&lt;/Text&gt;&#10;                &lt;/Box&gt;&#10;            &lt;/Box&gt;&#10;            {/* 箭头 2 */}&#10;            &lt;Box style={{ position: 'absolute', left: 0, top: 133, width: 700, height: 16, flexDirection: 'row', justifyContent: 'center', alignItems: 'center', gap: 6 }}&gt;&#10;                &lt;Text style={{ fontSize: 14, color: '#94A3B8' }}&gt;↓&lt;/Text&gt;&#10;                &lt;Text style={{ fontSize: 11, color: '#94A3B8' }}&gt;调用训练 · 验证 · 部署 Skill&lt;/Text&gt;&#10;            &lt;/Box&gt;&#10;            {/* L3 Harness 能力层 */}&#10;            &lt;Box style={{ position: 'absolute', left: 0, top: 150, width: 700, height: 172, background: '#0A1D37', borderRadius: 12, padding: 14 }}&gt;&#10;                &lt;Box style={{ flexDirection: 'row', alignItems: 'center' }}&gt;&#10;                    &lt;Text style={{ fontSize: 15, fontWeight: 'bold', color: '#F8FAFC' }}&gt;Harness 能力层&lt;/Text&gt;&#10;                    &lt;Text style={{ fontSize: 11.5, color: '#22D3EE', marginLeft: 'auto' }}&gt;把持续学习变成标准化、可复用的工程能力&lt;/Text&gt;&#10;                &lt;/Box&gt;&#10;                &lt;Box style={{ flexDirection: 'row', gap: 8, marginTop: 12, alignItems: 'stretch' }}&gt;&#10;                    &lt;Box style={{ flex: 1, background: 'rgba(34,211,238,0.08)', border: '1px solid rgba(34,211,238,0.35)', borderRadius: 8, padding: 10, flexDirection: 'column' }}&gt;&#10;                        &lt;Text style={{ fontSize: 12.5, fontWeight: 'bold', color: '#22D3EE' }}&gt;① EDM 漂移检测&lt;/Text&gt;&#10;                        &lt;Text style={{ fontSize: 10.5, color: '#CBD5E1', marginTop: 5 }}&gt;监测数据分布变化&lt;/Text&gt;&#10;                        &lt;Text style={{ fontSize: 10.5, color: '#CBD5E1', marginTop: 2 }}&gt;结论沉淀为日志&lt;/Text&gt;&#10;                    &lt;/Box&gt;&#10;                    &lt;Box style={{ flex: 1, background: 'rgba(34,211,238,0.08)', border: '1px solid rgba(34,211,238,0.35)', borderRadius: 8, padding: 10, flexDirection: 'column' }}&gt;&#10;                        &lt;Text style={{ fontSize: 12.5, fontWeight: 'bold', color: '#22D3EE' }}&gt;② 训练 Skill&lt;/Text&gt;&#10;                        &lt;Text style={{ fontSize: 10.5, color: '#CBD5E1', marginTop: 5 }}&gt;标准化训练能力&lt;/Text&gt;&#10;                        &lt;Text style={{ fontSize: 10.5, color: '#CBD5E1', marginTop: 2 }}&gt;训练前读 EDM 日志&lt;/Text&gt;&#10;                    &lt;/Box&gt;&#10;                    &lt;Box style={{ flex: 1, background: 'rgba(34,211,238,0.08)', border: '1px solid rgba(34,211,238,0.35)', borderRadius: 8, padding: 10, flexDirection: 'column' }}&gt;&#10;                        &lt;Text style={{ fontSize: 12.5, fontWeight: 'bold', color: '#22D3EE' }}&gt;③ 时序验证&lt;/Text&gt;&#10;                        &lt;Text style={{ fontSize: 10.5, color: '#CBD5E1', marginTop: 5 }}&gt;统一时序口径评估&lt;/Text&gt;&#10;                        &lt;Text style={{ fontSize: 10.5, color: '#CBD5E1', marginTop: 2 }}&gt;杜绝未来信息泄漏&lt;/Text&gt;&#10;                    &lt;/Box&gt;&#10;                    &lt;Box style={{ flex: 1, background: 'rgba(34,211,238,0.08)', border: '1px solid rgba(34,211,238,0.35)', borderRadius: 8, padding: 10, flexDirection: 'column' }}&gt;&#10;                        &lt;Text style={{ fontSize: 12.5, fontWeight: 'bold', color: '#22D3EE' }}&gt;④ 版本化部署&lt;/Text&gt;&#10;                        &lt;Text style={{ fontSize: 10.5, color: '#CBD5E1', marginTop: 5 }}&gt;发布 active 模型&lt;/Text&gt;&#10;                        &lt;Text style={{ fontSize: 10.5, color: '#CBD5E1', marginTop: 2 }}&gt;可回滚 · 可审计&lt;/Text&gt;&#10;                    &lt;/Box&gt;&#10;                &lt;/Box&gt;&#10;                &lt;Text style={{ fontSize: 11, color: '#94A3B8', marginTop: 10 }}&gt;四项能力全部版本化管理，对外输出唯一的 active 模型&lt;/Text&gt;&#10;            &lt;/Box&gt;&#10;            {/* 箭头 3 */}&#10;            &lt;Box style={{ position: 'absolute', left: 0, top: 323, width: 700, height: 16, flexDirection: 'row', justifyContent: 'center', alignItems: 'center', gap: 6 }}&gt;&#10;                &lt;Text style={{ fontSize: 14, color: '#94A3B8' }}&gt;↓&lt;/Text&gt;&#10;                &lt;Text style={{ fontSize: 11, color: '#94A3B8' }}&gt;只读已到达数据&lt;/Text&gt;&#10;            &lt;/Box&gt;&#10;            {/* L4 数据层 */}&#10;            &lt;Box style={{ position: 'absolute', left: 0, top: 340, width: 700, height: 70, background: '#F8FAFC', border: '1px solid #E2E8F0', borderRadius: 10, flexDirection: 'row', alignItems: 'center' }}&gt;&#10;                &lt;Box style={{ width: 100, alignItems: 'center' }}&gt;&#10;                    &lt;Text style={{ fontSize: 13.5, fontWeight: 'bold', color: '#475569' }}&gt;数据层&lt;/Text&gt;&#10;                &lt;/Box&gt;&#10;                &lt;Box style={{ flex: 1, flexDirection: 'row', gap: 6, alignItems: 'center' }}&gt;&#10;                    &lt;Box style={{ padding: '5px 10px', background: '#FFFFFF', border: '1px solid #CBD5E1', borderRadius: 6 }}&gt;&#10;                        &lt;Text style={{ fontSize: 11.5, color: '#0F2039' }}&gt;新增负荷&lt;/Text&gt;&#10;                    &lt;/Box&gt;&#10;                    &lt;Box style={{ padding: '5px 10px', background: '#FFFFFF', border: '1px solid #CBD5E1', borderRadius: 6 }}&gt;&#10;                        &lt;Text style={{ fontSize: 11.5, color: '#0F2039' }}&gt;天气&lt;/Text&gt;&#10;                    &lt;/Box&gt;&#10;                    &lt;Box style={{ padding: '5px 10px', background: '#FFFFFF', border: '1px solid #CBD5E1', borderRadius: 6 }}&gt;&#10;                        &lt;Text style={{ fontSize: 11.5, color: '#0F2039' }}&gt;历史分布&lt;/Text&gt;&#10;                    &lt;/Box&gt;&#10;                    &lt;Box style={{ padding: '5px 10px', background: '#FFFFFF', border: '1px solid #CBD5E1', borderRadius: 6 }}&gt;&#10;                        &lt;Text style={{ fontSize: 11.5, color: '#0F2039' }}&gt;模型表现&lt;/Text&gt;&#10;                    &lt;/Box&gt;&#10;                    &lt;Box style={{ padding: '5px 10px', background: '#FFFFFF', border: '1px solid #CBD5E1', borderRadius: 6 }}&gt;&#10;                        &lt;Text style={{ fontSize: 11.5, color: '#0F2039' }}&gt;EDM 日志&lt;/Text&gt;&#10;                    &lt;/Box&gt;&#10;                &lt;/Box&gt;&#10;            &lt;/Box&gt;&#10;            {/* 约束边界 */}&#10;            &lt;Box style={{ position: 'absolute', left: 0, top: 418, width: 700, height: 42, background: '#FFFBEB', border: '1px solid #F59E0B', borderRadius: 10, flexDirection: 'row', alignItems: 'center', padding: '0 16px', gap: 10 }}&gt;&#10;                &lt;Text style={{ fontSize: 12.5, fontWeight: 'bold', color: '#B45309' }}&gt;约束边界&lt;/Text&gt;&#10;                &lt;Text style={{ fontSize: 12, color: '#92400E' }}&gt;只能使用已到达数据 · 版本化管理 · 全程日志可审计 —— 产业客户需要的『可审计的自主权』&lt;/Text&gt;&#10;            &lt;/Box&gt;&#10;            {/* 底部注解 */}&#10;            &lt;Text style={{ position: 'absolute', left: 0, top: 470, width: 700, fontSize: 12, color: '#64748B', textAlign: 'center' }}&gt;调用链自上而下：入口触发 → Agent 决策 → Harness 执行；数据层与约束边界全程兜底&lt;/Text&gt;&#10;            &lt;Box style={{ position: 'absolute', left: 0, top: 494, width: 700, flexDirection: 'row', justifyContent: 'center', gap: 8 }}&gt;&#10;                &lt;Box style={{ padding: '3px 10px', background: '#F1F5F9', borderRadius: 6 }}&gt;&#10;                    &lt;Text style={{ fontSize: 11.5, color: '#64748B' }}&gt;数据&lt;/Text&gt;&#10;                &lt;/Box&gt;&#10;                &lt;Box style={{ padding: '3px 10px', background: '#F1F5F9', borderRadius: 6 }}&gt;&#10;                    &lt;Text style={{ fontSize: 11.5, color: '#64748B' }}&gt;工具&lt;/Text&gt;&#10;                &lt;/Box&gt;&#10;                &lt;Box style={{ padding: '3px 10px', background: '#F1F5F9', borderRadius: 6 }}&gt;&#10;                    &lt;Text style={{ fontSize: 11.5, color: '#64748B' }}&gt;约束&lt;/Text&gt;&#10;                &lt;/Box&gt;&#10;                &lt;Box style={{ padding: '3px 10px', background: '#F1F5F9', borderRadius: 6 }}&gt;&#10;                    &lt;Text style={{ fontSize: 11.5, color: '#64748B' }}&gt;反馈&lt;/Text&gt;&#10;                &lt;/Box&gt;&#10;                &lt;Text style={{ fontSize: 11.5, color: '#94A3B8', alignSelf: 'center' }}&gt;—— Harness 四要素贯穿全层&lt;/Text&gt;&#10;            &lt;/Box&gt;&#10;        &lt;/Box&gt;&#10;&#10;        &lt;Box style={{ flex: 1, display: 'flex', flexDirection: 'column' }}&gt;&#10;            &lt;Text style={{ fontSize: 19, fontWeight: 'bold', color: '#0A1D37' }}&gt;一句话定义&lt;/Text&gt;&#10;            &lt;Box style={{ borderLeft: '4px solid #22D3EE', background: 'rgba(34,211,238,0.07)', borderRadius: '0 10px 10px 0', padding: 14, marginTop: 10 }}&gt;&#10;                &lt;Text style={{ fontSize: 15, color: '#0F2039', lineHeight: 1.8 }}&gt;Harness 把数据、工具、约束和反馈组织起来，让通用 Agent 成为负荷预测持续学习的垂直智能体。&lt;/Text&gt;&#10;            &lt;/Box&gt;&#10;            &lt;Box style={{ marginTop: 16 }}&gt;&#10;                &lt;Text style={{ fontSize: 15, fontWeight: 'bold', color: '#0A1D37' }}&gt;Agent 读取&lt;/Text&gt;&#10;                &lt;Text style={{ fontSize: 13, color: '#64748B', marginTop: 4, lineHeight: 1.7 }}&gt;新增负荷、天气、历史分布、模型表现、EDM 日志&lt;/Text&gt;&#10;                &lt;Text style={{ fontSize: 12, color: '#94A3B8', marginTop: 4 }}&gt;→ 自主判断是否学习、如何学习&lt;/Text&gt;&#10;            &lt;/Box&gt;&#10;            &lt;Box style={{ marginTop: 12, paddingBottom: 12, borderBottom: '1px solid #E2E8F0' }}&gt;&#10;                &lt;Text style={{ fontSize: 15, fontWeight: 'bold', color: '#0A1D37' }}&gt;Harness 提供&lt;/Text&gt;&#10;                &lt;Text style={{ fontSize: 13, color: '#64748B', marginTop: 4, lineHeight: 1.7 }}&gt;EDM、训练、验证与部署能力，并限制其只能使用已到达数据&lt;/Text&gt;&#10;                &lt;Text style={{ fontSize: 12, color: '#94A3B8', marginTop: 4 }}&gt;→ 能力标准化，不依赖特定算法团队&lt;/Text&gt;&#10;            &lt;/Box&gt;&#10;            &lt;Box style={{ borderLeft: '4px solid #0A1D37', background: '#F8FAFC', borderRadius: '0 10px 10px 0', padding: 14, marginTop: 16 }}&gt;&#10;                &lt;Text style={{ fontSize: 16, fontWeight: 'bold', color: '#0A1D37' }}&gt;约束是卖点&lt;/Text&gt;&#10;                &lt;Text style={{ fontSize: 13, color: '#0F2039', lineHeight: 1.8, marginTop: 6 }}&gt;Agent 可自主决定如何学习，但只能在 Harness 划定的数据边界与验证口径内行动——这正是产业客户需要的『可审计的自主权』。&lt;/Text&gt;&#10;            &lt;/Box&gt;&#10;            &lt;Box style={{ borderLeft: '4px solid #F59E0B', background: '#FFFBEB', borderRadius: '0 10px 10px 0', padding: 14, marginTop: 12 }}&gt;&#10;                &lt;Text style={{ fontSize: 16, fontWeight: 'bold', color: '#0A1D37' }}&gt;为什么是工程问题&lt;/Text&gt;&#10;                &lt;Text style={{ fontSize: 13, color: '#0F2039', lineHeight: 1.8, marginTop: 6 }}&gt;模型会不会过时，不再取决于算法团队是否在场——持续学习成为标准化、可复用、可审计的工程能力。&lt;/Text&gt;&#10;            &lt;/Box&gt;&#10;        &lt;/Box&gt;&#10;    &lt;/Box&gt;&#10;&#10;    &lt;Box style={{ flexDirection: 'row', marginTop: 12, alignItems: 'center' }}&gt;&#10;        &lt;Text style={{ fontSize: 12, color: '#94A3B8' }}&gt;负荷预测持续学习引擎 · 方案定义&lt;/Text&gt;&#10;        &lt;Box style={{ marginLeft: 'auto', flexDirection: 'row', alignItems: 'center', gap: 8 }}&gt;&#10;            &lt;Box style={{ width: 10, height: 10, background: '#22D3EE' }} /&gt;&#10;            &lt;Text style={{ fontSize: 13, color: '#64748B' }}&gt;CLE · 03 / 07&lt;/Text&gt;&#10;        &lt;/Box&gt;&#10;    &lt;/Box&gt;&#10;&lt;/Slide&gt;"/>
         <p:cNvGrpSpPr/>
         <p:nvPr/>
       </p:nvGrpSpPr>
@@ -6868,16 +6868,23 @@
         </p:nvSpPr>
         <p:spPr>
           <a:xfrm rot="0" flipH="0" flipV="0">
-            <a:off x="3933825" y="1857375"/>
-            <a:ext cx="19050" cy="628650"/>
-          </a:xfrm>
-          <a:prstGeom prst="rect">
-            <a:avLst/>
+            <a:off x="609600" y="981075"/>
+            <a:ext cx="6667500" cy="514350"/>
+          </a:xfrm>
+          <a:prstGeom prst="roundRect">
+            <a:avLst>
+              <a:gd name="adj" fmla="val 18519"/>
+            </a:avLst>
           </a:prstGeom>
           <a:solidFill>
-            <a:srgbClr val="CBD5E1"/>
+            <a:srgbClr val="F8FAFC"/>
           </a:solidFill>
-          <a:ln/>
+          <a:ln w="12700">
+            <a:solidFill>
+              <a:srgbClr val="E2E8F0"/>
+            </a:solidFill>
+            <a:prstDash val="solid"/>
+          </a:ln>
         </p:spPr>
         <p:txBody>
           <a:bodyPr/>
@@ -6886,26 +6893,37 @@
       </p:sp>
       <p:sp>
         <p:nvSpPr>
-          <p:cNvPr id="131" name=""/>
-          <p:cNvSpPr/>
-          <p:nvPr/>
-        </p:nvSpPr>
-        <p:spPr>
-          <a:xfrm rot="0" flipH="0" flipV="0">
-            <a:off x="2533650" y="3286125"/>
-            <a:ext cx="647700" cy="19050"/>
-          </a:xfrm>
-          <a:prstGeom prst="rect">
-            <a:avLst/>
-          </a:prstGeom>
-          <a:solidFill>
-            <a:srgbClr val="CBD5E1"/>
-          </a:solidFill>
-          <a:ln/>
-        </p:spPr>
-        <p:txBody>
-          <a:bodyPr/>
-          <a:p/>
+          <p:cNvPr id="131" name="" descr="{&quot;isTemplate&quot;:true,&quot;type&quot;:&quot;text&quot;}"/>
+          <p:cNvSpPr txBox="1"/>
+          <p:nvPr/>
+        </p:nvSpPr>
+        <p:spPr>
+          <a:xfrm rot="0" flipH="0" flipV="0">
+            <a:off x="895350" y="1162050"/>
+            <a:ext cx="390525" cy="161925"/>
+          </a:xfrm>
+          <a:prstGeom prst="rect"/>
+        </p:spPr>
+        <p:txBody>
+          <a:bodyPr wrap="none" lIns="0" tIns="0" rIns="0" bIns="0"/>
+          <a:p>
+            <a:pPr>
+              <a:lnSpc>
+                <a:spcPct val="100000"/>
+              </a:lnSpc>
+            </a:pPr>
+            <a:r>
+              <a:rPr lang="zh-CN" sz="1013" b="1">
+                <a:solidFill>
+                  <a:srgbClr val="475569"/>
+                </a:solidFill>
+                <a:latin typeface="Microsoft YaHei"/>
+                <a:ea typeface="Microsoft YaHei"/>
+              </a:rPr>
+              <a:t>交互层</a:t>
+            </a:r>
+            <a:endParaRPr/>
+          </a:p>
         </p:txBody>
       </p:sp>
       <p:sp>
@@ -6916,68 +6934,20 @@
         </p:nvSpPr>
         <p:spPr>
           <a:xfrm rot="0" flipH="0" flipV="0">
-            <a:off x="4705350" y="3286125"/>
-            <a:ext cx="647700" cy="19050"/>
-          </a:xfrm>
-          <a:prstGeom prst="rect">
-            <a:avLst/>
-          </a:prstGeom>
-          <a:solidFill>
-            <a:srgbClr val="CBD5E1"/>
-          </a:solidFill>
-          <a:ln/>
-        </p:spPr>
-        <p:txBody>
-          <a:bodyPr/>
-          <a:p/>
-        </p:txBody>
-      </p:sp>
-      <p:sp>
-        <p:nvSpPr>
-          <p:cNvPr id="133" name=""/>
-          <p:cNvSpPr/>
-          <p:nvPr/>
-        </p:nvSpPr>
-        <p:spPr>
-          <a:xfrm rot="0" flipH="0" flipV="0">
-            <a:off x="3933825" y="4010025"/>
-            <a:ext cx="19050" cy="704850"/>
-          </a:xfrm>
-          <a:prstGeom prst="rect">
-            <a:avLst/>
-          </a:prstGeom>
-          <a:solidFill>
-            <a:srgbClr val="CBD5E1"/>
-          </a:solidFill>
-          <a:ln/>
-        </p:spPr>
-        <p:txBody>
-          <a:bodyPr/>
-          <a:p/>
-        </p:txBody>
-      </p:sp>
-      <p:sp>
-        <p:nvSpPr>
-          <p:cNvPr id="134" name=""/>
-          <p:cNvSpPr/>
-          <p:nvPr/>
-        </p:nvSpPr>
-        <p:spPr>
-          <a:xfrm rot="0" flipH="0" flipV="0">
-            <a:off x="2609850" y="1057275"/>
-            <a:ext cx="2667000" cy="800100"/>
+            <a:off x="1562100" y="1123950"/>
+            <a:ext cx="1371600" cy="238125"/>
           </a:xfrm>
           <a:prstGeom prst="roundRect">
             <a:avLst>
-              <a:gd name="adj" fmla="val 11905"/>
+              <a:gd name="adj" fmla="val 24000"/>
             </a:avLst>
           </a:prstGeom>
           <a:solidFill>
             <a:srgbClr val="FFFFFF"/>
           </a:solidFill>
-          <a:ln w="19050">
+          <a:ln w="12700">
             <a:solidFill>
-              <a:srgbClr val="E2E8F0"/>
+              <a:srgbClr val="CBD5E1"/>
             </a:solidFill>
             <a:prstDash val="solid"/>
           </a:ln>
@@ -6989,68 +6959,21 @@
       </p:sp>
       <p:sp>
         <p:nvSpPr>
-          <p:cNvPr id="135" name="" descr="{&quot;isTemplate&quot;:true,&quot;type&quot;:&quot;text&quot;}"/>
-          <p:cNvSpPr txBox="1"/>
-          <p:nvPr/>
-        </p:nvSpPr>
-        <p:spPr>
-          <a:xfrm rot="0" flipH="0" flipV="0">
-            <a:off x="3133725" y="1200150"/>
-            <a:ext cx="1619250" cy="190500"/>
-          </a:xfrm>
-          <a:prstGeom prst="rect"/>
-        </p:spPr>
-        <p:txBody>
-          <a:bodyPr wrap="none" lIns="0" tIns="0" rIns="0" bIns="0"/>
-          <a:p>
-            <a:pPr>
-              <a:lnSpc>
-                <a:spcPct val="100000"/>
-              </a:lnSpc>
-            </a:pPr>
-            <a:r>
-              <a:rPr lang="en-US" sz="1238" b="1">
-                <a:solidFill>
-                  <a:srgbClr val="0A1D37"/>
-                </a:solidFill>
-                <a:latin typeface="Microsoft YaHei"/>
-                <a:ea typeface="Microsoft YaHei"/>
-              </a:rPr>
-              <a:t>① </a:t>
-            </a:r>
-            <a:r>
-              <a:rPr lang="zh-CN" sz="1238" b="1">
-                <a:solidFill>
-                  <a:srgbClr val="0A1D37"/>
-                </a:solidFill>
-                <a:latin typeface="Microsoft YaHei"/>
-                <a:ea typeface="Microsoft YaHei"/>
-              </a:rPr>
-              <a:t>数据上下文（读取）</a:t>
-            </a:r>
-            <a:endParaRPr/>
-          </a:p>
-        </p:txBody>
-      </p:sp>
-      <p:sp>
-        <p:nvSpPr>
-          <p:cNvPr id="136" name="" descr="{&quot;isTemplate&quot;:true,&quot;type&quot;:&quot;text&quot;}"/>
-          <p:cNvSpPr txBox="1"/>
-          <p:nvPr/>
-        </p:nvSpPr>
-        <p:spPr>
-          <a:xfrm rot="0" flipH="0" flipV="0">
-            <a:off x="2705100" y="1447800"/>
-            <a:ext cx="2476500" cy="276225"/>
-          </a:xfrm>
-          <a:prstGeom prst="rect"/>
-        </p:spPr>
-        <p:txBody>
-          <a:bodyPr wrap="square" lIns="0" tIns="0" rIns="0" bIns="0">
-            <a:normAutofit/>
-          </a:bodyPr>
-          <a:p>
-            <a:pPr algn="ctr">
+          <p:cNvPr id="133" name="" descr="{&quot;isTemplate&quot;:true,&quot;type&quot;:&quot;text&quot;}"/>
+          <p:cNvSpPr txBox="1"/>
+          <p:nvPr/>
+        </p:nvSpPr>
+        <p:spPr>
+          <a:xfrm rot="0" flipH="0" flipV="0">
+            <a:off x="1676400" y="1171575"/>
+            <a:ext cx="1143000" cy="142875"/>
+          </a:xfrm>
+          <a:prstGeom prst="rect"/>
+        </p:spPr>
+        <p:txBody>
+          <a:bodyPr wrap="none" lIns="0" tIns="0" rIns="0" bIns="0"/>
+          <a:p>
+            <a:pPr>
               <a:lnSpc>
                 <a:spcPct val="100000"/>
               </a:lnSpc>
@@ -7058,119 +6981,39 @@
             <a:r>
               <a:rPr lang="zh-CN" sz="900">
                 <a:solidFill>
-                  <a:srgbClr val="64748B"/>
-                </a:solidFill>
-                <a:latin typeface="Microsoft YaHei"/>
-                <a:ea typeface="Microsoft YaHei"/>
-              </a:rPr>
-              <a:t>新增负荷</a:t>
-            </a:r>
-            <a:r>
-              <a:rPr lang="en-US" sz="900">
-                <a:solidFill>
-                  <a:srgbClr val="64748B"/>
-                </a:solidFill>
-                <a:latin typeface="Microsoft YaHei"/>
-                <a:ea typeface="Microsoft YaHei"/>
-              </a:rPr>
-              <a:t> · </a:t>
-            </a:r>
-            <a:r>
-              <a:rPr lang="zh-CN" sz="900">
-                <a:solidFill>
-                  <a:srgbClr val="64748B"/>
-                </a:solidFill>
-                <a:latin typeface="Microsoft YaHei"/>
-                <a:ea typeface="Microsoft YaHei"/>
-              </a:rPr>
-              <a:t>天气</a:t>
-            </a:r>
-            <a:r>
-              <a:rPr lang="en-US" sz="900">
-                <a:solidFill>
-                  <a:srgbClr val="64748B"/>
-                </a:solidFill>
-                <a:latin typeface="Microsoft YaHei"/>
-                <a:ea typeface="Microsoft YaHei"/>
-              </a:rPr>
-              <a:t> · </a:t>
-            </a:r>
-            <a:r>
-              <a:rPr lang="zh-CN" sz="900">
-                <a:solidFill>
-                  <a:srgbClr val="64748B"/>
-                </a:solidFill>
-                <a:latin typeface="Microsoft YaHei"/>
-                <a:ea typeface="Microsoft YaHei"/>
-              </a:rPr>
-              <a:t>历史分布</a:t>
-            </a:r>
-            <a:r>
-              <a:rPr lang="en-US" sz="900">
-                <a:solidFill>
-                  <a:srgbClr val="64748B"/>
-                </a:solidFill>
-                <a:latin typeface="Microsoft YaHei"/>
-                <a:ea typeface="Microsoft YaHei"/>
-              </a:rPr>
-              <a:t> · </a:t>
-            </a:r>
-            <a:r>
-              <a:rPr lang="zh-CN" sz="900">
-                <a:solidFill>
-                  <a:srgbClr val="64748B"/>
-                </a:solidFill>
-                <a:latin typeface="Microsoft YaHei"/>
-                <a:ea typeface="Microsoft YaHei"/>
-              </a:rPr>
-              <a:t>模型表现</a:t>
-            </a:r>
-            <a:r>
-              <a:rPr lang="en-US" sz="900">
-                <a:solidFill>
-                  <a:srgbClr val="64748B"/>
-                </a:solidFill>
-                <a:latin typeface="Microsoft YaHei"/>
-                <a:ea typeface="Microsoft YaHei"/>
-              </a:rPr>
-              <a:t> · EDM </a:t>
-            </a:r>
-            <a:r>
-              <a:rPr lang="zh-CN" sz="900">
-                <a:solidFill>
-                  <a:srgbClr val="64748B"/>
-                </a:solidFill>
-                <a:latin typeface="Microsoft YaHei"/>
-                <a:ea typeface="Microsoft YaHei"/>
-              </a:rPr>
-              <a:t>日志</a:t>
-            </a:r>
-            <a:endParaRPr/>
-          </a:p>
-        </p:txBody>
-      </p:sp>
-      <p:sp>
-        <p:nvSpPr>
-          <p:cNvPr id="137" name=""/>
+                  <a:srgbClr val="0F2039"/>
+                </a:solidFill>
+                <a:latin typeface="Microsoft YaHei"/>
+                <a:ea typeface="Microsoft YaHei"/>
+              </a:rPr>
+              <a:t>聊天入口（自然语言）</a:t>
+            </a:r>
+            <a:endParaRPr/>
+          </a:p>
+        </p:txBody>
+      </p:sp>
+      <p:sp>
+        <p:nvSpPr>
+          <p:cNvPr id="134" name=""/>
           <p:cNvSpPr/>
           <p:nvPr/>
         </p:nvSpPr>
         <p:spPr>
           <a:xfrm rot="0" flipH="0" flipV="0">
-            <a:off x="628650" y="2867025"/>
-            <a:ext cx="1905000" cy="876300"/>
+            <a:off x="3009900" y="1123950"/>
+            <a:ext cx="971550" cy="238125"/>
           </a:xfrm>
           <a:prstGeom prst="roundRect">
             <a:avLst>
-              <a:gd name="adj" fmla="val 10870"/>
+              <a:gd name="adj" fmla="val 24000"/>
             </a:avLst>
           </a:prstGeom>
           <a:solidFill>
             <a:srgbClr val="FFFFFF"/>
           </a:solidFill>
-          <a:ln w="19050">
+          <a:ln w="12700">
             <a:solidFill>
-              <a:srgbClr val="E2E8F0"/>
+              <a:srgbClr val="CBD5E1"/>
             </a:solidFill>
             <a:prstDash val="solid"/>
           </a:ln>
@@ -7182,118 +7025,71 @@
       </p:sp>
       <p:sp>
         <p:nvSpPr>
-          <p:cNvPr id="138" name="" descr="{&quot;isTemplate&quot;:true,&quot;type&quot;:&quot;text&quot;}"/>
-          <p:cNvSpPr txBox="1"/>
-          <p:nvPr/>
-        </p:nvSpPr>
-        <p:spPr>
-          <a:xfrm rot="0" flipH="0" flipV="0">
-            <a:off x="1304925" y="3048000"/>
-            <a:ext cx="552450" cy="190500"/>
-          </a:xfrm>
-          <a:prstGeom prst="rect"/>
-        </p:spPr>
-        <p:txBody>
-          <a:bodyPr wrap="none" lIns="0" tIns="0" rIns="0" bIns="0"/>
-          <a:p>
-            <a:pPr>
-              <a:lnSpc>
-                <a:spcPct val="100000"/>
-              </a:lnSpc>
-            </a:pPr>
-            <a:r>
-              <a:rPr lang="en-US" sz="1238" b="1">
-                <a:solidFill>
-                  <a:srgbClr val="0A1D37"/>
-                </a:solidFill>
-                <a:latin typeface="Microsoft YaHei"/>
-                <a:ea typeface="Microsoft YaHei"/>
-              </a:rPr>
-              <a:t>② EDM</a:t>
-            </a:r>
-            <a:endParaRPr/>
-          </a:p>
-        </p:txBody>
-      </p:sp>
-      <p:sp>
-        <p:nvSpPr>
-          <p:cNvPr id="139" name="" descr="{&quot;isTemplate&quot;:true,&quot;type&quot;:&quot;text&quot;}"/>
-          <p:cNvSpPr txBox="1"/>
-          <p:nvPr/>
-        </p:nvSpPr>
-        <p:spPr>
-          <a:xfrm rot="0" flipH="0" flipV="0">
-            <a:off x="723900" y="3295650"/>
-            <a:ext cx="1714500" cy="276225"/>
-          </a:xfrm>
-          <a:prstGeom prst="rect"/>
-        </p:spPr>
-        <p:txBody>
-          <a:bodyPr wrap="square" lIns="0" tIns="0" rIns="0" bIns="0">
-            <a:normAutofit/>
-          </a:bodyPr>
-          <a:p>
-            <a:pPr algn="ctr">
-              <a:lnSpc>
-                <a:spcPct val="100000"/>
-              </a:lnSpc>
-            </a:pPr>
+          <p:cNvPr id="135" name="" descr="{&quot;isTemplate&quot;:true,&quot;type&quot;:&quot;text&quot;}"/>
+          <p:cNvSpPr txBox="1"/>
+          <p:nvPr/>
+        </p:nvSpPr>
+        <p:spPr>
+          <a:xfrm rot="0" flipH="0" flipV="0">
+            <a:off x="3124200" y="1171575"/>
+            <a:ext cx="742950" cy="142875"/>
+          </a:xfrm>
+          <a:prstGeom prst="rect"/>
+        </p:spPr>
+        <p:txBody>
+          <a:bodyPr wrap="none" lIns="0" tIns="0" rIns="0" bIns="0"/>
+          <a:p>
+            <a:pPr>
+              <a:lnSpc>
+                <a:spcPct val="100000"/>
+              </a:lnSpc>
+            </a:pPr>
+            <a:r>
+              <a:rPr lang="en-US" sz="900">
+                <a:solidFill>
+                  <a:srgbClr val="0F2039"/>
+                </a:solidFill>
+                <a:latin typeface="Microsoft YaHei"/>
+                <a:ea typeface="Microsoft YaHei"/>
+              </a:rPr>
+              <a:t>Cron </a:t>
+            </a:r>
             <a:r>
               <a:rPr lang="zh-CN" sz="900">
                 <a:solidFill>
-                  <a:srgbClr val="64748B"/>
-                </a:solidFill>
-                <a:latin typeface="Microsoft YaHei"/>
-                <a:ea typeface="Microsoft YaHei"/>
-              </a:rPr>
-              <a:t>数据漂移检测</a:t>
-            </a:r>
-            <a:r>
-              <a:rPr lang="en-US" sz="900">
-                <a:solidFill>
-                  <a:srgbClr val="64748B"/>
-                </a:solidFill>
-                <a:latin typeface="Microsoft YaHei"/>
-                <a:ea typeface="Microsoft YaHei"/>
-              </a:rPr>
-              <a:t> · </a:t>
-            </a:r>
-            <a:r>
-              <a:rPr lang="zh-CN" sz="900">
-                <a:solidFill>
-                  <a:srgbClr val="64748B"/>
-                </a:solidFill>
-                <a:latin typeface="Microsoft YaHei"/>
-                <a:ea typeface="Microsoft YaHei"/>
-              </a:rPr>
-              <a:t>结论沉淀为日志与上下文</a:t>
-            </a:r>
-            <a:endParaRPr/>
-          </a:p>
-        </p:txBody>
-      </p:sp>
-      <p:sp>
-        <p:nvSpPr>
-          <p:cNvPr id="140" name=""/>
+                  <a:srgbClr val="0F2039"/>
+                </a:solidFill>
+                <a:latin typeface="Microsoft YaHei"/>
+                <a:ea typeface="Microsoft YaHei"/>
+              </a:rPr>
+              <a:t>定时任务</a:t>
+            </a:r>
+            <a:endParaRPr/>
+          </a:p>
+        </p:txBody>
+      </p:sp>
+      <p:sp>
+        <p:nvSpPr>
+          <p:cNvPr id="136" name=""/>
           <p:cNvSpPr/>
           <p:nvPr/>
         </p:nvSpPr>
         <p:spPr>
           <a:xfrm rot="0" flipH="0" flipV="0">
-            <a:off x="5353050" y="2867025"/>
-            <a:ext cx="1905000" cy="876300"/>
+            <a:off x="4057650" y="1123950"/>
+            <a:ext cx="971550" cy="238125"/>
           </a:xfrm>
           <a:prstGeom prst="roundRect">
             <a:avLst>
-              <a:gd name="adj" fmla="val 10870"/>
+              <a:gd name="adj" fmla="val 24000"/>
             </a:avLst>
           </a:prstGeom>
           <a:solidFill>
             <a:srgbClr val="FFFFFF"/>
           </a:solidFill>
-          <a:ln w="19050">
+          <a:ln w="12700">
             <a:solidFill>
-              <a:srgbClr val="E2E8F0"/>
+              <a:srgbClr val="CBD5E1"/>
             </a:solidFill>
             <a:prstDash val="solid"/>
           </a:ln>
@@ -7305,249 +7101,153 @@
       </p:sp>
       <p:sp>
         <p:nvSpPr>
-          <p:cNvPr id="141" name="" descr="{&quot;isTemplate&quot;:true,&quot;type&quot;:&quot;text&quot;}"/>
-          <p:cNvSpPr txBox="1"/>
-          <p:nvPr/>
-        </p:nvSpPr>
-        <p:spPr>
-          <a:xfrm rot="0" flipH="0" flipV="0">
-            <a:off x="5886450" y="3114675"/>
-            <a:ext cx="838200" cy="190500"/>
-          </a:xfrm>
-          <a:prstGeom prst="rect"/>
-        </p:spPr>
-        <p:txBody>
-          <a:bodyPr wrap="none" lIns="0" tIns="0" rIns="0" bIns="0"/>
-          <a:p>
-            <a:pPr>
-              <a:lnSpc>
-                <a:spcPct val="100000"/>
-              </a:lnSpc>
-            </a:pPr>
-            <a:r>
-              <a:rPr lang="en-US" sz="1238" b="1">
-                <a:solidFill>
-                  <a:srgbClr val="0A1D37"/>
-                </a:solidFill>
-                <a:latin typeface="Microsoft YaHei"/>
-                <a:ea typeface="Microsoft YaHei"/>
-              </a:rPr>
-              <a:t>③ </a:t>
-            </a:r>
-            <a:r>
-              <a:rPr lang="zh-CN" sz="1238" b="1">
-                <a:solidFill>
-                  <a:srgbClr val="0A1D37"/>
-                </a:solidFill>
-                <a:latin typeface="Microsoft YaHei"/>
-                <a:ea typeface="Microsoft YaHei"/>
-              </a:rPr>
-              <a:t>训练验证</a:t>
-            </a:r>
-            <a:endParaRPr/>
-          </a:p>
-        </p:txBody>
-      </p:sp>
-      <p:sp>
-        <p:nvSpPr>
-          <p:cNvPr id="142" name="" descr="{&quot;isTemplate&quot;:true,&quot;type&quot;:&quot;text&quot;}"/>
-          <p:cNvSpPr txBox="1"/>
-          <p:nvPr/>
-        </p:nvSpPr>
-        <p:spPr>
-          <a:xfrm rot="0" flipH="0" flipV="0">
-            <a:off x="5562600" y="3362325"/>
-            <a:ext cx="1485900" cy="142875"/>
-          </a:xfrm>
-          <a:prstGeom prst="rect"/>
-        </p:spPr>
-        <p:txBody>
-          <a:bodyPr wrap="none" lIns="0" tIns="0" rIns="0" bIns="0"/>
-          <a:p>
-            <a:pPr algn="ctr">
-              <a:lnSpc>
-                <a:spcPct val="100000"/>
-              </a:lnSpc>
-            </a:pPr>
+          <p:cNvPr id="137" name="" descr="{&quot;isTemplate&quot;:true,&quot;type&quot;:&quot;text&quot;}"/>
+          <p:cNvSpPr txBox="1"/>
+          <p:nvPr/>
+        </p:nvSpPr>
+        <p:spPr>
+          <a:xfrm rot="0" flipH="0" flipV="0">
+            <a:off x="4171950" y="1171575"/>
+            <a:ext cx="742950" cy="142875"/>
+          </a:xfrm>
+          <a:prstGeom prst="rect"/>
+        </p:spPr>
+        <p:txBody>
+          <a:bodyPr wrap="none" lIns="0" tIns="0" rIns="0" bIns="0"/>
+          <a:p>
+            <a:pPr>
+              <a:lnSpc>
+                <a:spcPct val="100000"/>
+              </a:lnSpc>
+            </a:pPr>
+            <a:r>
+              <a:rPr lang="en-US" sz="900">
+                <a:solidFill>
+                  <a:srgbClr val="0F2039"/>
+                </a:solidFill>
+                <a:latin typeface="Microsoft YaHei"/>
+                <a:ea typeface="Microsoft YaHei"/>
+              </a:rPr>
+              <a:t>EDM </a:t>
+            </a:r>
             <a:r>
               <a:rPr lang="zh-CN" sz="900">
                 <a:solidFill>
-                  <a:srgbClr val="64748B"/>
-                </a:solidFill>
-                <a:latin typeface="Microsoft YaHei"/>
-                <a:ea typeface="Microsoft YaHei"/>
-              </a:rPr>
-              <a:t>训练</a:t>
-            </a:r>
-            <a:r>
-              <a:rPr lang="en-US" sz="900">
-                <a:solidFill>
-                  <a:srgbClr val="64748B"/>
-                </a:solidFill>
-                <a:latin typeface="Microsoft YaHei"/>
-                <a:ea typeface="Microsoft YaHei"/>
-              </a:rPr>
-              <a:t> Skill · </a:t>
-            </a:r>
-            <a:r>
-              <a:rPr lang="zh-CN" sz="900">
-                <a:solidFill>
-                  <a:srgbClr val="64748B"/>
-                </a:solidFill>
-                <a:latin typeface="Microsoft YaHei"/>
-                <a:ea typeface="Microsoft YaHei"/>
-              </a:rPr>
-              <a:t>时序验证统一口径</a:t>
-            </a:r>
-            <a:endParaRPr/>
-          </a:p>
-        </p:txBody>
-      </p:sp>
-      <p:sp>
-        <p:nvSpPr>
-          <p:cNvPr id="143" name=""/>
+                  <a:srgbClr val="0F2039"/>
+                </a:solidFill>
+                <a:latin typeface="Microsoft YaHei"/>
+                <a:ea typeface="Microsoft YaHei"/>
+              </a:rPr>
+              <a:t>日志沉淀</a:t>
+            </a:r>
+            <a:endParaRPr/>
+          </a:p>
+        </p:txBody>
+      </p:sp>
+      <p:sp>
+        <p:nvSpPr>
+          <p:cNvPr id="138" name="" descr="{&quot;isTemplate&quot;:true,&quot;type&quot;:&quot;text&quot;}"/>
+          <p:cNvSpPr txBox="1"/>
+          <p:nvPr/>
+        </p:nvSpPr>
+        <p:spPr>
+          <a:xfrm rot="0" flipH="0" flipV="0">
+            <a:off x="3419475" y="1504950"/>
+            <a:ext cx="66675" cy="161925"/>
+          </a:xfrm>
+          <a:prstGeom prst="rect"/>
+        </p:spPr>
+        <p:txBody>
+          <a:bodyPr wrap="none" lIns="0" tIns="0" rIns="0" bIns="0"/>
+          <a:p>
+            <a:pPr>
+              <a:lnSpc>
+                <a:spcPct val="100000"/>
+              </a:lnSpc>
+            </a:pPr>
+            <a:r>
+              <a:rPr sz="1050">
+                <a:solidFill>
+                  <a:srgbClr val="94A3B8"/>
+                </a:solidFill>
+                <a:latin typeface="Microsoft YaHei"/>
+                <a:ea typeface="Microsoft YaHei"/>
+              </a:rPr>
+              <a:t>↓</a:t>
+            </a:r>
+            <a:endParaRPr/>
+          </a:p>
+        </p:txBody>
+      </p:sp>
+      <p:sp>
+        <p:nvSpPr>
+          <p:cNvPr id="139" name="" descr="{&quot;isTemplate&quot;:true,&quot;type&quot;:&quot;text&quot;}"/>
+          <p:cNvSpPr txBox="1"/>
+          <p:nvPr/>
+        </p:nvSpPr>
+        <p:spPr>
+          <a:xfrm rot="0" flipH="0" flipV="0">
+            <a:off x="3543300" y="1514475"/>
+            <a:ext cx="933450" cy="133350"/>
+          </a:xfrm>
+          <a:prstGeom prst="rect"/>
+        </p:spPr>
+        <p:txBody>
+          <a:bodyPr wrap="none" lIns="0" tIns="0" rIns="0" bIns="0"/>
+          <a:p>
+            <a:pPr>
+              <a:lnSpc>
+                <a:spcPct val="100000"/>
+              </a:lnSpc>
+            </a:pPr>
+            <a:r>
+              <a:rPr lang="zh-CN" sz="825">
+                <a:solidFill>
+                  <a:srgbClr val="94A3B8"/>
+                </a:solidFill>
+                <a:latin typeface="Microsoft YaHei"/>
+                <a:ea typeface="Microsoft YaHei"/>
+              </a:rPr>
+              <a:t>自然语言</a:t>
+            </a:r>
+            <a:r>
+              <a:rPr lang="en-US" sz="825">
+                <a:solidFill>
+                  <a:srgbClr val="94A3B8"/>
+                </a:solidFill>
+                <a:latin typeface="Microsoft YaHei"/>
+                <a:ea typeface="Microsoft YaHei"/>
+              </a:rPr>
+              <a:t> / </a:t>
+            </a:r>
+            <a:r>
+              <a:rPr lang="zh-CN" sz="825">
+                <a:solidFill>
+                  <a:srgbClr val="94A3B8"/>
+                </a:solidFill>
+                <a:latin typeface="Microsoft YaHei"/>
+                <a:ea typeface="Microsoft YaHei"/>
+              </a:rPr>
+              <a:t>定时触发</a:t>
+            </a:r>
+            <a:endParaRPr/>
+          </a:p>
+        </p:txBody>
+      </p:sp>
+      <p:sp>
+        <p:nvSpPr>
+          <p:cNvPr id="140" name=""/>
           <p:cNvSpPr/>
           <p:nvPr/>
         </p:nvSpPr>
         <p:spPr>
           <a:xfrm rot="0" flipH="0" flipV="0">
-            <a:off x="2609850" y="4714875"/>
-            <a:ext cx="2667000" cy="800100"/>
+            <a:off x="609600" y="1666875"/>
+            <a:ext cx="6667500" cy="571500"/>
           </a:xfrm>
           <a:prstGeom prst="roundRect">
             <a:avLst>
-              <a:gd name="adj" fmla="val 11905"/>
-            </a:avLst>
-          </a:prstGeom>
-          <a:solidFill>
-            <a:srgbClr val="FFFFFF"/>
-          </a:solidFill>
-          <a:ln w="19050">
-            <a:solidFill>
-              <a:srgbClr val="E2E8F0"/>
-            </a:solidFill>
-            <a:prstDash val="solid"/>
-          </a:ln>
-        </p:spPr>
-        <p:txBody>
-          <a:bodyPr/>
-          <a:p/>
-        </p:txBody>
-      </p:sp>
-      <p:sp>
-        <p:nvSpPr>
-          <p:cNvPr id="144" name="" descr="{&quot;isTemplate&quot;:true,&quot;type&quot;:&quot;text&quot;}"/>
-          <p:cNvSpPr txBox="1"/>
-          <p:nvPr/>
-        </p:nvSpPr>
-        <p:spPr>
-          <a:xfrm rot="0" flipH="0" flipV="0">
-            <a:off x="3524250" y="4924425"/>
-            <a:ext cx="838200" cy="190500"/>
-          </a:xfrm>
-          <a:prstGeom prst="rect"/>
-        </p:spPr>
-        <p:txBody>
-          <a:bodyPr wrap="none" lIns="0" tIns="0" rIns="0" bIns="0"/>
-          <a:p>
-            <a:pPr>
-              <a:lnSpc>
-                <a:spcPct val="100000"/>
-              </a:lnSpc>
-            </a:pPr>
-            <a:r>
-              <a:rPr lang="en-US" sz="1238" b="1">
-                <a:solidFill>
-                  <a:srgbClr val="0A1D37"/>
-                </a:solidFill>
-                <a:latin typeface="Microsoft YaHei"/>
-                <a:ea typeface="Microsoft YaHei"/>
-              </a:rPr>
-              <a:t>④ </a:t>
-            </a:r>
-            <a:r>
-              <a:rPr lang="zh-CN" sz="1238" b="1">
-                <a:solidFill>
-                  <a:srgbClr val="0A1D37"/>
-                </a:solidFill>
-                <a:latin typeface="Microsoft YaHei"/>
-                <a:ea typeface="Microsoft YaHei"/>
-              </a:rPr>
-              <a:t>发布约束</a:t>
-            </a:r>
-            <a:endParaRPr/>
-          </a:p>
-        </p:txBody>
-      </p:sp>
-      <p:sp>
-        <p:nvSpPr>
-          <p:cNvPr id="145" name="" descr="{&quot;isTemplate&quot;:true,&quot;type&quot;:&quot;text&quot;}"/>
-          <p:cNvSpPr txBox="1"/>
-          <p:nvPr/>
-        </p:nvSpPr>
-        <p:spPr>
-          <a:xfrm rot="0" flipH="0" flipV="0">
-            <a:off x="3095625" y="5172075"/>
-            <a:ext cx="1704975" cy="142875"/>
-          </a:xfrm>
-          <a:prstGeom prst="rect"/>
-        </p:spPr>
-        <p:txBody>
-          <a:bodyPr wrap="none" lIns="0" tIns="0" rIns="0" bIns="0"/>
-          <a:p>
-            <a:pPr algn="ctr">
-              <a:lnSpc>
-                <a:spcPct val="100000"/>
-              </a:lnSpc>
-            </a:pPr>
-            <a:r>
-              <a:rPr lang="zh-CN" sz="900">
-                <a:solidFill>
-                  <a:srgbClr val="64748B"/>
-                </a:solidFill>
-                <a:latin typeface="Microsoft YaHei"/>
-                <a:ea typeface="Microsoft YaHei"/>
-              </a:rPr>
-              <a:t>只能使用已到达数据</a:t>
-            </a:r>
-            <a:r>
-              <a:rPr lang="en-US" sz="900">
-                <a:solidFill>
-                  <a:srgbClr val="64748B"/>
-                </a:solidFill>
-                <a:latin typeface="Microsoft YaHei"/>
-                <a:ea typeface="Microsoft YaHei"/>
-              </a:rPr>
-              <a:t> · </a:t>
-            </a:r>
-            <a:r>
-              <a:rPr lang="zh-CN" sz="900">
-                <a:solidFill>
-                  <a:srgbClr val="64748B"/>
-                </a:solidFill>
-                <a:latin typeface="Microsoft YaHei"/>
-                <a:ea typeface="Microsoft YaHei"/>
-              </a:rPr>
-              <a:t>版本化管理</a:t>
-            </a:r>
-            <a:endParaRPr/>
-          </a:p>
-        </p:txBody>
-      </p:sp>
-      <p:sp>
-        <p:nvSpPr>
-          <p:cNvPr id="146" name=""/>
-          <p:cNvSpPr/>
-          <p:nvPr/>
-        </p:nvSpPr>
-        <p:spPr>
-          <a:xfrm rot="0" flipH="0" flipV="0">
-            <a:off x="3181350" y="2486025"/>
-            <a:ext cx="1524000" cy="1524000"/>
-          </a:xfrm>
-          <a:prstGeom prst="roundRect">
-            <a:avLst>
-              <a:gd name="adj" fmla="val 50000"/>
+              <a:gd name="adj" fmla="val 16667"/>
             </a:avLst>
           </a:prstGeom>
           <a:solidFill>
@@ -7562,62 +7262,127 @@
       </p:sp>
       <p:sp>
         <p:nvSpPr>
-          <p:cNvPr id="147" name="" descr="{&quot;isTemplate&quot;:true,&quot;type&quot;:&quot;text&quot;}"/>
-          <p:cNvSpPr txBox="1"/>
-          <p:nvPr/>
-        </p:nvSpPr>
-        <p:spPr>
-          <a:xfrm rot="0" flipH="0" flipV="0">
-            <a:off x="3581400" y="3000375"/>
-            <a:ext cx="733425" cy="314325"/>
-          </a:xfrm>
-          <a:prstGeom prst="rect"/>
-        </p:spPr>
-        <p:txBody>
-          <a:bodyPr wrap="none" lIns="0" tIns="0" rIns="0" bIns="0"/>
-          <a:p>
-            <a:pPr>
-              <a:lnSpc>
-                <a:spcPct val="100000"/>
-              </a:lnSpc>
-            </a:pPr>
-            <a:r>
-              <a:rPr lang="en-US" sz="2025" b="1">
+          <p:cNvPr id="141" name="" descr="{&quot;isTemplate&quot;:true,&quot;type&quot;:&quot;text&quot;}"/>
+          <p:cNvSpPr txBox="1"/>
+          <p:nvPr/>
+        </p:nvSpPr>
+        <p:spPr>
+          <a:xfrm rot="0" flipH="0" flipV="0">
+            <a:off x="819150" y="1876425"/>
+            <a:ext cx="533400" cy="161925"/>
+          </a:xfrm>
+          <a:prstGeom prst="rect"/>
+        </p:spPr>
+        <p:txBody>
+          <a:bodyPr wrap="none" lIns="0" tIns="0" rIns="0" bIns="0"/>
+          <a:p>
+            <a:pPr>
+              <a:lnSpc>
+                <a:spcPct val="100000"/>
+              </a:lnSpc>
+            </a:pPr>
+            <a:r>
+              <a:rPr lang="en-US" sz="1013" b="1">
                 <a:solidFill>
                   <a:srgbClr val="0A1D37"/>
                 </a:solidFill>
                 <a:latin typeface="Microsoft YaHei"/>
                 <a:ea typeface="Microsoft YaHei"/>
               </a:rPr>
-              <a:t>Agent</a:t>
-            </a:r>
-            <a:endParaRPr/>
-          </a:p>
-        </p:txBody>
-      </p:sp>
-      <p:sp>
-        <p:nvSpPr>
-          <p:cNvPr id="148" name="" descr="{&quot;isTemplate&quot;:true,&quot;type&quot;:&quot;text&quot;}"/>
-          <p:cNvSpPr txBox="1"/>
-          <p:nvPr/>
-        </p:nvSpPr>
-        <p:spPr>
-          <a:xfrm rot="0" flipH="0" flipV="0">
-            <a:off x="3657600" y="3352800"/>
-            <a:ext cx="571500" cy="142875"/>
-          </a:xfrm>
-          <a:prstGeom prst="rect"/>
-        </p:spPr>
-        <p:txBody>
-          <a:bodyPr wrap="none" lIns="0" tIns="0" rIns="0" bIns="0"/>
-          <a:p>
-            <a:pPr>
-              <a:lnSpc>
-                <a:spcPct val="100000"/>
-              </a:lnSpc>
-            </a:pPr>
-            <a:r>
-              <a:rPr lang="zh-CN" sz="900">
+              <a:t>Agent </a:t>
+            </a:r>
+            <a:r>
+              <a:rPr lang="zh-CN" sz="1013" b="1">
+                <a:solidFill>
+                  <a:srgbClr val="0A1D37"/>
+                </a:solidFill>
+                <a:latin typeface="Microsoft YaHei"/>
+                <a:ea typeface="Microsoft YaHei"/>
+              </a:rPr>
+              <a:t>层</a:t>
+            </a:r>
+            <a:endParaRPr/>
+          </a:p>
+        </p:txBody>
+      </p:sp>
+      <p:sp>
+        <p:nvSpPr>
+          <p:cNvPr id="142" name="" descr="{&quot;isTemplate&quot;:true,&quot;type&quot;:&quot;text&quot;}"/>
+          <p:cNvSpPr txBox="1"/>
+          <p:nvPr/>
+        </p:nvSpPr>
+        <p:spPr>
+          <a:xfrm rot="0" flipH="0" flipV="0">
+            <a:off x="1562100" y="1790700"/>
+            <a:ext cx="5715000" cy="171450"/>
+          </a:xfrm>
+          <a:prstGeom prst="rect"/>
+        </p:spPr>
+        <p:txBody>
+          <a:bodyPr wrap="none" lIns="0" tIns="0" rIns="0" bIns="0"/>
+          <a:p>
+            <a:pPr>
+              <a:lnSpc>
+                <a:spcPct val="100000"/>
+              </a:lnSpc>
+            </a:pPr>
+            <a:r>
+              <a:rPr lang="zh-CN" sz="1125" b="1">
+                <a:solidFill>
+                  <a:srgbClr val="0A1D37"/>
+                </a:solidFill>
+                <a:latin typeface="Microsoft YaHei"/>
+                <a:ea typeface="Microsoft YaHei"/>
+              </a:rPr>
+              <a:t>垂直智能体</a:t>
+            </a:r>
+            <a:r>
+              <a:rPr lang="en-US" sz="1125" b="1">
+                <a:solidFill>
+                  <a:srgbClr val="0A1D37"/>
+                </a:solidFill>
+                <a:latin typeface="Microsoft YaHei"/>
+                <a:ea typeface="Microsoft YaHei"/>
+              </a:rPr>
+              <a:t> —— </a:t>
+            </a:r>
+            <a:r>
+              <a:rPr lang="zh-CN" sz="1125" b="1">
+                <a:solidFill>
+                  <a:srgbClr val="0A1D37"/>
+                </a:solidFill>
+                <a:latin typeface="Microsoft YaHei"/>
+                <a:ea typeface="Microsoft YaHei"/>
+              </a:rPr>
+              <a:t>决定何时学、怎么学</a:t>
+            </a:r>
+            <a:endParaRPr/>
+          </a:p>
+        </p:txBody>
+      </p:sp>
+      <p:sp>
+        <p:nvSpPr>
+          <p:cNvPr id="143" name="" descr="{&quot;isTemplate&quot;:true,&quot;type&quot;:&quot;text&quot;}"/>
+          <p:cNvSpPr txBox="1"/>
+          <p:nvPr/>
+        </p:nvSpPr>
+        <p:spPr>
+          <a:xfrm rot="0" flipH="0" flipV="0">
+            <a:off x="1562100" y="1990725"/>
+            <a:ext cx="5715000" cy="133350"/>
+          </a:xfrm>
+          <a:prstGeom prst="rect"/>
+        </p:spPr>
+        <p:txBody>
+          <a:bodyPr wrap="none" lIns="0" tIns="0" rIns="0" bIns="0"/>
+          <a:p>
+            <a:pPr>
+              <a:lnSpc>
+                <a:spcPct val="100000"/>
+              </a:lnSpc>
+            </a:pPr>
+            <a:r>
+              <a:rPr lang="zh-CN" sz="863">
                 <a:solidFill>
                   <a:srgbClr val="0A1D37">
                     <a:alpha val="72000"/>
@@ -7626,22 +7391,1658 @@
                 <a:latin typeface="Microsoft YaHei"/>
                 <a:ea typeface="Microsoft YaHei"/>
               </a:rPr>
-              <a:t>垂直智能体</a:t>
-            </a:r>
-            <a:endParaRPr/>
-          </a:p>
-        </p:txBody>
-      </p:sp>
-      <p:sp>
-        <p:nvSpPr>
-          <p:cNvPr id="149" name="" descr="{&quot;isTemplate&quot;:true,&quot;type&quot;:&quot;text&quot;}"/>
-          <p:cNvSpPr txBox="1"/>
-          <p:nvPr/>
-        </p:nvSpPr>
-        <p:spPr>
-          <a:xfrm rot="0" flipH="0" flipV="0">
-            <a:off x="609600" y="5610225"/>
-            <a:ext cx="6667500" cy="152400"/>
+              <a:t>读取数据上下文与</a:t>
+            </a:r>
+            <a:r>
+              <a:rPr lang="en-US" sz="863">
+                <a:solidFill>
+                  <a:srgbClr val="0A1D37">
+                    <a:alpha val="72000"/>
+                  </a:srgbClr>
+                </a:solidFill>
+                <a:latin typeface="Microsoft YaHei"/>
+                <a:ea typeface="Microsoft YaHei"/>
+              </a:rPr>
+              <a:t> EDM </a:t>
+            </a:r>
+            <a:r>
+              <a:rPr lang="zh-CN" sz="863">
+                <a:solidFill>
+                  <a:srgbClr val="0A1D37">
+                    <a:alpha val="72000"/>
+                  </a:srgbClr>
+                </a:solidFill>
+                <a:latin typeface="Microsoft YaHei"/>
+                <a:ea typeface="Microsoft YaHei"/>
+              </a:rPr>
+              <a:t>日志</a:t>
+            </a:r>
+            <a:r>
+              <a:rPr lang="en-US" sz="863">
+                <a:solidFill>
+                  <a:srgbClr val="0A1D37">
+                    <a:alpha val="72000"/>
+                  </a:srgbClr>
+                </a:solidFill>
+                <a:latin typeface="Microsoft YaHei"/>
+                <a:ea typeface="Microsoft YaHei"/>
+              </a:rPr>
+              <a:t> · </a:t>
+            </a:r>
+            <a:r>
+              <a:rPr lang="zh-CN" sz="863">
+                <a:solidFill>
+                  <a:srgbClr val="0A1D37">
+                    <a:alpha val="72000"/>
+                  </a:srgbClr>
+                </a:solidFill>
+                <a:latin typeface="Microsoft YaHei"/>
+                <a:ea typeface="Microsoft YaHei"/>
+              </a:rPr>
+              <a:t>在约束内自主判断是否更新、如何更新</a:t>
+            </a:r>
+            <a:endParaRPr/>
+          </a:p>
+        </p:txBody>
+      </p:sp>
+      <p:sp>
+        <p:nvSpPr>
+          <p:cNvPr id="144" name="" descr="{&quot;isTemplate&quot;:true,&quot;type&quot;:&quot;text&quot;}"/>
+          <p:cNvSpPr txBox="1"/>
+          <p:nvPr/>
+        </p:nvSpPr>
+        <p:spPr>
+          <a:xfrm rot="0" flipH="0" flipV="0">
+            <a:off x="3257550" y="2247900"/>
+            <a:ext cx="66675" cy="161925"/>
+          </a:xfrm>
+          <a:prstGeom prst="rect"/>
+        </p:spPr>
+        <p:txBody>
+          <a:bodyPr wrap="none" lIns="0" tIns="0" rIns="0" bIns="0"/>
+          <a:p>
+            <a:pPr>
+              <a:lnSpc>
+                <a:spcPct val="100000"/>
+              </a:lnSpc>
+            </a:pPr>
+            <a:r>
+              <a:rPr sz="1050">
+                <a:solidFill>
+                  <a:srgbClr val="94A3B8"/>
+                </a:solidFill>
+                <a:latin typeface="Microsoft YaHei"/>
+                <a:ea typeface="Microsoft YaHei"/>
+              </a:rPr>
+              <a:t>↓</a:t>
+            </a:r>
+            <a:endParaRPr/>
+          </a:p>
+        </p:txBody>
+      </p:sp>
+      <p:sp>
+        <p:nvSpPr>
+          <p:cNvPr id="145" name="" descr="{&quot;isTemplate&quot;:true,&quot;type&quot;:&quot;text&quot;}"/>
+          <p:cNvSpPr txBox="1"/>
+          <p:nvPr/>
+        </p:nvSpPr>
+        <p:spPr>
+          <a:xfrm rot="0" flipH="0" flipV="0">
+            <a:off x="3381375" y="2257425"/>
+            <a:ext cx="1247775" cy="133350"/>
+          </a:xfrm>
+          <a:prstGeom prst="rect"/>
+        </p:spPr>
+        <p:txBody>
+          <a:bodyPr wrap="none" lIns="0" tIns="0" rIns="0" bIns="0"/>
+          <a:p>
+            <a:pPr>
+              <a:lnSpc>
+                <a:spcPct val="100000"/>
+              </a:lnSpc>
+            </a:pPr>
+            <a:r>
+              <a:rPr lang="zh-CN" sz="825">
+                <a:solidFill>
+                  <a:srgbClr val="94A3B8"/>
+                </a:solidFill>
+                <a:latin typeface="Microsoft YaHei"/>
+                <a:ea typeface="Microsoft YaHei"/>
+              </a:rPr>
+              <a:t>调用训练</a:t>
+            </a:r>
+            <a:r>
+              <a:rPr lang="en-US" sz="825">
+                <a:solidFill>
+                  <a:srgbClr val="94A3B8"/>
+                </a:solidFill>
+                <a:latin typeface="Microsoft YaHei"/>
+                <a:ea typeface="Microsoft YaHei"/>
+              </a:rPr>
+              <a:t> · </a:t>
+            </a:r>
+            <a:r>
+              <a:rPr lang="zh-CN" sz="825">
+                <a:solidFill>
+                  <a:srgbClr val="94A3B8"/>
+                </a:solidFill>
+                <a:latin typeface="Microsoft YaHei"/>
+                <a:ea typeface="Microsoft YaHei"/>
+              </a:rPr>
+              <a:t>验证</a:t>
+            </a:r>
+            <a:r>
+              <a:rPr lang="en-US" sz="825">
+                <a:solidFill>
+                  <a:srgbClr val="94A3B8"/>
+                </a:solidFill>
+                <a:latin typeface="Microsoft YaHei"/>
+                <a:ea typeface="Microsoft YaHei"/>
+              </a:rPr>
+              <a:t> · </a:t>
+            </a:r>
+            <a:r>
+              <a:rPr lang="zh-CN" sz="825">
+                <a:solidFill>
+                  <a:srgbClr val="94A3B8"/>
+                </a:solidFill>
+                <a:latin typeface="Microsoft YaHei"/>
+                <a:ea typeface="Microsoft YaHei"/>
+              </a:rPr>
+              <a:t>部署</a:t>
+            </a:r>
+            <a:r>
+              <a:rPr lang="en-US" sz="825">
+                <a:solidFill>
+                  <a:srgbClr val="94A3B8"/>
+                </a:solidFill>
+                <a:latin typeface="Microsoft YaHei"/>
+                <a:ea typeface="Microsoft YaHei"/>
+              </a:rPr>
+              <a:t> Skill</a:t>
+            </a:r>
+            <a:endParaRPr/>
+          </a:p>
+        </p:txBody>
+      </p:sp>
+      <p:sp>
+        <p:nvSpPr>
+          <p:cNvPr id="146" name=""/>
+          <p:cNvSpPr/>
+          <p:nvPr/>
+        </p:nvSpPr>
+        <p:spPr>
+          <a:xfrm rot="0" flipH="0" flipV="0">
+            <a:off x="609600" y="2409825"/>
+            <a:ext cx="6667500" cy="1638300"/>
+          </a:xfrm>
+          <a:prstGeom prst="roundRect">
+            <a:avLst>
+              <a:gd name="adj" fmla="val 6977"/>
+            </a:avLst>
+          </a:prstGeom>
+          <a:solidFill>
+            <a:srgbClr val="0A1D37"/>
+          </a:solidFill>
+          <a:ln/>
+        </p:spPr>
+        <p:txBody>
+          <a:bodyPr/>
+          <a:p/>
+        </p:txBody>
+      </p:sp>
+      <p:sp>
+        <p:nvSpPr>
+          <p:cNvPr id="147" name="" descr="{&quot;isTemplate&quot;:true,&quot;type&quot;:&quot;text&quot;}"/>
+          <p:cNvSpPr txBox="1"/>
+          <p:nvPr/>
+        </p:nvSpPr>
+        <p:spPr>
+          <a:xfrm rot="0" flipH="0" flipV="0">
+            <a:off x="742950" y="2543175"/>
+            <a:ext cx="1038225" cy="171450"/>
+          </a:xfrm>
+          <a:prstGeom prst="rect"/>
+        </p:spPr>
+        <p:txBody>
+          <a:bodyPr wrap="none" lIns="0" tIns="0" rIns="0" bIns="0"/>
+          <a:p>
+            <a:pPr>
+              <a:lnSpc>
+                <a:spcPct val="100000"/>
+              </a:lnSpc>
+            </a:pPr>
+            <a:r>
+              <a:rPr lang="en-US" sz="1125" b="1">
+                <a:solidFill>
+                  <a:srgbClr val="F8FAFC"/>
+                </a:solidFill>
+                <a:latin typeface="Microsoft YaHei"/>
+                <a:ea typeface="Microsoft YaHei"/>
+              </a:rPr>
+              <a:t>Harness </a:t>
+            </a:r>
+            <a:r>
+              <a:rPr lang="zh-CN" sz="1125" b="1">
+                <a:solidFill>
+                  <a:srgbClr val="F8FAFC"/>
+                </a:solidFill>
+                <a:latin typeface="Microsoft YaHei"/>
+                <a:ea typeface="Microsoft YaHei"/>
+              </a:rPr>
+              <a:t>能力层</a:t>
+            </a:r>
+            <a:endParaRPr/>
+          </a:p>
+        </p:txBody>
+      </p:sp>
+      <p:sp>
+        <p:nvSpPr>
+          <p:cNvPr id="148" name="" descr="{&quot;isTemplate&quot;:true,&quot;type&quot;:&quot;text&quot;}"/>
+          <p:cNvSpPr txBox="1"/>
+          <p:nvPr/>
+        </p:nvSpPr>
+        <p:spPr>
+          <a:xfrm rot="0" flipH="0" flipV="0">
+            <a:off x="5057775" y="2562225"/>
+            <a:ext cx="2085975" cy="133350"/>
+          </a:xfrm>
+          <a:prstGeom prst="rect"/>
+        </p:spPr>
+        <p:txBody>
+          <a:bodyPr wrap="none" lIns="0" tIns="0" rIns="0" bIns="0"/>
+          <a:p>
+            <a:pPr>
+              <a:lnSpc>
+                <a:spcPct val="100000"/>
+              </a:lnSpc>
+            </a:pPr>
+            <a:r>
+              <a:rPr lang="zh-CN" sz="863">
+                <a:solidFill>
+                  <a:srgbClr val="22D3EE"/>
+                </a:solidFill>
+                <a:latin typeface="Microsoft YaHei"/>
+                <a:ea typeface="Microsoft YaHei"/>
+              </a:rPr>
+              <a:t>把持续学习变成标准化、可复用的工程能力</a:t>
+            </a:r>
+            <a:endParaRPr/>
+          </a:p>
+        </p:txBody>
+      </p:sp>
+      <p:sp>
+        <p:nvSpPr>
+          <p:cNvPr id="149" name=""/>
+          <p:cNvSpPr/>
+          <p:nvPr/>
+        </p:nvSpPr>
+        <p:spPr>
+          <a:xfrm rot="0" flipH="0" flipV="0">
+            <a:off x="742950" y="2828925"/>
+            <a:ext cx="1543050" cy="647700"/>
+          </a:xfrm>
+          <a:prstGeom prst="roundRect">
+            <a:avLst>
+              <a:gd name="adj" fmla="val 11765"/>
+            </a:avLst>
+          </a:prstGeom>
+          <a:solidFill>
+            <a:srgbClr val="22D3EE">
+              <a:alpha val="8000"/>
+            </a:srgbClr>
+          </a:solidFill>
+          <a:ln w="12700">
+            <a:solidFill>
+              <a:srgbClr val="22D3EE">
+                <a:alpha val="35000"/>
+              </a:srgbClr>
+            </a:solidFill>
+            <a:prstDash val="solid"/>
+          </a:ln>
+        </p:spPr>
+        <p:txBody>
+          <a:bodyPr/>
+          <a:p/>
+        </p:txBody>
+      </p:sp>
+      <p:sp>
+        <p:nvSpPr>
+          <p:cNvPr id="150" name="" descr="{&quot;isTemplate&quot;:true,&quot;type&quot;:&quot;text&quot;}"/>
+          <p:cNvSpPr txBox="1"/>
+          <p:nvPr/>
+        </p:nvSpPr>
+        <p:spPr>
+          <a:xfrm rot="0" flipH="0" flipV="0">
+            <a:off x="838200" y="2924175"/>
+            <a:ext cx="1352550" cy="142875"/>
+          </a:xfrm>
+          <a:prstGeom prst="rect"/>
+        </p:spPr>
+        <p:txBody>
+          <a:bodyPr wrap="none" lIns="0" tIns="0" rIns="0" bIns="0"/>
+          <a:p>
+            <a:pPr>
+              <a:lnSpc>
+                <a:spcPct val="100000"/>
+              </a:lnSpc>
+            </a:pPr>
+            <a:r>
+              <a:rPr lang="en-US" sz="938" b="1">
+                <a:solidFill>
+                  <a:srgbClr val="22D3EE"/>
+                </a:solidFill>
+                <a:latin typeface="Microsoft YaHei"/>
+                <a:ea typeface="Microsoft YaHei"/>
+              </a:rPr>
+              <a:t>① EDM </a:t>
+            </a:r>
+            <a:r>
+              <a:rPr lang="zh-CN" sz="938" b="1">
+                <a:solidFill>
+                  <a:srgbClr val="22D3EE"/>
+                </a:solidFill>
+                <a:latin typeface="Microsoft YaHei"/>
+                <a:ea typeface="Microsoft YaHei"/>
+              </a:rPr>
+              <a:t>漂移检测</a:t>
+            </a:r>
+            <a:endParaRPr/>
+          </a:p>
+        </p:txBody>
+      </p:sp>
+      <p:sp>
+        <p:nvSpPr>
+          <p:cNvPr id="151" name="" descr="{&quot;isTemplate&quot;:true,&quot;type&quot;:&quot;text&quot;}"/>
+          <p:cNvSpPr txBox="1"/>
+          <p:nvPr/>
+        </p:nvSpPr>
+        <p:spPr>
+          <a:xfrm rot="0" flipH="0" flipV="0">
+            <a:off x="838200" y="3114675"/>
+            <a:ext cx="1352550" cy="123825"/>
+          </a:xfrm>
+          <a:prstGeom prst="rect"/>
+        </p:spPr>
+        <p:txBody>
+          <a:bodyPr wrap="none" lIns="0" tIns="0" rIns="0" bIns="0"/>
+          <a:p>
+            <a:pPr>
+              <a:lnSpc>
+                <a:spcPct val="100000"/>
+              </a:lnSpc>
+            </a:pPr>
+            <a:r>
+              <a:rPr lang="zh-CN" sz="788">
+                <a:solidFill>
+                  <a:srgbClr val="CBD5E1"/>
+                </a:solidFill>
+                <a:latin typeface="Microsoft YaHei"/>
+                <a:ea typeface="Microsoft YaHei"/>
+              </a:rPr>
+              <a:t>监测数据分布变化</a:t>
+            </a:r>
+            <a:endParaRPr/>
+          </a:p>
+        </p:txBody>
+      </p:sp>
+      <p:sp>
+        <p:nvSpPr>
+          <p:cNvPr id="152" name="" descr="{&quot;isTemplate&quot;:true,&quot;type&quot;:&quot;text&quot;}"/>
+          <p:cNvSpPr txBox="1"/>
+          <p:nvPr/>
+        </p:nvSpPr>
+        <p:spPr>
+          <a:xfrm rot="0" flipH="0" flipV="0">
+            <a:off x="838200" y="3257550"/>
+            <a:ext cx="1352550" cy="123825"/>
+          </a:xfrm>
+          <a:prstGeom prst="rect"/>
+        </p:spPr>
+        <p:txBody>
+          <a:bodyPr wrap="none" lIns="0" tIns="0" rIns="0" bIns="0"/>
+          <a:p>
+            <a:pPr>
+              <a:lnSpc>
+                <a:spcPct val="100000"/>
+              </a:lnSpc>
+            </a:pPr>
+            <a:r>
+              <a:rPr lang="zh-CN" sz="788">
+                <a:solidFill>
+                  <a:srgbClr val="CBD5E1"/>
+                </a:solidFill>
+                <a:latin typeface="Microsoft YaHei"/>
+                <a:ea typeface="Microsoft YaHei"/>
+              </a:rPr>
+              <a:t>结论沉淀为日志</a:t>
+            </a:r>
+            <a:endParaRPr/>
+          </a:p>
+        </p:txBody>
+      </p:sp>
+      <p:sp>
+        <p:nvSpPr>
+          <p:cNvPr id="153" name=""/>
+          <p:cNvSpPr/>
+          <p:nvPr/>
+        </p:nvSpPr>
+        <p:spPr>
+          <a:xfrm rot="0" flipH="0" flipV="0">
+            <a:off x="2362200" y="2828925"/>
+            <a:ext cx="1543050" cy="647700"/>
+          </a:xfrm>
+          <a:prstGeom prst="roundRect">
+            <a:avLst>
+              <a:gd name="adj" fmla="val 11765"/>
+            </a:avLst>
+          </a:prstGeom>
+          <a:solidFill>
+            <a:srgbClr val="22D3EE">
+              <a:alpha val="8000"/>
+            </a:srgbClr>
+          </a:solidFill>
+          <a:ln w="12700">
+            <a:solidFill>
+              <a:srgbClr val="22D3EE">
+                <a:alpha val="35000"/>
+              </a:srgbClr>
+            </a:solidFill>
+            <a:prstDash val="solid"/>
+          </a:ln>
+        </p:spPr>
+        <p:txBody>
+          <a:bodyPr/>
+          <a:p/>
+        </p:txBody>
+      </p:sp>
+      <p:sp>
+        <p:nvSpPr>
+          <p:cNvPr id="154" name="" descr="{&quot;isTemplate&quot;:true,&quot;type&quot;:&quot;text&quot;}"/>
+          <p:cNvSpPr txBox="1"/>
+          <p:nvPr/>
+        </p:nvSpPr>
+        <p:spPr>
+          <a:xfrm rot="0" flipH="0" flipV="0">
+            <a:off x="2457450" y="2924175"/>
+            <a:ext cx="1352550" cy="142875"/>
+          </a:xfrm>
+          <a:prstGeom prst="rect"/>
+        </p:spPr>
+        <p:txBody>
+          <a:bodyPr wrap="none" lIns="0" tIns="0" rIns="0" bIns="0"/>
+          <a:p>
+            <a:pPr>
+              <a:lnSpc>
+                <a:spcPct val="100000"/>
+              </a:lnSpc>
+            </a:pPr>
+            <a:r>
+              <a:rPr lang="en-US" sz="938" b="1">
+                <a:solidFill>
+                  <a:srgbClr val="22D3EE"/>
+                </a:solidFill>
+                <a:latin typeface="Microsoft YaHei"/>
+                <a:ea typeface="Microsoft YaHei"/>
+              </a:rPr>
+              <a:t>② </a:t>
+            </a:r>
+            <a:r>
+              <a:rPr lang="zh-CN" sz="938" b="1">
+                <a:solidFill>
+                  <a:srgbClr val="22D3EE"/>
+                </a:solidFill>
+                <a:latin typeface="Microsoft YaHei"/>
+                <a:ea typeface="Microsoft YaHei"/>
+              </a:rPr>
+              <a:t>训练</a:t>
+            </a:r>
+            <a:r>
+              <a:rPr lang="en-US" sz="938" b="1">
+                <a:solidFill>
+                  <a:srgbClr val="22D3EE"/>
+                </a:solidFill>
+                <a:latin typeface="Microsoft YaHei"/>
+                <a:ea typeface="Microsoft YaHei"/>
+              </a:rPr>
+              <a:t> Skill</a:t>
+            </a:r>
+            <a:endParaRPr/>
+          </a:p>
+        </p:txBody>
+      </p:sp>
+      <p:sp>
+        <p:nvSpPr>
+          <p:cNvPr id="155" name="" descr="{&quot;isTemplate&quot;:true,&quot;type&quot;:&quot;text&quot;}"/>
+          <p:cNvSpPr txBox="1"/>
+          <p:nvPr/>
+        </p:nvSpPr>
+        <p:spPr>
+          <a:xfrm rot="0" flipH="0" flipV="0">
+            <a:off x="2457450" y="3114675"/>
+            <a:ext cx="1352550" cy="123825"/>
+          </a:xfrm>
+          <a:prstGeom prst="rect"/>
+        </p:spPr>
+        <p:txBody>
+          <a:bodyPr wrap="none" lIns="0" tIns="0" rIns="0" bIns="0"/>
+          <a:p>
+            <a:pPr>
+              <a:lnSpc>
+                <a:spcPct val="100000"/>
+              </a:lnSpc>
+            </a:pPr>
+            <a:r>
+              <a:rPr lang="zh-CN" sz="788">
+                <a:solidFill>
+                  <a:srgbClr val="CBD5E1"/>
+                </a:solidFill>
+                <a:latin typeface="Microsoft YaHei"/>
+                <a:ea typeface="Microsoft YaHei"/>
+              </a:rPr>
+              <a:t>标准化训练能力</a:t>
+            </a:r>
+            <a:endParaRPr/>
+          </a:p>
+        </p:txBody>
+      </p:sp>
+      <p:sp>
+        <p:nvSpPr>
+          <p:cNvPr id="156" name="" descr="{&quot;isTemplate&quot;:true,&quot;type&quot;:&quot;text&quot;}"/>
+          <p:cNvSpPr txBox="1"/>
+          <p:nvPr/>
+        </p:nvSpPr>
+        <p:spPr>
+          <a:xfrm rot="0" flipH="0" flipV="0">
+            <a:off x="2457450" y="3257550"/>
+            <a:ext cx="1352550" cy="123825"/>
+          </a:xfrm>
+          <a:prstGeom prst="rect"/>
+        </p:spPr>
+        <p:txBody>
+          <a:bodyPr wrap="none" lIns="0" tIns="0" rIns="0" bIns="0"/>
+          <a:p>
+            <a:pPr>
+              <a:lnSpc>
+                <a:spcPct val="100000"/>
+              </a:lnSpc>
+            </a:pPr>
+            <a:r>
+              <a:rPr lang="zh-CN" sz="788">
+                <a:solidFill>
+                  <a:srgbClr val="CBD5E1"/>
+                </a:solidFill>
+                <a:latin typeface="Microsoft YaHei"/>
+                <a:ea typeface="Microsoft YaHei"/>
+              </a:rPr>
+              <a:t>训练前读</a:t>
+            </a:r>
+            <a:r>
+              <a:rPr lang="en-US" sz="788">
+                <a:solidFill>
+                  <a:srgbClr val="CBD5E1"/>
+                </a:solidFill>
+                <a:latin typeface="Microsoft YaHei"/>
+                <a:ea typeface="Microsoft YaHei"/>
+              </a:rPr>
+              <a:t> EDM </a:t>
+            </a:r>
+            <a:r>
+              <a:rPr lang="zh-CN" sz="788">
+                <a:solidFill>
+                  <a:srgbClr val="CBD5E1"/>
+                </a:solidFill>
+                <a:latin typeface="Microsoft YaHei"/>
+                <a:ea typeface="Microsoft YaHei"/>
+              </a:rPr>
+              <a:t>日志</a:t>
+            </a:r>
+            <a:endParaRPr/>
+          </a:p>
+        </p:txBody>
+      </p:sp>
+      <p:sp>
+        <p:nvSpPr>
+          <p:cNvPr id="157" name=""/>
+          <p:cNvSpPr/>
+          <p:nvPr/>
+        </p:nvSpPr>
+        <p:spPr>
+          <a:xfrm rot="0" flipH="0" flipV="0">
+            <a:off x="3981450" y="2828925"/>
+            <a:ext cx="1543050" cy="647700"/>
+          </a:xfrm>
+          <a:prstGeom prst="roundRect">
+            <a:avLst>
+              <a:gd name="adj" fmla="val 11765"/>
+            </a:avLst>
+          </a:prstGeom>
+          <a:solidFill>
+            <a:srgbClr val="22D3EE">
+              <a:alpha val="8000"/>
+            </a:srgbClr>
+          </a:solidFill>
+          <a:ln w="12700">
+            <a:solidFill>
+              <a:srgbClr val="22D3EE">
+                <a:alpha val="35000"/>
+              </a:srgbClr>
+            </a:solidFill>
+            <a:prstDash val="solid"/>
+          </a:ln>
+        </p:spPr>
+        <p:txBody>
+          <a:bodyPr/>
+          <a:p/>
+        </p:txBody>
+      </p:sp>
+      <p:sp>
+        <p:nvSpPr>
+          <p:cNvPr id="158" name="" descr="{&quot;isTemplate&quot;:true,&quot;type&quot;:&quot;text&quot;}"/>
+          <p:cNvSpPr txBox="1"/>
+          <p:nvPr/>
+        </p:nvSpPr>
+        <p:spPr>
+          <a:xfrm rot="0" flipH="0" flipV="0">
+            <a:off x="4076700" y="2924175"/>
+            <a:ext cx="1352550" cy="142875"/>
+          </a:xfrm>
+          <a:prstGeom prst="rect"/>
+        </p:spPr>
+        <p:txBody>
+          <a:bodyPr wrap="none" lIns="0" tIns="0" rIns="0" bIns="0"/>
+          <a:p>
+            <a:pPr>
+              <a:lnSpc>
+                <a:spcPct val="100000"/>
+              </a:lnSpc>
+            </a:pPr>
+            <a:r>
+              <a:rPr lang="en-US" sz="938" b="1">
+                <a:solidFill>
+                  <a:srgbClr val="22D3EE"/>
+                </a:solidFill>
+                <a:latin typeface="Microsoft YaHei"/>
+                <a:ea typeface="Microsoft YaHei"/>
+              </a:rPr>
+              <a:t>③ </a:t>
+            </a:r>
+            <a:r>
+              <a:rPr lang="zh-CN" sz="938" b="1">
+                <a:solidFill>
+                  <a:srgbClr val="22D3EE"/>
+                </a:solidFill>
+                <a:latin typeface="Microsoft YaHei"/>
+                <a:ea typeface="Microsoft YaHei"/>
+              </a:rPr>
+              <a:t>时序验证</a:t>
+            </a:r>
+            <a:endParaRPr/>
+          </a:p>
+        </p:txBody>
+      </p:sp>
+      <p:sp>
+        <p:nvSpPr>
+          <p:cNvPr id="159" name="" descr="{&quot;isTemplate&quot;:true,&quot;type&quot;:&quot;text&quot;}"/>
+          <p:cNvSpPr txBox="1"/>
+          <p:nvPr/>
+        </p:nvSpPr>
+        <p:spPr>
+          <a:xfrm rot="0" flipH="0" flipV="0">
+            <a:off x="4076700" y="3114675"/>
+            <a:ext cx="1352550" cy="123825"/>
+          </a:xfrm>
+          <a:prstGeom prst="rect"/>
+        </p:spPr>
+        <p:txBody>
+          <a:bodyPr wrap="none" lIns="0" tIns="0" rIns="0" bIns="0"/>
+          <a:p>
+            <a:pPr>
+              <a:lnSpc>
+                <a:spcPct val="100000"/>
+              </a:lnSpc>
+            </a:pPr>
+            <a:r>
+              <a:rPr lang="zh-CN" sz="788">
+                <a:solidFill>
+                  <a:srgbClr val="CBD5E1"/>
+                </a:solidFill>
+                <a:latin typeface="Microsoft YaHei"/>
+                <a:ea typeface="Microsoft YaHei"/>
+              </a:rPr>
+              <a:t>统一时序口径评估</a:t>
+            </a:r>
+            <a:endParaRPr/>
+          </a:p>
+        </p:txBody>
+      </p:sp>
+      <p:sp>
+        <p:nvSpPr>
+          <p:cNvPr id="160" name="" descr="{&quot;isTemplate&quot;:true,&quot;type&quot;:&quot;text&quot;}"/>
+          <p:cNvSpPr txBox="1"/>
+          <p:nvPr/>
+        </p:nvSpPr>
+        <p:spPr>
+          <a:xfrm rot="0" flipH="0" flipV="0">
+            <a:off x="4076700" y="3257550"/>
+            <a:ext cx="1352550" cy="123825"/>
+          </a:xfrm>
+          <a:prstGeom prst="rect"/>
+        </p:spPr>
+        <p:txBody>
+          <a:bodyPr wrap="none" lIns="0" tIns="0" rIns="0" bIns="0"/>
+          <a:p>
+            <a:pPr>
+              <a:lnSpc>
+                <a:spcPct val="100000"/>
+              </a:lnSpc>
+            </a:pPr>
+            <a:r>
+              <a:rPr lang="zh-CN" sz="788">
+                <a:solidFill>
+                  <a:srgbClr val="CBD5E1"/>
+                </a:solidFill>
+                <a:latin typeface="Microsoft YaHei"/>
+                <a:ea typeface="Microsoft YaHei"/>
+              </a:rPr>
+              <a:t>杜绝未来信息泄漏</a:t>
+            </a:r>
+            <a:endParaRPr/>
+          </a:p>
+        </p:txBody>
+      </p:sp>
+      <p:sp>
+        <p:nvSpPr>
+          <p:cNvPr id="161" name=""/>
+          <p:cNvSpPr/>
+          <p:nvPr/>
+        </p:nvSpPr>
+        <p:spPr>
+          <a:xfrm rot="0" flipH="0" flipV="0">
+            <a:off x="5600700" y="2828925"/>
+            <a:ext cx="1543050" cy="647700"/>
+          </a:xfrm>
+          <a:prstGeom prst="roundRect">
+            <a:avLst>
+              <a:gd name="adj" fmla="val 11765"/>
+            </a:avLst>
+          </a:prstGeom>
+          <a:solidFill>
+            <a:srgbClr val="22D3EE">
+              <a:alpha val="8000"/>
+            </a:srgbClr>
+          </a:solidFill>
+          <a:ln w="12700">
+            <a:solidFill>
+              <a:srgbClr val="22D3EE">
+                <a:alpha val="35000"/>
+              </a:srgbClr>
+            </a:solidFill>
+            <a:prstDash val="solid"/>
+          </a:ln>
+        </p:spPr>
+        <p:txBody>
+          <a:bodyPr/>
+          <a:p/>
+        </p:txBody>
+      </p:sp>
+      <p:sp>
+        <p:nvSpPr>
+          <p:cNvPr id="162" name="" descr="{&quot;isTemplate&quot;:true,&quot;type&quot;:&quot;text&quot;}"/>
+          <p:cNvSpPr txBox="1"/>
+          <p:nvPr/>
+        </p:nvSpPr>
+        <p:spPr>
+          <a:xfrm rot="0" flipH="0" flipV="0">
+            <a:off x="5695950" y="2924175"/>
+            <a:ext cx="1352550" cy="142875"/>
+          </a:xfrm>
+          <a:prstGeom prst="rect"/>
+        </p:spPr>
+        <p:txBody>
+          <a:bodyPr wrap="none" lIns="0" tIns="0" rIns="0" bIns="0"/>
+          <a:p>
+            <a:pPr>
+              <a:lnSpc>
+                <a:spcPct val="100000"/>
+              </a:lnSpc>
+            </a:pPr>
+            <a:r>
+              <a:rPr lang="en-US" sz="938" b="1">
+                <a:solidFill>
+                  <a:srgbClr val="22D3EE"/>
+                </a:solidFill>
+                <a:latin typeface="Microsoft YaHei"/>
+                <a:ea typeface="Microsoft YaHei"/>
+              </a:rPr>
+              <a:t>④ </a:t>
+            </a:r>
+            <a:r>
+              <a:rPr lang="zh-CN" sz="938" b="1">
+                <a:solidFill>
+                  <a:srgbClr val="22D3EE"/>
+                </a:solidFill>
+                <a:latin typeface="Microsoft YaHei"/>
+                <a:ea typeface="Microsoft YaHei"/>
+              </a:rPr>
+              <a:t>版本化部署</a:t>
+            </a:r>
+            <a:endParaRPr/>
+          </a:p>
+        </p:txBody>
+      </p:sp>
+      <p:sp>
+        <p:nvSpPr>
+          <p:cNvPr id="163" name="" descr="{&quot;isTemplate&quot;:true,&quot;type&quot;:&quot;text&quot;}"/>
+          <p:cNvSpPr txBox="1"/>
+          <p:nvPr/>
+        </p:nvSpPr>
+        <p:spPr>
+          <a:xfrm rot="0" flipH="0" flipV="0">
+            <a:off x="5695950" y="3114675"/>
+            <a:ext cx="1352550" cy="123825"/>
+          </a:xfrm>
+          <a:prstGeom prst="rect"/>
+        </p:spPr>
+        <p:txBody>
+          <a:bodyPr wrap="none" lIns="0" tIns="0" rIns="0" bIns="0"/>
+          <a:p>
+            <a:pPr>
+              <a:lnSpc>
+                <a:spcPct val="100000"/>
+              </a:lnSpc>
+            </a:pPr>
+            <a:r>
+              <a:rPr lang="zh-CN" sz="788">
+                <a:solidFill>
+                  <a:srgbClr val="CBD5E1"/>
+                </a:solidFill>
+                <a:latin typeface="Microsoft YaHei"/>
+                <a:ea typeface="Microsoft YaHei"/>
+              </a:rPr>
+              <a:t>发布</a:t>
+            </a:r>
+            <a:r>
+              <a:rPr lang="en-US" sz="788">
+                <a:solidFill>
+                  <a:srgbClr val="CBD5E1"/>
+                </a:solidFill>
+                <a:latin typeface="Microsoft YaHei"/>
+                <a:ea typeface="Microsoft YaHei"/>
+              </a:rPr>
+              <a:t> active </a:t>
+            </a:r>
+            <a:r>
+              <a:rPr lang="zh-CN" sz="788">
+                <a:solidFill>
+                  <a:srgbClr val="CBD5E1"/>
+                </a:solidFill>
+                <a:latin typeface="Microsoft YaHei"/>
+                <a:ea typeface="Microsoft YaHei"/>
+              </a:rPr>
+              <a:t>模型</a:t>
+            </a:r>
+            <a:endParaRPr/>
+          </a:p>
+        </p:txBody>
+      </p:sp>
+      <p:sp>
+        <p:nvSpPr>
+          <p:cNvPr id="164" name="" descr="{&quot;isTemplate&quot;:true,&quot;type&quot;:&quot;text&quot;}"/>
+          <p:cNvSpPr txBox="1"/>
+          <p:nvPr/>
+        </p:nvSpPr>
+        <p:spPr>
+          <a:xfrm rot="0" flipH="0" flipV="0">
+            <a:off x="5695950" y="3257550"/>
+            <a:ext cx="1352550" cy="123825"/>
+          </a:xfrm>
+          <a:prstGeom prst="rect"/>
+        </p:spPr>
+        <p:txBody>
+          <a:bodyPr wrap="none" lIns="0" tIns="0" rIns="0" bIns="0"/>
+          <a:p>
+            <a:pPr>
+              <a:lnSpc>
+                <a:spcPct val="100000"/>
+              </a:lnSpc>
+            </a:pPr>
+            <a:r>
+              <a:rPr lang="zh-CN" sz="788">
+                <a:solidFill>
+                  <a:srgbClr val="CBD5E1"/>
+                </a:solidFill>
+                <a:latin typeface="Microsoft YaHei"/>
+                <a:ea typeface="Microsoft YaHei"/>
+              </a:rPr>
+              <a:t>可回滚</a:t>
+            </a:r>
+            <a:r>
+              <a:rPr lang="en-US" sz="788">
+                <a:solidFill>
+                  <a:srgbClr val="CBD5E1"/>
+                </a:solidFill>
+                <a:latin typeface="Microsoft YaHei"/>
+                <a:ea typeface="Microsoft YaHei"/>
+              </a:rPr>
+              <a:t> · </a:t>
+            </a:r>
+            <a:r>
+              <a:rPr lang="zh-CN" sz="788">
+                <a:solidFill>
+                  <a:srgbClr val="CBD5E1"/>
+                </a:solidFill>
+                <a:latin typeface="Microsoft YaHei"/>
+                <a:ea typeface="Microsoft YaHei"/>
+              </a:rPr>
+              <a:t>可审计</a:t>
+            </a:r>
+            <a:endParaRPr/>
+          </a:p>
+        </p:txBody>
+      </p:sp>
+      <p:sp>
+        <p:nvSpPr>
+          <p:cNvPr id="165" name="" descr="{&quot;isTemplate&quot;:true,&quot;type&quot;:&quot;text&quot;}"/>
+          <p:cNvSpPr txBox="1"/>
+          <p:nvPr/>
+        </p:nvSpPr>
+        <p:spPr>
+          <a:xfrm rot="0" flipH="0" flipV="0">
+            <a:off x="742950" y="3571875"/>
+            <a:ext cx="6400800" cy="133350"/>
+          </a:xfrm>
+          <a:prstGeom prst="rect"/>
+        </p:spPr>
+        <p:txBody>
+          <a:bodyPr wrap="none" lIns="0" tIns="0" rIns="0" bIns="0"/>
+          <a:p>
+            <a:pPr>
+              <a:lnSpc>
+                <a:spcPct val="100000"/>
+              </a:lnSpc>
+            </a:pPr>
+            <a:r>
+              <a:rPr lang="zh-CN" sz="825">
+                <a:solidFill>
+                  <a:srgbClr val="94A3B8"/>
+                </a:solidFill>
+                <a:latin typeface="Microsoft YaHei"/>
+                <a:ea typeface="Microsoft YaHei"/>
+              </a:rPr>
+              <a:t>四项能力全部版本化管理，对外输出唯一的</a:t>
+            </a:r>
+            <a:r>
+              <a:rPr lang="en-US" sz="825">
+                <a:solidFill>
+                  <a:srgbClr val="94A3B8"/>
+                </a:solidFill>
+                <a:latin typeface="Microsoft YaHei"/>
+                <a:ea typeface="Microsoft YaHei"/>
+              </a:rPr>
+              <a:t> active </a:t>
+            </a:r>
+            <a:r>
+              <a:rPr lang="zh-CN" sz="825">
+                <a:solidFill>
+                  <a:srgbClr val="94A3B8"/>
+                </a:solidFill>
+                <a:latin typeface="Microsoft YaHei"/>
+                <a:ea typeface="Microsoft YaHei"/>
+              </a:rPr>
+              <a:t>模型</a:t>
+            </a:r>
+            <a:endParaRPr/>
+          </a:p>
+        </p:txBody>
+      </p:sp>
+      <p:sp>
+        <p:nvSpPr>
+          <p:cNvPr id="166" name="" descr="{&quot;isTemplate&quot;:true,&quot;type&quot;:&quot;text&quot;}"/>
+          <p:cNvSpPr txBox="1"/>
+          <p:nvPr/>
+        </p:nvSpPr>
+        <p:spPr>
+          <a:xfrm rot="0" flipH="0" flipV="0">
+            <a:off x="3514725" y="4057650"/>
+            <a:ext cx="66675" cy="161925"/>
+          </a:xfrm>
+          <a:prstGeom prst="rect"/>
+        </p:spPr>
+        <p:txBody>
+          <a:bodyPr wrap="none" lIns="0" tIns="0" rIns="0" bIns="0"/>
+          <a:p>
+            <a:pPr>
+              <a:lnSpc>
+                <a:spcPct val="100000"/>
+              </a:lnSpc>
+            </a:pPr>
+            <a:r>
+              <a:rPr sz="1050">
+                <a:solidFill>
+                  <a:srgbClr val="94A3B8"/>
+                </a:solidFill>
+                <a:latin typeface="Microsoft YaHei"/>
+                <a:ea typeface="Microsoft YaHei"/>
+              </a:rPr>
+              <a:t>↓</a:t>
+            </a:r>
+            <a:endParaRPr/>
+          </a:p>
+        </p:txBody>
+      </p:sp>
+      <p:sp>
+        <p:nvSpPr>
+          <p:cNvPr id="167" name="" descr="{&quot;isTemplate&quot;:true,&quot;type&quot;:&quot;text&quot;}"/>
+          <p:cNvSpPr txBox="1"/>
+          <p:nvPr/>
+        </p:nvSpPr>
+        <p:spPr>
+          <a:xfrm rot="0" flipH="0" flipV="0">
+            <a:off x="3638550" y="4067175"/>
+            <a:ext cx="733425" cy="133350"/>
+          </a:xfrm>
+          <a:prstGeom prst="rect"/>
+        </p:spPr>
+        <p:txBody>
+          <a:bodyPr wrap="none" lIns="0" tIns="0" rIns="0" bIns="0"/>
+          <a:p>
+            <a:pPr>
+              <a:lnSpc>
+                <a:spcPct val="100000"/>
+              </a:lnSpc>
+            </a:pPr>
+            <a:r>
+              <a:rPr lang="zh-CN" sz="825">
+                <a:solidFill>
+                  <a:srgbClr val="94A3B8"/>
+                </a:solidFill>
+                <a:latin typeface="Microsoft YaHei"/>
+                <a:ea typeface="Microsoft YaHei"/>
+              </a:rPr>
+              <a:t>只读已到达数据</a:t>
+            </a:r>
+            <a:endParaRPr/>
+          </a:p>
+        </p:txBody>
+      </p:sp>
+      <p:sp>
+        <p:nvSpPr>
+          <p:cNvPr id="168" name=""/>
+          <p:cNvSpPr/>
+          <p:nvPr/>
+        </p:nvSpPr>
+        <p:spPr>
+          <a:xfrm rot="0" flipH="0" flipV="0">
+            <a:off x="609600" y="4219575"/>
+            <a:ext cx="6667500" cy="666750"/>
+          </a:xfrm>
+          <a:prstGeom prst="roundRect">
+            <a:avLst>
+              <a:gd name="adj" fmla="val 14286"/>
+            </a:avLst>
+          </a:prstGeom>
+          <a:solidFill>
+            <a:srgbClr val="F8FAFC"/>
+          </a:solidFill>
+          <a:ln w="12700">
+            <a:solidFill>
+              <a:srgbClr val="E2E8F0"/>
+            </a:solidFill>
+            <a:prstDash val="solid"/>
+          </a:ln>
+        </p:spPr>
+        <p:txBody>
+          <a:bodyPr/>
+          <a:p/>
+        </p:txBody>
+      </p:sp>
+      <p:sp>
+        <p:nvSpPr>
+          <p:cNvPr id="169" name="" descr="{&quot;isTemplate&quot;:true,&quot;type&quot;:&quot;text&quot;}"/>
+          <p:cNvSpPr txBox="1"/>
+          <p:nvPr/>
+        </p:nvSpPr>
+        <p:spPr>
+          <a:xfrm rot="0" flipH="0" flipV="0">
+            <a:off x="895350" y="4476750"/>
+            <a:ext cx="390525" cy="161925"/>
+          </a:xfrm>
+          <a:prstGeom prst="rect"/>
+        </p:spPr>
+        <p:txBody>
+          <a:bodyPr wrap="none" lIns="0" tIns="0" rIns="0" bIns="0"/>
+          <a:p>
+            <a:pPr>
+              <a:lnSpc>
+                <a:spcPct val="100000"/>
+              </a:lnSpc>
+            </a:pPr>
+            <a:r>
+              <a:rPr lang="zh-CN" sz="1013" b="1">
+                <a:solidFill>
+                  <a:srgbClr val="475569"/>
+                </a:solidFill>
+                <a:latin typeface="Microsoft YaHei"/>
+                <a:ea typeface="Microsoft YaHei"/>
+              </a:rPr>
+              <a:t>数据层</a:t>
+            </a:r>
+            <a:endParaRPr/>
+          </a:p>
+        </p:txBody>
+      </p:sp>
+      <p:sp>
+        <p:nvSpPr>
+          <p:cNvPr id="170" name=""/>
+          <p:cNvSpPr/>
+          <p:nvPr/>
+        </p:nvSpPr>
+        <p:spPr>
+          <a:xfrm rot="0" flipH="0" flipV="0">
+            <a:off x="1562100" y="4438650"/>
+            <a:ext cx="628650" cy="228600"/>
+          </a:xfrm>
+          <a:prstGeom prst="roundRect">
+            <a:avLst>
+              <a:gd name="adj" fmla="val 25000"/>
+            </a:avLst>
+          </a:prstGeom>
+          <a:solidFill>
+            <a:srgbClr val="FFFFFF"/>
+          </a:solidFill>
+          <a:ln w="12700">
+            <a:solidFill>
+              <a:srgbClr val="CBD5E1"/>
+            </a:solidFill>
+            <a:prstDash val="solid"/>
+          </a:ln>
+        </p:spPr>
+        <p:txBody>
+          <a:bodyPr/>
+          <a:p/>
+        </p:txBody>
+      </p:sp>
+      <p:sp>
+        <p:nvSpPr>
+          <p:cNvPr id="171" name="" descr="{&quot;isTemplate&quot;:true,&quot;type&quot;:&quot;text&quot;}"/>
+          <p:cNvSpPr txBox="1"/>
+          <p:nvPr/>
+        </p:nvSpPr>
+        <p:spPr>
+          <a:xfrm rot="0" flipH="0" flipV="0">
+            <a:off x="1657350" y="4486275"/>
+            <a:ext cx="438150" cy="133350"/>
+          </a:xfrm>
+          <a:prstGeom prst="rect"/>
+        </p:spPr>
+        <p:txBody>
+          <a:bodyPr wrap="none" lIns="0" tIns="0" rIns="0" bIns="0"/>
+          <a:p>
+            <a:pPr>
+              <a:lnSpc>
+                <a:spcPct val="100000"/>
+              </a:lnSpc>
+            </a:pPr>
+            <a:r>
+              <a:rPr lang="zh-CN" sz="863">
+                <a:solidFill>
+                  <a:srgbClr val="0F2039"/>
+                </a:solidFill>
+                <a:latin typeface="Microsoft YaHei"/>
+                <a:ea typeface="Microsoft YaHei"/>
+              </a:rPr>
+              <a:t>新增负荷</a:t>
+            </a:r>
+            <a:endParaRPr/>
+          </a:p>
+        </p:txBody>
+      </p:sp>
+      <p:sp>
+        <p:nvSpPr>
+          <p:cNvPr id="172" name=""/>
+          <p:cNvSpPr/>
+          <p:nvPr/>
+        </p:nvSpPr>
+        <p:spPr>
+          <a:xfrm rot="0" flipH="0" flipV="0">
+            <a:off x="2247900" y="4438650"/>
+            <a:ext cx="409575" cy="228600"/>
+          </a:xfrm>
+          <a:prstGeom prst="roundRect">
+            <a:avLst>
+              <a:gd name="adj" fmla="val 25000"/>
+            </a:avLst>
+          </a:prstGeom>
+          <a:solidFill>
+            <a:srgbClr val="FFFFFF"/>
+          </a:solidFill>
+          <a:ln w="12700">
+            <a:solidFill>
+              <a:srgbClr val="CBD5E1"/>
+            </a:solidFill>
+            <a:prstDash val="solid"/>
+          </a:ln>
+        </p:spPr>
+        <p:txBody>
+          <a:bodyPr/>
+          <a:p/>
+        </p:txBody>
+      </p:sp>
+      <p:sp>
+        <p:nvSpPr>
+          <p:cNvPr id="173" name="" descr="{&quot;isTemplate&quot;:true,&quot;type&quot;:&quot;text&quot;}"/>
+          <p:cNvSpPr txBox="1"/>
+          <p:nvPr/>
+        </p:nvSpPr>
+        <p:spPr>
+          <a:xfrm rot="0" flipH="0" flipV="0">
+            <a:off x="2343150" y="4486275"/>
+            <a:ext cx="219075" cy="133350"/>
+          </a:xfrm>
+          <a:prstGeom prst="rect"/>
+        </p:spPr>
+        <p:txBody>
+          <a:bodyPr wrap="none" lIns="0" tIns="0" rIns="0" bIns="0"/>
+          <a:p>
+            <a:pPr>
+              <a:lnSpc>
+                <a:spcPct val="100000"/>
+              </a:lnSpc>
+            </a:pPr>
+            <a:r>
+              <a:rPr lang="zh-CN" sz="863">
+                <a:solidFill>
+                  <a:srgbClr val="0F2039"/>
+                </a:solidFill>
+                <a:latin typeface="Microsoft YaHei"/>
+                <a:ea typeface="Microsoft YaHei"/>
+              </a:rPr>
+              <a:t>天气</a:t>
+            </a:r>
+            <a:endParaRPr/>
+          </a:p>
+        </p:txBody>
+      </p:sp>
+      <p:sp>
+        <p:nvSpPr>
+          <p:cNvPr id="174" name=""/>
+          <p:cNvSpPr/>
+          <p:nvPr/>
+        </p:nvSpPr>
+        <p:spPr>
+          <a:xfrm rot="0" flipH="0" flipV="0">
+            <a:off x="2714625" y="4438650"/>
+            <a:ext cx="628650" cy="228600"/>
+          </a:xfrm>
+          <a:prstGeom prst="roundRect">
+            <a:avLst>
+              <a:gd name="adj" fmla="val 25000"/>
+            </a:avLst>
+          </a:prstGeom>
+          <a:solidFill>
+            <a:srgbClr val="FFFFFF"/>
+          </a:solidFill>
+          <a:ln w="12700">
+            <a:solidFill>
+              <a:srgbClr val="CBD5E1"/>
+            </a:solidFill>
+            <a:prstDash val="solid"/>
+          </a:ln>
+        </p:spPr>
+        <p:txBody>
+          <a:bodyPr/>
+          <a:p/>
+        </p:txBody>
+      </p:sp>
+      <p:sp>
+        <p:nvSpPr>
+          <p:cNvPr id="175" name="" descr="{&quot;isTemplate&quot;:true,&quot;type&quot;:&quot;text&quot;}"/>
+          <p:cNvSpPr txBox="1"/>
+          <p:nvPr/>
+        </p:nvSpPr>
+        <p:spPr>
+          <a:xfrm rot="0" flipH="0" flipV="0">
+            <a:off x="2809875" y="4486275"/>
+            <a:ext cx="438150" cy="133350"/>
+          </a:xfrm>
+          <a:prstGeom prst="rect"/>
+        </p:spPr>
+        <p:txBody>
+          <a:bodyPr wrap="none" lIns="0" tIns="0" rIns="0" bIns="0"/>
+          <a:p>
+            <a:pPr>
+              <a:lnSpc>
+                <a:spcPct val="100000"/>
+              </a:lnSpc>
+            </a:pPr>
+            <a:r>
+              <a:rPr lang="zh-CN" sz="863">
+                <a:solidFill>
+                  <a:srgbClr val="0F2039"/>
+                </a:solidFill>
+                <a:latin typeface="Microsoft YaHei"/>
+                <a:ea typeface="Microsoft YaHei"/>
+              </a:rPr>
+              <a:t>历史分布</a:t>
+            </a:r>
+            <a:endParaRPr/>
+          </a:p>
+        </p:txBody>
+      </p:sp>
+      <p:sp>
+        <p:nvSpPr>
+          <p:cNvPr id="176" name=""/>
+          <p:cNvSpPr/>
+          <p:nvPr/>
+        </p:nvSpPr>
+        <p:spPr>
+          <a:xfrm rot="0" flipH="0" flipV="0">
+            <a:off x="3400425" y="4438650"/>
+            <a:ext cx="628650" cy="228600"/>
+          </a:xfrm>
+          <a:prstGeom prst="roundRect">
+            <a:avLst>
+              <a:gd name="adj" fmla="val 25000"/>
+            </a:avLst>
+          </a:prstGeom>
+          <a:solidFill>
+            <a:srgbClr val="FFFFFF"/>
+          </a:solidFill>
+          <a:ln w="12700">
+            <a:solidFill>
+              <a:srgbClr val="CBD5E1"/>
+            </a:solidFill>
+            <a:prstDash val="solid"/>
+          </a:ln>
+        </p:spPr>
+        <p:txBody>
+          <a:bodyPr/>
+          <a:p/>
+        </p:txBody>
+      </p:sp>
+      <p:sp>
+        <p:nvSpPr>
+          <p:cNvPr id="177" name="" descr="{&quot;isTemplate&quot;:true,&quot;type&quot;:&quot;text&quot;}"/>
+          <p:cNvSpPr txBox="1"/>
+          <p:nvPr/>
+        </p:nvSpPr>
+        <p:spPr>
+          <a:xfrm rot="0" flipH="0" flipV="0">
+            <a:off x="3495675" y="4486275"/>
+            <a:ext cx="438150" cy="133350"/>
+          </a:xfrm>
+          <a:prstGeom prst="rect"/>
+        </p:spPr>
+        <p:txBody>
+          <a:bodyPr wrap="none" lIns="0" tIns="0" rIns="0" bIns="0"/>
+          <a:p>
+            <a:pPr>
+              <a:lnSpc>
+                <a:spcPct val="100000"/>
+              </a:lnSpc>
+            </a:pPr>
+            <a:r>
+              <a:rPr lang="zh-CN" sz="863">
+                <a:solidFill>
+                  <a:srgbClr val="0F2039"/>
+                </a:solidFill>
+                <a:latin typeface="Microsoft YaHei"/>
+                <a:ea typeface="Microsoft YaHei"/>
+              </a:rPr>
+              <a:t>模型表现</a:t>
+            </a:r>
+            <a:endParaRPr/>
+          </a:p>
+        </p:txBody>
+      </p:sp>
+      <p:sp>
+        <p:nvSpPr>
+          <p:cNvPr id="178" name=""/>
+          <p:cNvSpPr/>
+          <p:nvPr/>
+        </p:nvSpPr>
+        <p:spPr>
+          <a:xfrm rot="0" flipH="0" flipV="0">
+            <a:off x="4086225" y="4438650"/>
+            <a:ext cx="685800" cy="228600"/>
+          </a:xfrm>
+          <a:prstGeom prst="roundRect">
+            <a:avLst>
+              <a:gd name="adj" fmla="val 25000"/>
+            </a:avLst>
+          </a:prstGeom>
+          <a:solidFill>
+            <a:srgbClr val="FFFFFF"/>
+          </a:solidFill>
+          <a:ln w="12700">
+            <a:solidFill>
+              <a:srgbClr val="CBD5E1"/>
+            </a:solidFill>
+            <a:prstDash val="solid"/>
+          </a:ln>
+        </p:spPr>
+        <p:txBody>
+          <a:bodyPr/>
+          <a:p/>
+        </p:txBody>
+      </p:sp>
+      <p:sp>
+        <p:nvSpPr>
+          <p:cNvPr id="179" name="" descr="{&quot;isTemplate&quot;:true,&quot;type&quot;:&quot;text&quot;}"/>
+          <p:cNvSpPr txBox="1"/>
+          <p:nvPr/>
+        </p:nvSpPr>
+        <p:spPr>
+          <a:xfrm rot="0" flipH="0" flipV="0">
+            <a:off x="4181475" y="4486275"/>
+            <a:ext cx="495300" cy="133350"/>
+          </a:xfrm>
+          <a:prstGeom prst="rect"/>
+        </p:spPr>
+        <p:txBody>
+          <a:bodyPr wrap="none" lIns="0" tIns="0" rIns="0" bIns="0"/>
+          <a:p>
+            <a:pPr>
+              <a:lnSpc>
+                <a:spcPct val="100000"/>
+              </a:lnSpc>
+            </a:pPr>
+            <a:r>
+              <a:rPr lang="en-US" sz="863">
+                <a:solidFill>
+                  <a:srgbClr val="0F2039"/>
+                </a:solidFill>
+                <a:latin typeface="Microsoft YaHei"/>
+                <a:ea typeface="Microsoft YaHei"/>
+              </a:rPr>
+              <a:t>EDM </a:t>
+            </a:r>
+            <a:r>
+              <a:rPr lang="zh-CN" sz="863">
+                <a:solidFill>
+                  <a:srgbClr val="0F2039"/>
+                </a:solidFill>
+                <a:latin typeface="Microsoft YaHei"/>
+                <a:ea typeface="Microsoft YaHei"/>
+              </a:rPr>
+              <a:t>日志</a:t>
+            </a:r>
+            <a:endParaRPr/>
+          </a:p>
+        </p:txBody>
+      </p:sp>
+      <p:sp>
+        <p:nvSpPr>
+          <p:cNvPr id="180" name=""/>
+          <p:cNvSpPr/>
+          <p:nvPr/>
+        </p:nvSpPr>
+        <p:spPr>
+          <a:xfrm rot="0" flipH="0" flipV="0">
+            <a:off x="609600" y="4962525"/>
+            <a:ext cx="6667500" cy="400050"/>
+          </a:xfrm>
+          <a:prstGeom prst="roundRect">
+            <a:avLst>
+              <a:gd name="adj" fmla="val 23810"/>
+            </a:avLst>
+          </a:prstGeom>
+          <a:solidFill>
+            <a:srgbClr val="FFFBEB"/>
+          </a:solidFill>
+          <a:ln w="12700">
+            <a:solidFill>
+              <a:srgbClr val="F59E0B"/>
+            </a:solidFill>
+            <a:prstDash val="solid"/>
+          </a:ln>
+        </p:spPr>
+        <p:txBody>
+          <a:bodyPr/>
+          <a:p/>
+        </p:txBody>
+      </p:sp>
+      <p:sp>
+        <p:nvSpPr>
+          <p:cNvPr id="181" name="" descr="{&quot;isTemplate&quot;:true,&quot;type&quot;:&quot;text&quot;}"/>
+          <p:cNvSpPr txBox="1"/>
+          <p:nvPr/>
+        </p:nvSpPr>
+        <p:spPr>
+          <a:xfrm rot="0" flipH="0" flipV="0">
+            <a:off x="762000" y="5095875"/>
+            <a:ext cx="476250" cy="142875"/>
+          </a:xfrm>
+          <a:prstGeom prst="rect"/>
+        </p:spPr>
+        <p:txBody>
+          <a:bodyPr wrap="none" lIns="0" tIns="0" rIns="0" bIns="0"/>
+          <a:p>
+            <a:pPr>
+              <a:lnSpc>
+                <a:spcPct val="100000"/>
+              </a:lnSpc>
+            </a:pPr>
+            <a:r>
+              <a:rPr lang="zh-CN" sz="938" b="1">
+                <a:solidFill>
+                  <a:srgbClr val="B45309"/>
+                </a:solidFill>
+                <a:latin typeface="Microsoft YaHei"/>
+                <a:ea typeface="Microsoft YaHei"/>
+              </a:rPr>
+              <a:t>约束边界</a:t>
+            </a:r>
+            <a:endParaRPr/>
+          </a:p>
+        </p:txBody>
+      </p:sp>
+      <p:sp>
+        <p:nvSpPr>
+          <p:cNvPr id="182" name="" descr="{&quot;isTemplate&quot;:true,&quot;type&quot;:&quot;text&quot;}"/>
+          <p:cNvSpPr txBox="1"/>
+          <p:nvPr/>
+        </p:nvSpPr>
+        <p:spPr>
+          <a:xfrm rot="0" flipH="0" flipV="0">
+            <a:off x="1333500" y="5095875"/>
+            <a:ext cx="4724400" cy="142875"/>
+          </a:xfrm>
+          <a:prstGeom prst="rect"/>
+        </p:spPr>
+        <p:txBody>
+          <a:bodyPr wrap="none" lIns="0" tIns="0" rIns="0" bIns="0"/>
+          <a:p>
+            <a:pPr>
+              <a:lnSpc>
+                <a:spcPct val="100000"/>
+              </a:lnSpc>
+            </a:pPr>
+            <a:r>
+              <a:rPr lang="zh-CN" sz="900">
+                <a:solidFill>
+                  <a:srgbClr val="92400E"/>
+                </a:solidFill>
+                <a:latin typeface="Microsoft YaHei"/>
+                <a:ea typeface="Microsoft YaHei"/>
+              </a:rPr>
+              <a:t>只能使用已到达数据</a:t>
+            </a:r>
+            <a:r>
+              <a:rPr lang="en-US" sz="900">
+                <a:solidFill>
+                  <a:srgbClr val="92400E"/>
+                </a:solidFill>
+                <a:latin typeface="Microsoft YaHei"/>
+                <a:ea typeface="Microsoft YaHei"/>
+              </a:rPr>
+              <a:t> · </a:t>
+            </a:r>
+            <a:r>
+              <a:rPr lang="zh-CN" sz="900">
+                <a:solidFill>
+                  <a:srgbClr val="92400E"/>
+                </a:solidFill>
+                <a:latin typeface="Microsoft YaHei"/>
+                <a:ea typeface="Microsoft YaHei"/>
+              </a:rPr>
+              <a:t>版本化管理</a:t>
+            </a:r>
+            <a:r>
+              <a:rPr lang="en-US" sz="900">
+                <a:solidFill>
+                  <a:srgbClr val="92400E"/>
+                </a:solidFill>
+                <a:latin typeface="Microsoft YaHei"/>
+                <a:ea typeface="Microsoft YaHei"/>
+              </a:rPr>
+              <a:t> · </a:t>
+            </a:r>
+            <a:r>
+              <a:rPr lang="zh-CN" sz="900">
+                <a:solidFill>
+                  <a:srgbClr val="92400E"/>
+                </a:solidFill>
+                <a:latin typeface="Microsoft YaHei"/>
+                <a:ea typeface="Microsoft YaHei"/>
+              </a:rPr>
+              <a:t>全程日志可审计</a:t>
+            </a:r>
+            <a:r>
+              <a:rPr lang="en-US" sz="900">
+                <a:solidFill>
+                  <a:srgbClr val="92400E"/>
+                </a:solidFill>
+                <a:latin typeface="Microsoft YaHei"/>
+                <a:ea typeface="Microsoft YaHei"/>
+              </a:rPr>
+              <a:t> —— </a:t>
+            </a:r>
+            <a:r>
+              <a:rPr lang="zh-CN" sz="900">
+                <a:solidFill>
+                  <a:srgbClr val="92400E"/>
+                </a:solidFill>
+                <a:latin typeface="Microsoft YaHei"/>
+                <a:ea typeface="Microsoft YaHei"/>
+              </a:rPr>
+              <a:t>产业客户需要的『可审计的自主权』</a:t>
+            </a:r>
+            <a:endParaRPr/>
+          </a:p>
+        </p:txBody>
+      </p:sp>
+      <p:sp>
+        <p:nvSpPr>
+          <p:cNvPr id="183" name="" descr="{&quot;isTemplate&quot;:true,&quot;type&quot;:&quot;text&quot;}"/>
+          <p:cNvSpPr txBox="1"/>
+          <p:nvPr/>
+        </p:nvSpPr>
+        <p:spPr>
+          <a:xfrm rot="0" flipH="0" flipV="0">
+            <a:off x="609600" y="5457825"/>
+            <a:ext cx="6667500" cy="142875"/>
           </a:xfrm>
           <a:prstGeom prst="rect"/>
         </p:spPr>
@@ -7654,58 +9055,68 @@
               </a:lnSpc>
             </a:pPr>
             <a:r>
-              <a:rPr lang="en-US" sz="975">
-                <a:solidFill>
-                  <a:srgbClr val="94A3B8"/>
-                </a:solidFill>
-                <a:latin typeface="Microsoft YaHei"/>
-                <a:ea typeface="Microsoft YaHei"/>
-              </a:rPr>
-              <a:t>Agent </a:t>
-            </a:r>
-            <a:r>
-              <a:rPr lang="zh-CN" sz="975">
-                <a:solidFill>
-                  <a:srgbClr val="94A3B8"/>
-                </a:solidFill>
-                <a:latin typeface="Microsoft YaHei"/>
-                <a:ea typeface="Microsoft YaHei"/>
-              </a:rPr>
-              <a:t>决定何时学、怎么学；</a:t>
-            </a:r>
-            <a:r>
-              <a:rPr lang="en-US" sz="975">
-                <a:solidFill>
-                  <a:srgbClr val="94A3B8"/>
-                </a:solidFill>
-                <a:latin typeface="Microsoft YaHei"/>
-                <a:ea typeface="Microsoft YaHei"/>
-              </a:rPr>
-              <a:t>Harness </a:t>
-            </a:r>
-            <a:r>
-              <a:rPr lang="zh-CN" sz="975">
-                <a:solidFill>
-                  <a:srgbClr val="94A3B8"/>
-                </a:solidFill>
-                <a:latin typeface="Microsoft YaHei"/>
-                <a:ea typeface="Microsoft YaHei"/>
-              </a:rPr>
-              <a:t>保证它学得可靠、可审计</a:t>
-            </a:r>
-            <a:endParaRPr/>
-          </a:p>
-        </p:txBody>
-      </p:sp>
-      <p:sp>
-        <p:nvSpPr>
-          <p:cNvPr id="150" name=""/>
+              <a:rPr lang="zh-CN" sz="900">
+                <a:solidFill>
+                  <a:srgbClr val="64748B"/>
+                </a:solidFill>
+                <a:latin typeface="Microsoft YaHei"/>
+                <a:ea typeface="Microsoft YaHei"/>
+              </a:rPr>
+              <a:t>调用链自上而下：入口触发</a:t>
+            </a:r>
+            <a:r>
+              <a:rPr lang="en-US" sz="900">
+                <a:solidFill>
+                  <a:srgbClr val="64748B"/>
+                </a:solidFill>
+                <a:latin typeface="Microsoft YaHei"/>
+                <a:ea typeface="Microsoft YaHei"/>
+              </a:rPr>
+              <a:t> → Agent </a:t>
+            </a:r>
+            <a:r>
+              <a:rPr lang="zh-CN" sz="900">
+                <a:solidFill>
+                  <a:srgbClr val="64748B"/>
+                </a:solidFill>
+                <a:latin typeface="Microsoft YaHei"/>
+                <a:ea typeface="Microsoft YaHei"/>
+              </a:rPr>
+              <a:t>决策</a:t>
+            </a:r>
+            <a:r>
+              <a:rPr lang="en-US" sz="900">
+                <a:solidFill>
+                  <a:srgbClr val="64748B"/>
+                </a:solidFill>
+                <a:latin typeface="Microsoft YaHei"/>
+                <a:ea typeface="Microsoft YaHei"/>
+              </a:rPr>
+              <a:t> → Harness </a:t>
+            </a:r>
+            <a:r>
+              <a:rPr lang="zh-CN" sz="900">
+                <a:solidFill>
+                  <a:srgbClr val="64748B"/>
+                </a:solidFill>
+                <a:latin typeface="Microsoft YaHei"/>
+                <a:ea typeface="Microsoft YaHei"/>
+              </a:rPr>
+              <a:t>执行；数据层与约束边界全程兜底</a:t>
+            </a:r>
+            <a:endParaRPr/>
+          </a:p>
+        </p:txBody>
+      </p:sp>
+      <p:sp>
+        <p:nvSpPr>
+          <p:cNvPr id="184" name=""/>
           <p:cNvSpPr/>
           <p:nvPr/>
         </p:nvSpPr>
         <p:spPr>
           <a:xfrm rot="0" flipH="0" flipV="0">
-            <a:off x="2466975" y="5857875"/>
+            <a:off x="2247900" y="5686425"/>
             <a:ext cx="409575" cy="190500"/>
           </a:xfrm>
           <a:prstGeom prst="roundRect">
@@ -7725,13 +9136,13 @@
       </p:sp>
       <p:sp>
         <p:nvSpPr>
-          <p:cNvPr id="151" name="" descr="{&quot;isTemplate&quot;:true,&quot;type&quot;:&quot;text&quot;}"/>
-          <p:cNvSpPr txBox="1"/>
-          <p:nvPr/>
-        </p:nvSpPr>
-        <p:spPr>
-          <a:xfrm rot="0" flipH="0" flipV="0">
-            <a:off x="2562225" y="5886450"/>
+          <p:cNvPr id="185" name="" descr="{&quot;isTemplate&quot;:true,&quot;type&quot;:&quot;text&quot;}"/>
+          <p:cNvSpPr txBox="1"/>
+          <p:nvPr/>
+        </p:nvSpPr>
+        <p:spPr>
+          <a:xfrm rot="0" flipH="0" flipV="0">
+            <a:off x="2343150" y="5715000"/>
             <a:ext cx="219075" cy="133350"/>
           </a:xfrm>
           <a:prstGeom prst="rect"/>
@@ -7760,13 +9171,13 @@
       </p:sp>
       <p:sp>
         <p:nvSpPr>
-          <p:cNvPr id="152" name=""/>
+          <p:cNvPr id="186" name=""/>
           <p:cNvSpPr/>
           <p:nvPr/>
         </p:nvSpPr>
         <p:spPr>
           <a:xfrm rot="0" flipH="0" flipV="0">
-            <a:off x="2952750" y="5857875"/>
+            <a:off x="2733675" y="5686425"/>
             <a:ext cx="409575" cy="190500"/>
           </a:xfrm>
           <a:prstGeom prst="roundRect">
@@ -7786,13 +9197,13 @@
       </p:sp>
       <p:sp>
         <p:nvSpPr>
-          <p:cNvPr id="153" name="" descr="{&quot;isTemplate&quot;:true,&quot;type&quot;:&quot;text&quot;}"/>
-          <p:cNvSpPr txBox="1"/>
-          <p:nvPr/>
-        </p:nvSpPr>
-        <p:spPr>
-          <a:xfrm rot="0" flipH="0" flipV="0">
-            <a:off x="3048000" y="5886450"/>
+          <p:cNvPr id="187" name="" descr="{&quot;isTemplate&quot;:true,&quot;type&quot;:&quot;text&quot;}"/>
+          <p:cNvSpPr txBox="1"/>
+          <p:nvPr/>
+        </p:nvSpPr>
+        <p:spPr>
+          <a:xfrm rot="0" flipH="0" flipV="0">
+            <a:off x="2828925" y="5715000"/>
             <a:ext cx="219075" cy="133350"/>
           </a:xfrm>
           <a:prstGeom prst="rect"/>
@@ -7821,13 +9232,13 @@
       </p:sp>
       <p:sp>
         <p:nvSpPr>
-          <p:cNvPr id="154" name=""/>
+          <p:cNvPr id="188" name=""/>
           <p:cNvSpPr/>
           <p:nvPr/>
         </p:nvSpPr>
         <p:spPr>
           <a:xfrm rot="0" flipH="0" flipV="0">
-            <a:off x="3438525" y="5857875"/>
+            <a:off x="3219450" y="5686425"/>
             <a:ext cx="409575" cy="190500"/>
           </a:xfrm>
           <a:prstGeom prst="roundRect">
@@ -7847,13 +9258,13 @@
       </p:sp>
       <p:sp>
         <p:nvSpPr>
-          <p:cNvPr id="155" name="" descr="{&quot;isTemplate&quot;:true,&quot;type&quot;:&quot;text&quot;}"/>
-          <p:cNvSpPr txBox="1"/>
-          <p:nvPr/>
-        </p:nvSpPr>
-        <p:spPr>
-          <a:xfrm rot="0" flipH="0" flipV="0">
-            <a:off x="3533775" y="5886450"/>
+          <p:cNvPr id="189" name="" descr="{&quot;isTemplate&quot;:true,&quot;type&quot;:&quot;text&quot;}"/>
+          <p:cNvSpPr txBox="1"/>
+          <p:nvPr/>
+        </p:nvSpPr>
+        <p:spPr>
+          <a:xfrm rot="0" flipH="0" flipV="0">
+            <a:off x="3314700" y="5715000"/>
             <a:ext cx="219075" cy="133350"/>
           </a:xfrm>
           <a:prstGeom prst="rect"/>
@@ -7882,13 +9293,13 @@
       </p:sp>
       <p:sp>
         <p:nvSpPr>
-          <p:cNvPr id="156" name=""/>
+          <p:cNvPr id="190" name=""/>
           <p:cNvSpPr/>
           <p:nvPr/>
         </p:nvSpPr>
         <p:spPr>
           <a:xfrm rot="0" flipH="0" flipV="0">
-            <a:off x="3924300" y="5857875"/>
+            <a:off x="3705225" y="5686425"/>
             <a:ext cx="409575" cy="190500"/>
           </a:xfrm>
           <a:prstGeom prst="roundRect">
@@ -7908,13 +9319,13 @@
       </p:sp>
       <p:sp>
         <p:nvSpPr>
-          <p:cNvPr id="157" name="" descr="{&quot;isTemplate&quot;:true,&quot;type&quot;:&quot;text&quot;}"/>
-          <p:cNvSpPr txBox="1"/>
-          <p:nvPr/>
-        </p:nvSpPr>
-        <p:spPr>
-          <a:xfrm rot="0" flipH="0" flipV="0">
-            <a:off x="4019550" y="5886450"/>
+          <p:cNvPr id="191" name="" descr="{&quot;isTemplate&quot;:true,&quot;type&quot;:&quot;text&quot;}"/>
+          <p:cNvSpPr txBox="1"/>
+          <p:nvPr/>
+        </p:nvSpPr>
+        <p:spPr>
+          <a:xfrm rot="0" flipH="0" flipV="0">
+            <a:off x="3800475" y="5715000"/>
             <a:ext cx="219075" cy="133350"/>
           </a:xfrm>
           <a:prstGeom prst="rect"/>
@@ -7943,14 +9354,14 @@
       </p:sp>
       <p:sp>
         <p:nvSpPr>
-          <p:cNvPr id="158" name="" descr="{&quot;isTemplate&quot;:true,&quot;type&quot;:&quot;text&quot;}"/>
-          <p:cNvSpPr txBox="1"/>
-          <p:nvPr/>
-        </p:nvSpPr>
-        <p:spPr>
-          <a:xfrm rot="0" flipH="0" flipV="0">
-            <a:off x="4410075" y="5886450"/>
-            <a:ext cx="1019175" cy="133350"/>
+          <p:cNvPr id="192" name="" descr="{&quot;isTemplate&quot;:true,&quot;type&quot;:&quot;text&quot;}"/>
+          <p:cNvSpPr txBox="1"/>
+          <p:nvPr/>
+        </p:nvSpPr>
+        <p:spPr>
+          <a:xfrm rot="0" flipH="0" flipV="0">
+            <a:off x="4191000" y="5715000"/>
+            <a:ext cx="1457325" cy="133350"/>
           </a:xfrm>
           <a:prstGeom prst="rect"/>
         </p:spPr>
@@ -7980,7 +9391,7 @@
                 <a:latin typeface="Microsoft YaHei"/>
                 <a:ea typeface="Microsoft YaHei"/>
               </a:rPr>
-              <a:t>四要素</a:t>
+              <a:t>四要素贯穿全层</a:t>
             </a:r>
             <a:endParaRPr/>
           </a:p>
@@ -7996,7 +9407,7 @@
   <p:cSld>
     <p:spTree>
       <p:nvGrpSpPr>
-        <p:cNvPr id="159" name="" descr="&lt;Slide style={{ width: 1280, height: 720, background: '#FFFFFF', display: 'flex', flexDirection: 'column', padding: '20px 64px 14px 64px' }}&gt;&#10;    &lt;Box&gt;&#10;        &lt;Text style={{ fontSize: 31, fontWeight: 'bold', color: '#0A1D37' }}&gt;Agent 决定如何学习，模型每天稳定地推理&lt;/Text&gt;&#10;        &lt;Text style={{ fontSize: 16, color: '#64748B', marginTop: 5 }}&gt;不是每天盲目重训——Agent 在约束下决定『是否更新、如何更新』&lt;/Text&gt;&#10;    &lt;/Box&gt;&#10;&#10;    &lt;Box style={{ flex: 1, display: 'flex', flexDirection: 'column', marginTop: 14, gap: 8 }}&gt;&#10;        &lt;Box style={{ background: '#F8FAFC', border: '1px solid #E2E8F0', borderRadius: 12, padding: '14px 20px' }}&gt;&#10;            &lt;Box style={{ flexDirection: 'row', alignItems: 'center', gap: 12 }}&gt;&#10;                &lt;Box style={{ borderLeft: '4px solid #22D3EE', paddingLeft: 10, flex: 1 }}&gt;&#10;                    &lt;Text style={{ fontSize: 15, fontWeight: 'bold', color: '#0A1D37' }}&gt;持续学习闭环 · 事件驱动&lt;/Text&gt;&#10;                &lt;/Box&gt;&#10;                &lt;Box style={{ padding: '3px 10px', border: '1px solid #22D3EE', borderRadius: 999 }}&gt;&#10;                    &lt;Text style={{ fontSize: 11.5, color: '#0891B2' }}&gt;新增数据 / 漂移信号触发&lt;/Text&gt;&#10;                &lt;/Box&gt;&#10;            &lt;/Box&gt;&#10;            &lt;Box style={{ flexDirection: 'row', alignItems: 'center', marginTop: 12, justifyContent: 'space-between' }}&gt;&#10;                &lt;Box style={{ width: 190, height: 88, background: '#FFFFFF', border: '1.5px solid #E2E8F0', borderRadius: 8, padding: 12, justifyContent: 'center' }}&gt;&#10;                    &lt;Text style={{ fontSize: 15, fontWeight: 'bold', color: '#0F2039' }}&gt;① 新增数据 / EDM 日志&lt;/Text&gt;&#10;                    &lt;Text style={{ fontSize: 12, color: '#64748B', marginTop: 6 }}&gt;触发学习信号&lt;/Text&gt;&#10;                &lt;/Box&gt;&#10;                &lt;Text style={{ fontSize: 20, color: '#94A3B8' }}&gt;→&lt;/Text&gt;&#10;                &lt;Box style={{ width: 190, height: 88, background: '#FFFFFF', border: '1.5px solid #E2E8F0', borderRadius: 8, padding: 12, justifyContent: 'center' }}&gt;&#10;                    &lt;Text style={{ fontSize: 15, fontWeight: 'bold', color: '#0F2039' }}&gt;② Agent 判断变化&lt;/Text&gt;&#10;                    &lt;Text style={{ fontSize: 12, color: '#64748B', marginTop: 6 }}&gt;读取既有 EDM 日志&lt;/Text&gt;&#10;                &lt;/Box&gt;&#10;                &lt;Text style={{ fontSize: 20, color: '#94A3B8' }}&gt;→&lt;/Text&gt;&#10;                &lt;Box style={{ width: 190, height: 88, background: '#FFFFFF', border: '1.5px solid #E2E8F0', borderRadius: 8, padding: 12, justifyContent: 'center' }}&gt;&#10;                    &lt;Text style={{ fontSize: 15, fontWeight: 'bold', color: '#0F2039' }}&gt;③ 调用训练 Skill&lt;/Text&gt;&#10;                    &lt;Text style={{ fontSize: 12, color: '#64748B', marginTop: 6 }}&gt;必要时才重训&lt;/Text&gt;&#10;                &lt;/Box&gt;&#10;                &lt;Text style={{ fontSize: 20, color: '#94A3B8' }}&gt;→&lt;/Text&gt;&#10;                &lt;Box style={{ width: 190, height: 88, background: '#FFFFFF', border: '1.5px solid #E2E8F0', borderRadius: 8, padding: 12, justifyContent: 'center' }}&gt;&#10;                    &lt;Text style={{ fontSize: 15, fontWeight: 'bold', color: '#0F2039' }}&gt;④ 时序验证&lt;/Text&gt;&#10;                    &lt;Text style={{ fontSize: 12, color: '#64748B', marginTop: 6 }}&gt;统一口径评估&lt;/Text&gt;&#10;                &lt;/Box&gt;&#10;                &lt;Text style={{ fontSize: 20, color: '#94A3B8' }}&gt;→&lt;/Text&gt;&#10;                &lt;Box style={{ width: 190, height: 88, background: '#FFFFFF', border: '1.5px solid #22D3EE', borderRadius: 8, padding: 12, justifyContent: 'center' }}&gt;&#10;                    &lt;Text style={{ fontSize: 15, fontWeight: 'bold', color: '#0F2039' }}&gt;⑤ 发布 active 模型&lt;/Text&gt;&#10;                    &lt;Text style={{ fontSize: 12, color: '#64748B', marginTop: 6 }}&gt;版本可回滚&lt;/Text&gt;&#10;                &lt;/Box&gt;&#10;            &lt;/Box&gt;&#10;            &lt;Box style={{ position: 'relative', width: '100%', height: 32, marginTop: 6 }}&gt;&#10;                &lt;Box style={{ position: 'absolute', left: 85, top: 2, width: 865, height: 16, borderLeft: '1.5px solid #94A3B8', borderBottom: '1.5px solid #94A3B8', borderRight: '1.5px solid #94A3B8' }} /&gt;&#10;                &lt;Text style={{ position: 'absolute', left: 78, top: -8, fontSize: 12, color: '#94A3B8' }}&gt;▲&lt;/Text&gt;&#10;                &lt;Text style={{ position: 'absolute', left: 0, top: 22, width: '100%', fontSize: 11, color: '#94A3B8', textAlign: 'center' }}&gt;模型表现与 EDM 日志回流为上下文 · 反馈&lt;/Text&gt;&#10;            &lt;/Box&gt;&#10;        &lt;/Box&gt;&#10;&#10;        &lt;Box style={{ flexDirection: 'column', alignItems: 'center', gap: 4 }}&gt;&#10;            &lt;Text style={{ fontSize: 18, color: '#94A3B8' }}&gt;↓&lt;/Text&gt;&#10;            &lt;Box style={{ background: '#22D3EE', borderRadius: 8, padding: '9px 24px', flexDirection: 'row', alignItems: 'center', gap: 12 }}&gt;&#10;                &lt;Text style={{ fontSize: 16.5, fontWeight: 'bold', color: '#0A1D37' }}&gt;active 模型版本&lt;/Text&gt;&#10;                &lt;Text style={{ fontSize: 12, color: '#0A1D37', opacity: 0.75 }}&gt;生产环境的唯一模型入口&lt;/Text&gt;&#10;            &lt;/Box&gt;&#10;            &lt;Box style={{ flexDirection: 'row', gap: 10, marginTop: 2 }}&gt;&#10;                &lt;Box style={{ padding: '2px 10px', border: '1px solid #E2E8F0', borderRadius: 999 }}&gt;&#10;                    &lt;Text style={{ fontSize: 11.5, color: '#64748B' }}&gt;版本化管理&lt;/Text&gt;&#10;                &lt;/Box&gt;&#10;                &lt;Box style={{ padding: '2px 10px', border: '1px solid #E2E8F0', borderRadius: 999 }}&gt;&#10;                    &lt;Text style={{ fontSize: 11.5, color: '#64748B' }}&gt;可回滚&lt;/Text&gt;&#10;                &lt;/Box&gt;&#10;                &lt;Box style={{ padding: '2px 10px', border: '1px solid #E2E8F0', borderRadius: 999 }}&gt;&#10;                    &lt;Text style={{ fontSize: 11.5, color: '#64748B' }}&gt;学习闭环维护版本&lt;/Text&gt;&#10;                &lt;/Box&gt;&#10;            &lt;/Box&gt;&#10;            &lt;Text style={{ fontSize: 18, color: '#94A3B8' }}&gt;↓&lt;/Text&gt;&#10;        &lt;/Box&gt;&#10;&#10;        &lt;Box style={{ background: '#F8FAFC', border: '1px solid #E2E8F0', borderRadius: 12, padding: '12px 20px' }}&gt;&#10;            &lt;Box style={{ flexDirection: 'row', alignItems: 'center', gap: 12 }}&gt;&#10;                &lt;Box style={{ borderLeft: '4px solid #0A1D37', paddingLeft: 10, flex: 1 }}&gt;&#10;                    &lt;Text style={{ fontSize: 15, fontWeight: 'bold', color: '#0A1D37' }}&gt;生产推理闭环 · 每日一次&lt;/Text&gt;&#10;                &lt;/Box&gt;&#10;                &lt;Box style={{ padding: '3px 10px', border: '1px solid #CBD5E1', borderRadius: 999 }}&gt;&#10;                    &lt;Text style={{ fontSize: 11.5, color: '#64748B' }}&gt;00:00 自动执行 · 无需人工&lt;/Text&gt;&#10;                &lt;/Box&gt;&#10;            &lt;/Box&gt;&#10;            &lt;Box style={{ flexDirection: 'row', alignItems: 'center', marginTop: 10, justifyContent: 'space-between' }}&gt;&#10;                &lt;Box style={{ width: 320, height: 66, background: '#FFFFFF', border: '1.5px solid #E2E8F0', borderRadius: 8, padding: 12, justifyContent: 'center' }}&gt;&#10;                    &lt;Text style={{ fontSize: 15, fontWeight: 'bold', color: '#0F2039' }}&gt;① 每日定时触发&lt;/Text&gt;&#10;                    &lt;Text style={{ fontSize: 12, color: '#64748B', marginTop: 4 }}&gt;00:00 自动执行，无需人工&lt;/Text&gt;&#10;                &lt;/Box&gt;&#10;                &lt;Text style={{ fontSize: 20, color: '#94A3B8' }}&gt;→&lt;/Text&gt;&#10;                &lt;Box style={{ width: 320, height: 66, background: '#FFFFFF', border: '1.5px solid #E2E8F0', borderRadius: 8, padding: 12, justifyContent: 'center' }}&gt;&#10;                    &lt;Text style={{ fontSize: 15, fontWeight: 'bold', color: '#0F2039' }}&gt;② 自动加载当前 active 模型&lt;/Text&gt;&#10;                    &lt;Text style={{ fontSize: 12, color: '#64748B', marginTop: 4 }}&gt;版本由学习闭环维护&lt;/Text&gt;&#10;                &lt;/Box&gt;&#10;                &lt;Text style={{ fontSize: 20, color: '#94A3B8' }}&gt;→&lt;/Text&gt;&#10;                &lt;Box style={{ width: 320, height: 66, background: '#FFFFFF', border: '1.5px solid #E2E8F0', borderRadius: 8, padding: 12, justifyContent: 'center' }}&gt;&#10;                    &lt;Text style={{ fontSize: 15, fontWeight: 'bold', color: '#0F2039' }}&gt;③ 输出未来 24 小时预测&lt;/Text&gt;&#10;                    &lt;Text style={{ fontSize: 12, color: '#64748B', marginTop: 4 }}&gt;供峰值风险研判与重过载应对&lt;/Text&gt;&#10;                &lt;/Box&gt;&#10;            &lt;/Box&gt;&#10;        &lt;/Box&gt;&#10;&#10;        &lt;Box style={{ flexDirection: 'row', gap: 12 }}&gt;&#10;            &lt;Box style={{ flex: 1, background: '#F8FAFC', border: '1px solid #E2E8F0', borderRadius: 8, padding: '10px 16px', flexDirection: 'row', alignItems: 'center', gap: 12 }}&gt;&#10;                &lt;Text style={{ fontSize: 12.5, fontWeight: 'bold', color: '#64748B' }}&gt;传统模式&lt;/Text&gt;&#10;                &lt;Text style={{ fontSize: 13, color: '#94A3B8' }}&gt;预测偏移 → 立项 / 采购 / 运维 → 1–2 个月后才更新&lt;/Text&gt;&#10;            &lt;/Box&gt;&#10;            &lt;Box style={{ flex: 1, background: 'rgba(34,211,238,0.07)', border: '1px solid #22D3EE', borderRadius: 8, padding: '10px 16px', flexDirection: 'row', alignItems: 'center', gap: 12 }}&gt;&#10;                &lt;Text style={{ fontSize: 12.5, fontWeight: 'bold', color: '#0891B2' }}&gt;持续学习&lt;/Text&gt;&#10;                &lt;Text style={{ fontSize: 13, color: '#0F2039' }}&gt;信号触发 → Agent 决策 → 验证发布 → 当日内完成&lt;/Text&gt;&#10;            &lt;/Box&gt;&#10;        &lt;/Box&gt;&#10;    &lt;/Box&gt;&#10;&#10;    &lt;Box style={{ flexDirection: 'row', marginTop: 10, alignItems: 'center' }}&gt;&#10;        &lt;Text style={{ fontSize: 12, color: '#94A3B8' }}&gt;负荷预测持续学习引擎 · 双闭环架构&lt;/Text&gt;&#10;        &lt;Box style={{ marginLeft: 'auto', flexDirection: 'row', alignItems: 'center', gap: 8 }}&gt;&#10;            &lt;Box style={{ width: 10, height: 10, background: '#22D3EE' }} /&gt;&#10;            &lt;Text style={{ fontSize: 13, color: '#64748B' }}&gt;CLE · 04 / 07&lt;/Text&gt;&#10;        &lt;/Box&gt;&#10;    &lt;/Box&gt;&#10;&lt;/Slide&gt;"/>
+        <p:cNvPr id="193" name="" descr="&lt;Slide style={{ width: 1280, height: 720, background: '#FFFFFF', display: 'flex', flexDirection: 'column', padding: '20px 64px 14px 64px' }}&gt;&#10;    &lt;Box&gt;&#10;        &lt;Text style={{ fontSize: 31, fontWeight: 'bold', color: '#0A1D37' }}&gt;Agent 决定如何学习，模型每天稳定地推理&lt;/Text&gt;&#10;        &lt;Text style={{ fontSize: 16, color: '#64748B', marginTop: 5 }}&gt;不是每天盲目重训——Agent 在约束下决定『是否更新、如何更新』&lt;/Text&gt;&#10;    &lt;/Box&gt;&#10;&#10;    &lt;Box style={{ flex: 1, display: 'flex', flexDirection: 'column', marginTop: 14, gap: 8 }}&gt;&#10;        &lt;Box style={{ background: '#F8FAFC', border: '1px solid #E2E8F0', borderRadius: 12, padding: '14px 20px' }}&gt;&#10;            &lt;Box style={{ flexDirection: 'row', alignItems: 'center', gap: 12 }}&gt;&#10;                &lt;Box style={{ borderLeft: '4px solid #22D3EE', paddingLeft: 10, flex: 1 }}&gt;&#10;                    &lt;Text style={{ fontSize: 15, fontWeight: 'bold', color: '#0A1D37' }}&gt;持续学习闭环 · 事件驱动&lt;/Text&gt;&#10;                &lt;/Box&gt;&#10;                &lt;Box style={{ padding: '3px 10px', border: '1px solid #22D3EE', borderRadius: 999 }}&gt;&#10;                    &lt;Text style={{ fontSize: 11.5, color: '#0891B2' }}&gt;新增数据 / 漂移信号触发&lt;/Text&gt;&#10;                &lt;/Box&gt;&#10;            &lt;/Box&gt;&#10;            &lt;Box style={{ flexDirection: 'row', alignItems: 'center', marginTop: 12, justifyContent: 'space-between' }}&gt;&#10;                &lt;Box style={{ width: 190, height: 88, background: '#FFFFFF', border: '1.5px solid #E2E8F0', borderRadius: 8, padding: 12, justifyContent: 'center' }}&gt;&#10;                    &lt;Text style={{ fontSize: 15, fontWeight: 'bold', color: '#0F2039' }}&gt;① 新增数据 / EDM 日志&lt;/Text&gt;&#10;                    &lt;Text style={{ fontSize: 12, color: '#64748B', marginTop: 6 }}&gt;触发学习信号&lt;/Text&gt;&#10;                &lt;/Box&gt;&#10;                &lt;Text style={{ fontSize: 20, color: '#94A3B8' }}&gt;→&lt;/Text&gt;&#10;                &lt;Box style={{ width: 190, height: 88, background: '#FFFFFF', border: '1.5px solid #E2E8F0', borderRadius: 8, padding: 12, justifyContent: 'center' }}&gt;&#10;                    &lt;Text style={{ fontSize: 15, fontWeight: 'bold', color: '#0F2039' }}&gt;② Agent 判断变化&lt;/Text&gt;&#10;                    &lt;Text style={{ fontSize: 12, color: '#64748B', marginTop: 6 }}&gt;读取既有 EDM 日志&lt;/Text&gt;&#10;                &lt;/Box&gt;&#10;                &lt;Text style={{ fontSize: 20, color: '#94A3B8' }}&gt;→&lt;/Text&gt;&#10;                &lt;Box style={{ width: 190, height: 88, background: '#FFFFFF', border: '1.5px solid #E2E8F0', borderRadius: 8, padding: 12, justifyContent: 'center' }}&gt;&#10;                    &lt;Text style={{ fontSize: 15, fontWeight: 'bold', color: '#0F2039' }}&gt;③ 调用训练 Skill&lt;/Text&gt;&#10;                    &lt;Text style={{ fontSize: 12, color: '#64748B', marginTop: 6 }}&gt;必要时才重训&lt;/Text&gt;&#10;                &lt;/Box&gt;&#10;                &lt;Text style={{ fontSize: 20, color: '#94A3B8' }}&gt;→&lt;/Text&gt;&#10;                &lt;Box style={{ width: 190, height: 88, background: '#FFFFFF', border: '1.5px solid #E2E8F0', borderRadius: 8, padding: 12, justifyContent: 'center' }}&gt;&#10;                    &lt;Text style={{ fontSize: 15, fontWeight: 'bold', color: '#0F2039' }}&gt;④ 时序验证&lt;/Text&gt;&#10;                    &lt;Text style={{ fontSize: 12, color: '#64748B', marginTop: 6 }}&gt;统一口径评估&lt;/Text&gt;&#10;                &lt;/Box&gt;&#10;                &lt;Text style={{ fontSize: 20, color: '#94A3B8' }}&gt;→&lt;/Text&gt;&#10;                &lt;Box style={{ width: 190, height: 88, background: '#FFFFFF', border: '1.5px solid #22D3EE', borderRadius: 8, padding: 12, justifyContent: 'center' }}&gt;&#10;                    &lt;Text style={{ fontSize: 15, fontWeight: 'bold', color: '#0F2039' }}&gt;⑤ 发布 active 模型&lt;/Text&gt;&#10;                    &lt;Text style={{ fontSize: 12, color: '#64748B', marginTop: 6 }}&gt;版本可回滚&lt;/Text&gt;&#10;                &lt;/Box&gt;&#10;            &lt;/Box&gt;&#10;            &lt;Box style={{ position: 'relative', width: '100%', height: 32, marginTop: 6 }}&gt;&#10;                &lt;Box style={{ position: 'absolute', left: 85, top: 2, width: 865, height: 16, borderLeft: '1.5px solid #94A3B8', borderBottom: '1.5px solid #94A3B8', borderRight: '1.5px solid #94A3B8' }} /&gt;&#10;                &lt;Text style={{ position: 'absolute', left: 78, top: -8, fontSize: 12, color: '#94A3B8' }}&gt;▲&lt;/Text&gt;&#10;                &lt;Text style={{ position: 'absolute', left: 0, top: 22, width: '100%', fontSize: 11, color: '#94A3B8', textAlign: 'center' }}&gt;模型表现与 EDM 日志回流为上下文 · 反馈&lt;/Text&gt;&#10;            &lt;/Box&gt;&#10;        &lt;/Box&gt;&#10;&#10;        &lt;Box style={{ flexDirection: 'column', alignItems: 'center', gap: 4 }}&gt;&#10;            &lt;Text style={{ fontSize: 18, color: '#94A3B8' }}&gt;↓&lt;/Text&gt;&#10;            &lt;Box style={{ background: '#22D3EE', borderRadius: 8, padding: '9px 24px', flexDirection: 'row', alignItems: 'center', gap: 12 }}&gt;&#10;                &lt;Text style={{ fontSize: 16.5, fontWeight: 'bold', color: '#0A1D37' }}&gt;active 模型版本&lt;/Text&gt;&#10;                &lt;Text style={{ fontSize: 12, color: '#0A1D37', opacity: 0.75 }}&gt;生产环境的唯一模型入口&lt;/Text&gt;&#10;            &lt;/Box&gt;&#10;            &lt;Box style={{ flexDirection: 'row', gap: 10, marginTop: 2 }}&gt;&#10;                &lt;Box style={{ padding: '2px 10px', border: '1px solid #E2E8F0', borderRadius: 999 }}&gt;&#10;                    &lt;Text style={{ fontSize: 11.5, color: '#64748B' }}&gt;版本化管理&lt;/Text&gt;&#10;                &lt;/Box&gt;&#10;                &lt;Box style={{ padding: '2px 10px', border: '1px solid #E2E8F0', borderRadius: 999 }}&gt;&#10;                    &lt;Text style={{ fontSize: 11.5, color: '#64748B' }}&gt;可回滚&lt;/Text&gt;&#10;                &lt;/Box&gt;&#10;                &lt;Box style={{ padding: '2px 10px', border: '1px solid #E2E8F0', borderRadius: 999 }}&gt;&#10;                    &lt;Text style={{ fontSize: 11.5, color: '#64748B' }}&gt;学习闭环维护版本&lt;/Text&gt;&#10;                &lt;/Box&gt;&#10;            &lt;/Box&gt;&#10;            &lt;Text style={{ fontSize: 18, color: '#94A3B8' }}&gt;↓&lt;/Text&gt;&#10;        &lt;/Box&gt;&#10;&#10;        &lt;Box style={{ background: '#F8FAFC', border: '1px solid #E2E8F0', borderRadius: 12, padding: '12px 20px' }}&gt;&#10;            &lt;Box style={{ flexDirection: 'row', alignItems: 'center', gap: 12 }}&gt;&#10;                &lt;Box style={{ borderLeft: '4px solid #0A1D37', paddingLeft: 10, flex: 1 }}&gt;&#10;                    &lt;Text style={{ fontSize: 15, fontWeight: 'bold', color: '#0A1D37' }}&gt;生产推理闭环 · 每日一次&lt;/Text&gt;&#10;                &lt;/Box&gt;&#10;                &lt;Box style={{ padding: '3px 10px', border: '1px solid #CBD5E1', borderRadius: 999 }}&gt;&#10;                    &lt;Text style={{ fontSize: 11.5, color: '#64748B' }}&gt;00:00 自动执行 · 无需人工&lt;/Text&gt;&#10;                &lt;/Box&gt;&#10;            &lt;/Box&gt;&#10;            &lt;Box style={{ flexDirection: 'row', alignItems: 'center', marginTop: 10, justifyContent: 'space-between' }}&gt;&#10;                &lt;Box style={{ width: 320, height: 66, background: '#FFFFFF', border: '1.5px solid #E2E8F0', borderRadius: 8, padding: 12, justifyContent: 'center' }}&gt;&#10;                    &lt;Text style={{ fontSize: 15, fontWeight: 'bold', color: '#0F2039' }}&gt;① 每日定时触发&lt;/Text&gt;&#10;                    &lt;Text style={{ fontSize: 12, color: '#64748B', marginTop: 4 }}&gt;00:00 自动执行，无需人工&lt;/Text&gt;&#10;                &lt;/Box&gt;&#10;                &lt;Text style={{ fontSize: 20, color: '#94A3B8' }}&gt;→&lt;/Text&gt;&#10;                &lt;Box style={{ width: 320, height: 66, background: '#FFFFFF', border: '1.5px solid #E2E8F0', borderRadius: 8, padding: 12, justifyContent: 'center' }}&gt;&#10;                    &lt;Text style={{ fontSize: 15, fontWeight: 'bold', color: '#0F2039' }}&gt;② 自动加载当前 active 模型&lt;/Text&gt;&#10;                    &lt;Text style={{ fontSize: 12, color: '#64748B', marginTop: 4 }}&gt;版本由学习闭环维护&lt;/Text&gt;&#10;                &lt;/Box&gt;&#10;                &lt;Text style={{ fontSize: 20, color: '#94A3B8' }}&gt;→&lt;/Text&gt;&#10;                &lt;Box style={{ width: 320, height: 66, background: '#FFFFFF', border: '1.5px solid #E2E8F0', borderRadius: 8, padding: 12, justifyContent: 'center' }}&gt;&#10;                    &lt;Text style={{ fontSize: 15, fontWeight: 'bold', color: '#0F2039' }}&gt;③ 输出未来 24 小时预测&lt;/Text&gt;&#10;                    &lt;Text style={{ fontSize: 12, color: '#64748B', marginTop: 4 }}&gt;供峰值风险研判与重过载应对&lt;/Text&gt;&#10;                &lt;/Box&gt;&#10;            &lt;/Box&gt;&#10;        &lt;/Box&gt;&#10;&#10;        &lt;Box style={{ flexDirection: 'row', gap: 12 }}&gt;&#10;            &lt;Box style={{ flex: 1, background: '#F8FAFC', border: '1px solid #E2E8F0', borderRadius: 8, padding: '10px 16px', flexDirection: 'row', alignItems: 'center', gap: 12 }}&gt;&#10;                &lt;Text style={{ fontSize: 12.5, fontWeight: 'bold', color: '#64748B' }}&gt;传统模式&lt;/Text&gt;&#10;                &lt;Text style={{ fontSize: 13, color: '#94A3B8' }}&gt;预测偏移 → 立项 / 采购 / 运维 → 1–2 个月后才更新&lt;/Text&gt;&#10;            &lt;/Box&gt;&#10;            &lt;Box style={{ flex: 1, background: 'rgba(34,211,238,0.07)', border: '1px solid #22D3EE', borderRadius: 8, padding: '10px 16px', flexDirection: 'row', alignItems: 'center', gap: 12 }}&gt;&#10;                &lt;Text style={{ fontSize: 12.5, fontWeight: 'bold', color: '#0891B2' }}&gt;持续学习&lt;/Text&gt;&#10;                &lt;Text style={{ fontSize: 13, color: '#0F2039' }}&gt;信号触发 → Agent 决策 → 验证发布 → 当日内完成&lt;/Text&gt;&#10;            &lt;/Box&gt;&#10;        &lt;/Box&gt;&#10;    &lt;/Box&gt;&#10;&#10;    &lt;Box style={{ flexDirection: 'row', marginTop: 10, alignItems: 'center' }}&gt;&#10;        &lt;Text style={{ fontSize: 12, color: '#94A3B8' }}&gt;负荷预测持续学习引擎 · 双闭环架构&lt;/Text&gt;&#10;        &lt;Box style={{ marginLeft: 'auto', flexDirection: 'row', alignItems: 'center', gap: 8 }}&gt;&#10;            &lt;Box style={{ width: 10, height: 10, background: '#22D3EE' }} /&gt;&#10;            &lt;Text style={{ fontSize: 13, color: '#64748B' }}&gt;CLE · 04 / 07&lt;/Text&gt;&#10;        &lt;/Box&gt;&#10;    &lt;/Box&gt;&#10;&lt;/Slide&gt;"/>
         <p:cNvGrpSpPr/>
         <p:nvPr/>
       </p:nvGrpSpPr>
@@ -8010,7 +9421,7 @@
       </p:grpSpPr>
       <p:sp>
         <p:nvSpPr>
-          <p:cNvPr id="160" name=""/>
+          <p:cNvPr id="194" name=""/>
           <p:cNvSpPr/>
           <p:nvPr/>
         </p:nvSpPr>
@@ -8034,7 +9445,7 @@
       </p:sp>
       <p:sp>
         <p:nvSpPr>
-          <p:cNvPr id="161" name="" descr="{&quot;isTemplate&quot;:true,&quot;type&quot;:&quot;text&quot;}"/>
+          <p:cNvPr id="195" name="" descr="{&quot;isTemplate&quot;:true,&quot;type&quot;:&quot;text&quot;}"/>
           <p:cNvSpPr txBox="1"/>
           <p:nvPr/>
         </p:nvSpPr>
@@ -8079,7 +9490,7 @@
       </p:sp>
       <p:sp>
         <p:nvSpPr>
-          <p:cNvPr id="162" name="" descr="{&quot;isTemplate&quot;:true,&quot;type&quot;:&quot;text&quot;}"/>
+          <p:cNvPr id="196" name="" descr="{&quot;isTemplate&quot;:true,&quot;type&quot;:&quot;text&quot;}"/>
           <p:cNvSpPr txBox="1"/>
           <p:nvPr/>
         </p:nvSpPr>
@@ -8134,7 +9545,7 @@
       </p:sp>
       <p:sp>
         <p:nvSpPr>
-          <p:cNvPr id="163" name=""/>
+          <p:cNvPr id="197" name=""/>
           <p:cNvSpPr/>
           <p:nvPr/>
         </p:nvSpPr>
@@ -8165,7 +9576,7 @@
       </p:sp>
       <p:sp>
         <p:nvSpPr>
-          <p:cNvPr id="164" name=""/>
+          <p:cNvPr id="198" name=""/>
           <p:cNvSpPr/>
           <p:nvPr/>
         </p:nvSpPr>
@@ -8205,7 +9616,7 @@
       </p:sp>
       <p:sp>
         <p:nvSpPr>
-          <p:cNvPr id="165" name="" descr="{&quot;isTemplate&quot;:true,&quot;type&quot;:&quot;text&quot;}"/>
+          <p:cNvPr id="199" name="" descr="{&quot;isTemplate&quot;:true,&quot;type&quot;:&quot;text&quot;}"/>
           <p:cNvSpPr txBox="1"/>
           <p:nvPr/>
         </p:nvSpPr>
@@ -8260,7 +9671,7 @@
       </p:sp>
       <p:sp>
         <p:nvSpPr>
-          <p:cNvPr id="166" name=""/>
+          <p:cNvPr id="200" name=""/>
           <p:cNvSpPr/>
           <p:nvPr/>
         </p:nvSpPr>
@@ -8288,7 +9699,7 @@
       </p:sp>
       <p:sp>
         <p:nvSpPr>
-          <p:cNvPr id="167" name="" descr="{&quot;isTemplate&quot;:true,&quot;type&quot;:&quot;text&quot;}"/>
+          <p:cNvPr id="201" name="" descr="{&quot;isTemplate&quot;:true,&quot;type&quot;:&quot;text&quot;}"/>
           <p:cNvSpPr txBox="1"/>
           <p:nvPr/>
         </p:nvSpPr>
@@ -8343,7 +9754,7 @@
       </p:sp>
       <p:sp>
         <p:nvSpPr>
-          <p:cNvPr id="168" name=""/>
+          <p:cNvPr id="202" name=""/>
           <p:cNvSpPr/>
           <p:nvPr/>
         </p:nvSpPr>
@@ -8374,7 +9785,7 @@
       </p:sp>
       <p:sp>
         <p:nvSpPr>
-          <p:cNvPr id="169" name="" descr="{&quot;isTemplate&quot;:true,&quot;type&quot;:&quot;text&quot;}"/>
+          <p:cNvPr id="203" name="" descr="{&quot;isTemplate&quot;:true,&quot;type&quot;:&quot;text&quot;}"/>
           <p:cNvSpPr txBox="1"/>
           <p:nvPr/>
         </p:nvSpPr>
@@ -8439,7 +9850,7 @@
       </p:sp>
       <p:sp>
         <p:nvSpPr>
-          <p:cNvPr id="170" name="" descr="{&quot;isTemplate&quot;:true,&quot;type&quot;:&quot;text&quot;}"/>
+          <p:cNvPr id="204" name="" descr="{&quot;isTemplate&quot;:true,&quot;type&quot;:&quot;text&quot;}"/>
           <p:cNvSpPr txBox="1"/>
           <p:nvPr/>
         </p:nvSpPr>
@@ -8474,7 +9885,7 @@
       </p:sp>
       <p:sp>
         <p:nvSpPr>
-          <p:cNvPr id="171" name="" descr="{&quot;isTemplate&quot;:true,&quot;type&quot;:&quot;text&quot;}"/>
+          <p:cNvPr id="205" name="" descr="{&quot;isTemplate&quot;:true,&quot;type&quot;:&quot;text&quot;}"/>
           <p:cNvSpPr txBox="1"/>
           <p:nvPr/>
         </p:nvSpPr>
@@ -8509,7 +9920,7 @@
       </p:sp>
       <p:sp>
         <p:nvSpPr>
-          <p:cNvPr id="172" name=""/>
+          <p:cNvPr id="206" name=""/>
           <p:cNvSpPr/>
           <p:nvPr/>
         </p:nvSpPr>
@@ -8540,7 +9951,7 @@
       </p:sp>
       <p:sp>
         <p:nvSpPr>
-          <p:cNvPr id="173" name="" descr="{&quot;isTemplate&quot;:true,&quot;type&quot;:&quot;text&quot;}"/>
+          <p:cNvPr id="207" name="" descr="{&quot;isTemplate&quot;:true,&quot;type&quot;:&quot;text&quot;}"/>
           <p:cNvSpPr txBox="1"/>
           <p:nvPr/>
         </p:nvSpPr>
@@ -8585,7 +9996,7 @@
       </p:sp>
       <p:sp>
         <p:nvSpPr>
-          <p:cNvPr id="174" name="" descr="{&quot;isTemplate&quot;:true,&quot;type&quot;:&quot;text&quot;}"/>
+          <p:cNvPr id="208" name="" descr="{&quot;isTemplate&quot;:true,&quot;type&quot;:&quot;text&quot;}"/>
           <p:cNvSpPr txBox="1"/>
           <p:nvPr/>
         </p:nvSpPr>
@@ -8640,7 +10051,7 @@
       </p:sp>
       <p:sp>
         <p:nvSpPr>
-          <p:cNvPr id="175" name="" descr="{&quot;isTemplate&quot;:true,&quot;type&quot;:&quot;text&quot;}"/>
+          <p:cNvPr id="209" name="" descr="{&quot;isTemplate&quot;:true,&quot;type&quot;:&quot;text&quot;}"/>
           <p:cNvSpPr txBox="1"/>
           <p:nvPr/>
         </p:nvSpPr>
@@ -8675,7 +10086,7 @@
       </p:sp>
       <p:sp>
         <p:nvSpPr>
-          <p:cNvPr id="176" name=""/>
+          <p:cNvPr id="210" name=""/>
           <p:cNvSpPr/>
           <p:nvPr/>
         </p:nvSpPr>
@@ -8706,7 +10117,7 @@
       </p:sp>
       <p:sp>
         <p:nvSpPr>
-          <p:cNvPr id="177" name="" descr="{&quot;isTemplate&quot;:true,&quot;type&quot;:&quot;text&quot;}"/>
+          <p:cNvPr id="211" name="" descr="{&quot;isTemplate&quot;:true,&quot;type&quot;:&quot;text&quot;}"/>
           <p:cNvSpPr txBox="1"/>
           <p:nvPr/>
         </p:nvSpPr>
@@ -8761,7 +10172,7 @@
       </p:sp>
       <p:sp>
         <p:nvSpPr>
-          <p:cNvPr id="178" name="" descr="{&quot;isTemplate&quot;:true,&quot;type&quot;:&quot;text&quot;}"/>
+          <p:cNvPr id="212" name="" descr="{&quot;isTemplate&quot;:true,&quot;type&quot;:&quot;text&quot;}"/>
           <p:cNvSpPr txBox="1"/>
           <p:nvPr/>
         </p:nvSpPr>
@@ -8796,7 +10207,7 @@
       </p:sp>
       <p:sp>
         <p:nvSpPr>
-          <p:cNvPr id="179" name="" descr="{&quot;isTemplate&quot;:true,&quot;type&quot;:&quot;text&quot;}"/>
+          <p:cNvPr id="213" name="" descr="{&quot;isTemplate&quot;:true,&quot;type&quot;:&quot;text&quot;}"/>
           <p:cNvSpPr txBox="1"/>
           <p:nvPr/>
         </p:nvSpPr>
@@ -8831,7 +10242,7 @@
       </p:sp>
       <p:sp>
         <p:nvSpPr>
-          <p:cNvPr id="180" name=""/>
+          <p:cNvPr id="214" name=""/>
           <p:cNvSpPr/>
           <p:nvPr/>
         </p:nvSpPr>
@@ -8862,7 +10273,7 @@
       </p:sp>
       <p:sp>
         <p:nvSpPr>
-          <p:cNvPr id="181" name="" descr="{&quot;isTemplate&quot;:true,&quot;type&quot;:&quot;text&quot;}"/>
+          <p:cNvPr id="215" name="" descr="{&quot;isTemplate&quot;:true,&quot;type&quot;:&quot;text&quot;}"/>
           <p:cNvSpPr txBox="1"/>
           <p:nvPr/>
         </p:nvSpPr>
@@ -8907,7 +10318,7 @@
       </p:sp>
       <p:sp>
         <p:nvSpPr>
-          <p:cNvPr id="182" name="" descr="{&quot;isTemplate&quot;:true,&quot;type&quot;:&quot;text&quot;}"/>
+          <p:cNvPr id="216" name="" descr="{&quot;isTemplate&quot;:true,&quot;type&quot;:&quot;text&quot;}"/>
           <p:cNvSpPr txBox="1"/>
           <p:nvPr/>
         </p:nvSpPr>
@@ -8942,7 +10353,7 @@
       </p:sp>
       <p:sp>
         <p:nvSpPr>
-          <p:cNvPr id="183" name="" descr="{&quot;isTemplate&quot;:true,&quot;type&quot;:&quot;text&quot;}"/>
+          <p:cNvPr id="217" name="" descr="{&quot;isTemplate&quot;:true,&quot;type&quot;:&quot;text&quot;}"/>
           <p:cNvSpPr txBox="1"/>
           <p:nvPr/>
         </p:nvSpPr>
@@ -8977,7 +10388,7 @@
       </p:sp>
       <p:sp>
         <p:nvSpPr>
-          <p:cNvPr id="184" name=""/>
+          <p:cNvPr id="218" name=""/>
           <p:cNvSpPr/>
           <p:nvPr/>
         </p:nvSpPr>
@@ -9008,7 +10419,7 @@
       </p:sp>
       <p:sp>
         <p:nvSpPr>
-          <p:cNvPr id="185" name="" descr="{&quot;isTemplate&quot;:true,&quot;type&quot;:&quot;text&quot;}"/>
+          <p:cNvPr id="219" name="" descr="{&quot;isTemplate&quot;:true,&quot;type&quot;:&quot;text&quot;}"/>
           <p:cNvSpPr txBox="1"/>
           <p:nvPr/>
         </p:nvSpPr>
@@ -9073,7 +10484,7 @@
       </p:sp>
       <p:sp>
         <p:nvSpPr>
-          <p:cNvPr id="186" name="" descr="{&quot;isTemplate&quot;:true,&quot;type&quot;:&quot;text&quot;}"/>
+          <p:cNvPr id="220" name="" descr="{&quot;isTemplate&quot;:true,&quot;type&quot;:&quot;text&quot;}"/>
           <p:cNvSpPr txBox="1"/>
           <p:nvPr/>
         </p:nvSpPr>
@@ -9108,7 +10519,7 @@
       </p:sp>
       <p:sp>
         <p:nvSpPr>
-          <p:cNvPr id="187" name="" descr="{&quot;isTemplate&quot;:true,&quot;type&quot;:&quot;text&quot;}"/>
+          <p:cNvPr id="221" name="" descr="{&quot;isTemplate&quot;:true,&quot;type&quot;:&quot;text&quot;}"/>
           <p:cNvSpPr txBox="1"/>
           <p:nvPr/>
         </p:nvSpPr>
@@ -9143,7 +10554,7 @@
       </p:sp>
       <p:sp>
         <p:nvSpPr>
-          <p:cNvPr id="188" name=""/>
+          <p:cNvPr id="222" name=""/>
           <p:cNvSpPr/>
           <p:nvPr/>
         </p:nvSpPr>
@@ -9169,7 +10580,7 @@
       </p:sp>
       <p:sp>
         <p:nvSpPr>
-          <p:cNvPr id="189" name="" descr="{&quot;isTemplate&quot;:true,&quot;type&quot;:&quot;text&quot;}"/>
+          <p:cNvPr id="223" name="" descr="{&quot;isTemplate&quot;:true,&quot;type&quot;:&quot;text&quot;}"/>
           <p:cNvSpPr txBox="1"/>
           <p:nvPr/>
         </p:nvSpPr>
@@ -9214,7 +10625,7 @@
       </p:sp>
       <p:sp>
         <p:nvSpPr>
-          <p:cNvPr id="190" name=""/>
+          <p:cNvPr id="224" name=""/>
           <p:cNvSpPr/>
           <p:nvPr/>
         </p:nvSpPr>
@@ -9242,7 +10653,7 @@
       </p:sp>
       <p:sp>
         <p:nvSpPr>
-          <p:cNvPr id="191" name="" descr="{&quot;isTemplate&quot;:true,&quot;type&quot;:&quot;text&quot;}"/>
+          <p:cNvPr id="225" name="" descr="{&quot;isTemplate&quot;:true,&quot;type&quot;:&quot;text&quot;}"/>
           <p:cNvSpPr txBox="1"/>
           <p:nvPr/>
         </p:nvSpPr>
@@ -9277,7 +10688,7 @@
       </p:sp>
       <p:sp>
         <p:nvSpPr>
-          <p:cNvPr id="192" name=""/>
+          <p:cNvPr id="226" name=""/>
           <p:cNvSpPr/>
           <p:nvPr/>
         </p:nvSpPr>
@@ -9305,7 +10716,7 @@
       </p:sp>
       <p:sp>
         <p:nvSpPr>
-          <p:cNvPr id="193" name="" descr="{&quot;isTemplate&quot;:true,&quot;type&quot;:&quot;text&quot;}"/>
+          <p:cNvPr id="227" name="" descr="{&quot;isTemplate&quot;:true,&quot;type&quot;:&quot;text&quot;}"/>
           <p:cNvSpPr txBox="1"/>
           <p:nvPr/>
         </p:nvSpPr>
@@ -9340,7 +10751,7 @@
       </p:sp>
       <p:sp>
         <p:nvSpPr>
-          <p:cNvPr id="194" name=""/>
+          <p:cNvPr id="228" name=""/>
           <p:cNvSpPr/>
           <p:nvPr/>
         </p:nvSpPr>
@@ -9368,7 +10779,7 @@
       </p:sp>
       <p:sp>
         <p:nvSpPr>
-          <p:cNvPr id="195" name="" descr="{&quot;isTemplate&quot;:true,&quot;type&quot;:&quot;text&quot;}"/>
+          <p:cNvPr id="229" name="" descr="{&quot;isTemplate&quot;:true,&quot;type&quot;:&quot;text&quot;}"/>
           <p:cNvSpPr txBox="1"/>
           <p:nvPr/>
         </p:nvSpPr>
@@ -9403,7 +10814,7 @@
       </p:sp>
       <p:sp>
         <p:nvSpPr>
-          <p:cNvPr id="196" name="" descr="{&quot;isTemplate&quot;:true,&quot;type&quot;:&quot;text&quot;}"/>
+          <p:cNvPr id="230" name="" descr="{&quot;isTemplate&quot;:true,&quot;type&quot;:&quot;text&quot;}"/>
           <p:cNvSpPr txBox="1"/>
           <p:nvPr/>
         </p:nvSpPr>
@@ -9438,7 +10849,7 @@
       </p:sp>
       <p:sp>
         <p:nvSpPr>
-          <p:cNvPr id="197" name=""/>
+          <p:cNvPr id="231" name=""/>
           <p:cNvSpPr/>
           <p:nvPr/>
         </p:nvSpPr>
@@ -9469,7 +10880,7 @@
       </p:sp>
       <p:sp>
         <p:nvSpPr>
-          <p:cNvPr id="198" name=""/>
+          <p:cNvPr id="232" name=""/>
           <p:cNvSpPr/>
           <p:nvPr/>
         </p:nvSpPr>
@@ -9509,7 +10920,7 @@
       </p:sp>
       <p:sp>
         <p:nvSpPr>
-          <p:cNvPr id="199" name="" descr="{&quot;isTemplate&quot;:true,&quot;type&quot;:&quot;text&quot;}"/>
+          <p:cNvPr id="233" name="" descr="{&quot;isTemplate&quot;:true,&quot;type&quot;:&quot;text&quot;}"/>
           <p:cNvSpPr txBox="1"/>
           <p:nvPr/>
         </p:nvSpPr>
@@ -9564,7 +10975,7 @@
       </p:sp>
       <p:sp>
         <p:nvSpPr>
-          <p:cNvPr id="200" name=""/>
+          <p:cNvPr id="234" name=""/>
           <p:cNvSpPr/>
           <p:nvPr/>
         </p:nvSpPr>
@@ -9592,7 +11003,7 @@
       </p:sp>
       <p:sp>
         <p:nvSpPr>
-          <p:cNvPr id="201" name="" descr="{&quot;isTemplate&quot;:true,&quot;type&quot;:&quot;text&quot;}"/>
+          <p:cNvPr id="235" name="" descr="{&quot;isTemplate&quot;:true,&quot;type&quot;:&quot;text&quot;}"/>
           <p:cNvSpPr txBox="1"/>
           <p:nvPr/>
         </p:nvSpPr>
@@ -9657,7 +11068,7 @@
       </p:sp>
       <p:sp>
         <p:nvSpPr>
-          <p:cNvPr id="202" name=""/>
+          <p:cNvPr id="236" name=""/>
           <p:cNvSpPr/>
           <p:nvPr/>
         </p:nvSpPr>
@@ -9688,7 +11099,7 @@
       </p:sp>
       <p:sp>
         <p:nvSpPr>
-          <p:cNvPr id="203" name="" descr="{&quot;isTemplate&quot;:true,&quot;type&quot;:&quot;text&quot;}"/>
+          <p:cNvPr id="237" name="" descr="{&quot;isTemplate&quot;:true,&quot;type&quot;:&quot;text&quot;}"/>
           <p:cNvSpPr txBox="1"/>
           <p:nvPr/>
         </p:nvSpPr>
@@ -9733,7 +11144,7 @@
       </p:sp>
       <p:sp>
         <p:nvSpPr>
-          <p:cNvPr id="204" name="" descr="{&quot;isTemplate&quot;:true,&quot;type&quot;:&quot;text&quot;}"/>
+          <p:cNvPr id="238" name="" descr="{&quot;isTemplate&quot;:true,&quot;type&quot;:&quot;text&quot;}"/>
           <p:cNvSpPr txBox="1"/>
           <p:nvPr/>
         </p:nvSpPr>
@@ -9778,7 +11189,7 @@
       </p:sp>
       <p:sp>
         <p:nvSpPr>
-          <p:cNvPr id="205" name="" descr="{&quot;isTemplate&quot;:true,&quot;type&quot;:&quot;text&quot;}"/>
+          <p:cNvPr id="239" name="" descr="{&quot;isTemplate&quot;:true,&quot;type&quot;:&quot;text&quot;}"/>
           <p:cNvSpPr txBox="1"/>
           <p:nvPr/>
         </p:nvSpPr>
@@ -9813,7 +11224,7 @@
       </p:sp>
       <p:sp>
         <p:nvSpPr>
-          <p:cNvPr id="206" name=""/>
+          <p:cNvPr id="240" name=""/>
           <p:cNvSpPr/>
           <p:nvPr/>
         </p:nvSpPr>
@@ -9844,7 +11255,7 @@
       </p:sp>
       <p:sp>
         <p:nvSpPr>
-          <p:cNvPr id="207" name="" descr="{&quot;isTemplate&quot;:true,&quot;type&quot;:&quot;text&quot;}"/>
+          <p:cNvPr id="241" name="" descr="{&quot;isTemplate&quot;:true,&quot;type&quot;:&quot;text&quot;}"/>
           <p:cNvSpPr txBox="1"/>
           <p:nvPr/>
         </p:nvSpPr>
@@ -9909,7 +11320,7 @@
       </p:sp>
       <p:sp>
         <p:nvSpPr>
-          <p:cNvPr id="208" name="" descr="{&quot;isTemplate&quot;:true,&quot;type&quot;:&quot;text&quot;}"/>
+          <p:cNvPr id="242" name="" descr="{&quot;isTemplate&quot;:true,&quot;type&quot;:&quot;text&quot;}"/>
           <p:cNvSpPr txBox="1"/>
           <p:nvPr/>
         </p:nvSpPr>
@@ -9944,7 +11355,7 @@
       </p:sp>
       <p:sp>
         <p:nvSpPr>
-          <p:cNvPr id="209" name="" descr="{&quot;isTemplate&quot;:true,&quot;type&quot;:&quot;text&quot;}"/>
+          <p:cNvPr id="243" name="" descr="{&quot;isTemplate&quot;:true,&quot;type&quot;:&quot;text&quot;}"/>
           <p:cNvSpPr txBox="1"/>
           <p:nvPr/>
         </p:nvSpPr>
@@ -9979,7 +11390,7 @@
       </p:sp>
       <p:sp>
         <p:nvSpPr>
-          <p:cNvPr id="210" name=""/>
+          <p:cNvPr id="244" name=""/>
           <p:cNvSpPr/>
           <p:nvPr/>
         </p:nvSpPr>
@@ -10010,7 +11421,7 @@
       </p:sp>
       <p:sp>
         <p:nvSpPr>
-          <p:cNvPr id="211" name="" descr="{&quot;isTemplate&quot;:true,&quot;type&quot;:&quot;text&quot;}"/>
+          <p:cNvPr id="245" name="" descr="{&quot;isTemplate&quot;:true,&quot;type&quot;:&quot;text&quot;}"/>
           <p:cNvSpPr txBox="1"/>
           <p:nvPr/>
         </p:nvSpPr>
@@ -10075,7 +11486,7 @@
       </p:sp>
       <p:sp>
         <p:nvSpPr>
-          <p:cNvPr id="212" name="" descr="{&quot;isTemplate&quot;:true,&quot;type&quot;:&quot;text&quot;}"/>
+          <p:cNvPr id="246" name="" descr="{&quot;isTemplate&quot;:true,&quot;type&quot;:&quot;text&quot;}"/>
           <p:cNvSpPr txBox="1"/>
           <p:nvPr/>
         </p:nvSpPr>
@@ -10110,7 +11521,7 @@
       </p:sp>
       <p:sp>
         <p:nvSpPr>
-          <p:cNvPr id="213" name=""/>
+          <p:cNvPr id="247" name=""/>
           <p:cNvSpPr/>
           <p:nvPr/>
         </p:nvSpPr>
@@ -10141,7 +11552,7 @@
       </p:sp>
       <p:sp>
         <p:nvSpPr>
-          <p:cNvPr id="214" name="" descr="{&quot;isTemplate&quot;:true,&quot;type&quot;:&quot;text&quot;}"/>
+          <p:cNvPr id="248" name="" descr="{&quot;isTemplate&quot;:true,&quot;type&quot;:&quot;text&quot;}"/>
           <p:cNvSpPr txBox="1"/>
           <p:nvPr/>
         </p:nvSpPr>
@@ -10176,7 +11587,7 @@
       </p:sp>
       <p:sp>
         <p:nvSpPr>
-          <p:cNvPr id="215" name="" descr="{&quot;isTemplate&quot;:true,&quot;type&quot;:&quot;text&quot;}"/>
+          <p:cNvPr id="249" name="" descr="{&quot;isTemplate&quot;:true,&quot;type&quot;:&quot;text&quot;}"/>
           <p:cNvSpPr txBox="1"/>
           <p:nvPr/>
         </p:nvSpPr>
@@ -10291,7 +11702,7 @@
       </p:sp>
       <p:sp>
         <p:nvSpPr>
-          <p:cNvPr id="216" name=""/>
+          <p:cNvPr id="250" name=""/>
           <p:cNvSpPr/>
           <p:nvPr/>
         </p:nvSpPr>
@@ -10324,7 +11735,7 @@
       </p:sp>
       <p:sp>
         <p:nvSpPr>
-          <p:cNvPr id="217" name="" descr="{&quot;isTemplate&quot;:true,&quot;type&quot;:&quot;text&quot;}"/>
+          <p:cNvPr id="251" name="" descr="{&quot;isTemplate&quot;:true,&quot;type&quot;:&quot;text&quot;}"/>
           <p:cNvSpPr txBox="1"/>
           <p:nvPr/>
         </p:nvSpPr>
@@ -10359,7 +11770,7 @@
       </p:sp>
       <p:sp>
         <p:nvSpPr>
-          <p:cNvPr id="218" name="" descr="{&quot;isTemplate&quot;:true,&quot;type&quot;:&quot;text&quot;}"/>
+          <p:cNvPr id="252" name="" descr="{&quot;isTemplate&quot;:true,&quot;type&quot;:&quot;text&quot;}"/>
           <p:cNvSpPr txBox="1"/>
           <p:nvPr/>
         </p:nvSpPr>
@@ -10454,7 +11865,7 @@
       </p:sp>
       <p:sp>
         <p:nvSpPr>
-          <p:cNvPr id="219" name="" descr="{&quot;isTemplate&quot;:true,&quot;type&quot;:&quot;text&quot;}"/>
+          <p:cNvPr id="253" name="" descr="{&quot;isTemplate&quot;:true,&quot;type&quot;:&quot;text&quot;}"/>
           <p:cNvSpPr txBox="1"/>
           <p:nvPr/>
         </p:nvSpPr>
@@ -10509,7 +11920,7 @@
       </p:sp>
       <p:sp>
         <p:nvSpPr>
-          <p:cNvPr id="220" name=""/>
+          <p:cNvPr id="254" name=""/>
           <p:cNvSpPr/>
           <p:nvPr/>
         </p:nvSpPr>
@@ -10533,7 +11944,7 @@
       </p:sp>
       <p:sp>
         <p:nvSpPr>
-          <p:cNvPr id="221" name="" descr="{&quot;isTemplate&quot;:true,&quot;type&quot;:&quot;text&quot;}"/>
+          <p:cNvPr id="255" name="" descr="{&quot;isTemplate&quot;:true,&quot;type&quot;:&quot;text&quot;}"/>
           <p:cNvSpPr txBox="1"/>
           <p:nvPr/>
         </p:nvSpPr>
@@ -10568,7 +11979,7 @@
       </p:sp>
       <p:sp>
         <p:nvSpPr>
-          <p:cNvPr id="222" name=""/>
+          <p:cNvPr id="256" name=""/>
           <p:cNvSpPr/>
           <p:nvPr/>
         </p:nvSpPr>
@@ -10608,7 +12019,7 @@
       </p:sp>
       <p:sp>
         <p:nvSpPr>
-          <p:cNvPr id="223" name=""/>
+          <p:cNvPr id="257" name=""/>
           <p:cNvSpPr/>
           <p:nvPr/>
         </p:nvSpPr>
@@ -10648,7 +12059,7 @@
       </p:sp>
       <p:sp>
         <p:nvSpPr>
-          <p:cNvPr id="224" name=""/>
+          <p:cNvPr id="258" name=""/>
           <p:cNvSpPr/>
           <p:nvPr/>
         </p:nvSpPr>
@@ -10688,7 +12099,7 @@
       </p:sp>
       <p:sp>
         <p:nvSpPr>
-          <p:cNvPr id="225" name="" descr="{&quot;isTemplate&quot;:true,&quot;type&quot;:&quot;text&quot;}"/>
+          <p:cNvPr id="259" name="" descr="{&quot;isTemplate&quot;:true,&quot;type&quot;:&quot;text&quot;}"/>
           <p:cNvSpPr txBox="1"/>
           <p:nvPr/>
         </p:nvSpPr>
@@ -10723,7 +12134,7 @@
       </p:sp>
       <p:sp>
         <p:nvSpPr>
-          <p:cNvPr id="226" name="" descr="{&quot;isTemplate&quot;:true,&quot;type&quot;:&quot;text&quot;}"/>
+          <p:cNvPr id="260" name="" descr="{&quot;isTemplate&quot;:true,&quot;type&quot;:&quot;text&quot;}"/>
           <p:cNvSpPr txBox="1"/>
           <p:nvPr/>
         </p:nvSpPr>
@@ -10798,7 +12209,7 @@
       </p:sp>
       <p:sp>
         <p:nvSpPr>
-          <p:cNvPr id="227" name="" descr="{&quot;isTemplate&quot;:true,&quot;type&quot;:&quot;text&quot;}"/>
+          <p:cNvPr id="261" name="" descr="{&quot;isTemplate&quot;:true,&quot;type&quot;:&quot;text&quot;}"/>
           <p:cNvSpPr txBox="1"/>
           <p:nvPr/>
         </p:nvSpPr>
@@ -10843,7 +12254,7 @@
   <p:cSld>
     <p:spTree>
       <p:nvGrpSpPr>
-        <p:cNvPr id="228" name="" descr="&lt;Slide style={{ width: 1280, height: 720, background: '#FFFFFF', display: 'flex', flexDirection: 'column', padding: '22px 64px 16px 64px' }}&gt;&#10;    &lt;Box style={{ flexDirection: 'row', alignItems: 'flex-end' }}&gt;&#10;        &lt;Box style={{ flex: 1 }}&gt;&#10;            &lt;Text style={{ fontSize: 32, fontWeight: 'bold', color: '#0A1D37' }}&gt;聊天与 Cron，让持续学习成为可运营能力&lt;/Text&gt;&#10;            &lt;Text style={{ fontSize: 16, color: '#64748B', marginTop: 6 }}&gt;演示产品入口：可用、可查、可审计的产品闭环&lt;/Text&gt;&#10;        &lt;/Box&gt;&#10;        &lt;Box style={{ padding: '4px 12px', border: '1px solid #22D3EE', borderRadius: 999 }}&gt;&#10;            &lt;Text style={{ fontSize: 12, color: '#0891B2' }}&gt;三帧演示 · 与现场演示一一对应&lt;/Text&gt;&#10;        &lt;/Box&gt;&#10;    &lt;/Box&gt;&#10;&#10;    &lt;Box style={{ flexDirection: 'row', gap: 26, flex: 1, marginTop: 16, alignItems: 'stretch' }}&gt;&#10;        &lt;Box style={{ width: 770, display: 'flex', flexDirection: 'column' }}&gt;&#10;            &lt;Box style={{ flexDirection: 'row', alignItems: 'stretch' }}&gt;&#10;                &lt;Box style={{ width: 218, background: '#FFFFFF', border: '1.5px solid #E2E8F0', borderRadius: 10, overflow: 'hidden', display: 'flex', flexDirection: 'column' }}&gt;&#10;                    &lt;Box style={{ background: '#0A1D37', padding: '8px 12px', flexDirection: 'row', alignItems: 'center', gap: 8 }}&gt;&#10;                        &lt;Text style={{ fontSize: 13, fontWeight: 'bold', color: '#22D3EE' }}&gt;①&lt;/Text&gt;&#10;                        &lt;Text style={{ fontSize: 14, fontWeight: 'bold', color: '#F8FAFC' }}&gt;聊天入口&lt;/Text&gt;&#10;                    &lt;/Box&gt;&#10;                    &lt;Box style={{ padding: 12, display: 'flex', flexDirection: 'column', gap: 10, flex: 1 }}&gt;&#10;                        &lt;Box style={{ alignSelf: 'flex-end', background: '#0A1D37', borderRadius: 8, padding: '8px 10px', maxWidth: 156 }}&gt;&#10;                            &lt;Text style={{ fontSize: 12, color: '#F8FAFC', lineHeight: 1.6 }}&gt;分析最新一周的负荷数据&lt;/Text&gt;&#10;                        &lt;/Box&gt;&#10;                        &lt;Box style={{ alignSelf: 'flex-start', background: '#F1F5F9', borderRadius: 8, padding: '8px 10px', maxWidth: 164 }}&gt;&#10;                            &lt;Text style={{ fontSize: 12, color: '#0F2039', lineHeight: 1.6 }}&gt;检测到夏季负荷水平上移，建议触发训练验证。&lt;/Text&gt;&#10;                        &lt;/Box&gt;&#10;                        &lt;Box style={{ marginTop: 'auto' }}&gt;&#10;                            &lt;Text style={{ fontSize: 11, color: '#94A3B8' }}&gt;自然语言驱动 · 无门槛&lt;/Text&gt;&#10;                            &lt;Text style={{ fontSize: 11, color: '#94A3B8', marginTop: 4 }}&gt;业务人员直接使用，无需算法背景&lt;/Text&gt;&#10;                        &lt;/Box&gt;&#10;                    &lt;/Box&gt;&#10;                &lt;/Box&gt;&#10;                &lt;Text style={{ fontSize: 16, color: '#94A3B8', alignSelf: 'center', margin: '0 2px' }}&gt;→&lt;/Text&gt;&#10;                &lt;Box style={{ width: 244, background: '#FFFFFF', border: '1.5px solid #E2E8F0', borderRadius: 10, overflow: 'hidden', display: 'flex', flexDirection: 'column' }}&gt;&#10;                    &lt;Box style={{ background: '#0A1D37', padding: '8px 12px', flexDirection: 'row', alignItems: 'center', gap: 8 }}&gt;&#10;                        &lt;Text style={{ fontSize: 13, fontWeight: 'bold', color: '#22D3EE' }}&gt;②&lt;/Text&gt;&#10;                        &lt;Text style={{ fontSize: 14, fontWeight: 'bold', color: '#F8FAFC' }}&gt;EDM 结论沉淀&lt;/Text&gt;&#10;                    &lt;/Box&gt;&#10;                    &lt;Box style={{ padding: 12, display: 'flex', flexDirection: 'column', gap: 10, flex: 1 }}&gt;&#10;                        &lt;Box&gt;&#10;                            &lt;Text style={{ fontSize: 12.5, fontWeight: 'bold', color: '#0F2039' }}&gt;2018-07 · 水平漂移&lt;/Text&gt;&#10;                            &lt;Text style={{ fontSize: 11.5, color: '#64748B', marginTop: 2 }}&gt;置信度高 · 建议重训&lt;/Text&gt;&#10;                        &lt;/Box&gt;&#10;                        &lt;Box style={{ height: 1, background: '#E2E8F0' }} /&gt;&#10;                        &lt;Box&gt;&#10;                            &lt;Text style={{ fontSize: 12.5, fontWeight: 'bold', color: '#0F2039' }}&gt;结论落盘&lt;/Text&gt;&#10;                            &lt;Text style={{ fontSize: 11.5, color: '#64748B', marginTop: 2 }}&gt;日志 + 上下文，训练前读取&lt;/Text&gt;&#10;                        &lt;/Box&gt;&#10;                        &lt;Text style={{ fontSize: 11, color: '#94A3B8', marginTop: 'auto' }}&gt;每次分析都可追溯 · 不依赖个人经验&lt;/Text&gt;&#10;                    &lt;/Box&gt;&#10;                &lt;/Box&gt;&#10;                &lt;Text style={{ fontSize: 16, color: '#94A3B8', alignSelf: 'center', margin: '0 2px' }}&gt;→&lt;/Text&gt;&#10;                &lt;Box style={{ width: 258, background: '#FFFFFF', border: '1.5px solid #E2E8F0', borderRadius: 10, overflow: 'hidden', display: 'flex', flexDirection: 'column' }}&gt;&#10;                    &lt;Box style={{ background: '#0A1D37', padding: '8px 12px', flexDirection: 'row', alignItems: 'center', gap: 8 }}&gt;&#10;                        &lt;Text style={{ fontSize: 13, fontWeight: 'bold', color: '#22D3EE' }}&gt;③&lt;/Text&gt;&#10;                        &lt;Text style={{ fontSize: 14, fontWeight: 'bold', color: '#F8FAFC' }}&gt;Cron 定时任务&lt;/Text&gt;&#10;                    &lt;/Box&gt;&#10;                    &lt;Box style={{ padding: 12, display: 'flex', flexDirection: 'column', gap: 8, flex: 1 }}&gt;&#10;                        &lt;Text style={{ fontSize: 12.5, color: '#0F2039' }}&gt;00:00 · 训练 Skill&lt;/Text&gt;&#10;                        &lt;Text style={{ fontSize: 12.5, color: '#0F2039' }}&gt;00:40 · 时序验证&lt;/Text&gt;&#10;                        &lt;Box style={{ background: 'rgba(34,211,238,0.12)', border: '1px solid #22D3EE', borderRadius: 6, padding: 8, marginTop: 'auto' }}&gt;&#10;                            &lt;Text style={{ fontSize: 12.5, fontWeight: 'bold', color: '#0A1D37' }}&gt;01:00 · 部署 v_35 → active&lt;/Text&gt;&#10;                            &lt;Text style={{ fontSize: 11, fontWeight: 'bold', color: '#0891B2', marginTop: 2 }}&gt;新版本成为 active ✓&lt;/Text&gt;&#10;                        &lt;/Box&gt;&#10;                    &lt;/Box&gt;&#10;                &lt;/Box&gt;&#10;            &lt;/Box&gt;&#10;            &lt;Box style={{ flexDirection: 'row', alignItems: 'center', justifyContent: 'center', gap: 8, marginTop: 16 }}&gt;&#10;                &lt;Box style={{ padding: '4px 12px', background: '#F1F5F9', borderRadius: 6 }}&gt;&#10;                    &lt;Text style={{ fontSize: 12, color: '#0F2039' }}&gt;① 自然语言提问&lt;/Text&gt;&#10;                &lt;/Box&gt;&#10;                &lt;Text style={{ fontSize: 14, color: '#94A3B8' }}&gt;→&lt;/Text&gt;&#10;                &lt;Box style={{ padding: '4px 12px', background: '#F1F5F9', borderRadius: 6 }}&gt;&#10;                    &lt;Text style={{ fontSize: 12, color: '#0F2039' }}&gt;② 结论沉淀为日志&lt;/Text&gt;&#10;                &lt;/Box&gt;&#10;                &lt;Text style={{ fontSize: 14, color: '#94A3B8' }}&gt;→&lt;/Text&gt;&#10;                &lt;Box style={{ padding: '4px 12px', background: '#F1F5F9', borderRadius: 6 }}&gt;&#10;                    &lt;Text style={{ fontSize: 12, color: '#0F2039' }}&gt;③ 定时训练 + 验证&lt;/Text&gt;&#10;                &lt;/Box&gt;&#10;                &lt;Text style={{ fontSize: 14, color: '#94A3B8' }}&gt;→&lt;/Text&gt;&#10;                &lt;Box style={{ padding: '4px 12px', background: 'rgba(34,211,238,0.12)', border: '1px solid #22D3EE', borderRadius: 6 }}&gt;&#10;                    &lt;Text style={{ fontSize: 12, fontWeight: 'bold', color: '#0891B2' }}&gt;新模型成为 active&lt;/Text&gt;&#10;                &lt;/Box&gt;&#10;            &lt;/Box&gt;&#10;            &lt;Text style={{ fontSize: 12, color: '#94A3B8', textAlign: 'center', marginTop: 8 }}&gt;同一套闭环 · 训练前 Agent 自动读取既有 EDM 日志 · 全程无人工干预&lt;/Text&gt;&#10;        &lt;/Box&gt;&#10;&#10;        &lt;Box style={{ flex: 1, display: 'flex', flexDirection: 'column', gap: 12 }}&gt;&#10;            &lt;Box style={{ background: '#0A1D37', borderRadius: 12, padding: 20, flex: 1 }}&gt;&#10;                &lt;Text style={{ fontSize: 17, fontWeight: 'bold', color: '#F8FAFC' }}&gt;产业客户看到&lt;/Text&gt;&#10;                &lt;Box style={{ flexDirection: 'row', alignItems: 'center', gap: 10, marginTop: 14 }}&gt;&#10;                    &lt;Box style={{ width: 6, height: 6, background: '#22D3EE', borderRadius: 3 }} /&gt;&#10;                    &lt;Box&gt;&#10;                        &lt;Text style={{ fontSize: 13.5, fontWeight: 'bold', color: '#F8FAFC' }}&gt;可用 —— 自然语言驱动学习&lt;/Text&gt;&#10;                        &lt;Text style={{ fontSize: 11.5, color: '#94A3B8', marginTop: 2 }}&gt;业务人员零门槛发起分析&lt;/Text&gt;&#10;                    &lt;/Box&gt;&#10;                &lt;/Box&gt;&#10;                &lt;Box style={{ flexDirection: 'row', alignItems: 'center', gap: 10, marginTop: 12 }}&gt;&#10;                    &lt;Box style={{ width: 6, height: 6, background: '#22D3EE', borderRadius: 3 }} /&gt;&#10;                    &lt;Box&gt;&#10;                        &lt;Text style={{ fontSize: 13.5, fontWeight: 'bold', color: '#F8FAFC' }}&gt;可查 —— 结论沉淀为日志&lt;/Text&gt;&#10;                        &lt;Text style={{ fontSize: 11.5, color: '#94A3B8', marginTop: 2 }}&gt;漂移结论与训练依据随时回看&lt;/Text&gt;&#10;                    &lt;/Box&gt;&#10;                &lt;/Box&gt;&#10;                &lt;Box style={{ flexDirection: 'row', alignItems: 'center', gap: 10, marginTop: 12 }}&gt;&#10;                    &lt;Box style={{ width: 6, height: 6, background: '#22D3EE', borderRadius: 3 }} /&gt;&#10;                    &lt;Box&gt;&#10;                        &lt;Text style={{ fontSize: 13.5, fontWeight: 'bold', color: '#F8FAFC' }}&gt;可审计 —— 行为可追溯&lt;/Text&gt;&#10;                        &lt;Text style={{ fontSize: 11.5, color: '#94A3B8', marginTop: 2 }}&gt;所有动作约束在 Harness 边界内&lt;/Text&gt;&#10;                    &lt;/Box&gt;&#10;                &lt;/Box&gt;&#10;            &lt;/Box&gt;&#10;            &lt;Box style={{ borderLeft: '4px solid #22D3EE', background: 'rgba(34,211,238,0.07)', borderRadius: '0 10px 10px 0', padding: 16 }}&gt;&#10;                &lt;Text style={{ fontSize: 17, fontWeight: 'bold', color: '#0A1D37' }}&gt;投资人看到&lt;/Text&gt;&#10;                &lt;Text style={{ fontSize: 13, color: '#0F2039', lineHeight: 1.8, marginTop: 6 }}&gt;可复制的产品闭环——同一套 Harness 结构，可迁移到其他时序预测场景。&lt;/Text&gt;&#10;                &lt;Box style={{ flexDirection: 'row', gap: 8, marginTop: 10 }}&gt;&#10;                    &lt;Box style={{ padding: '3px 10px', border: '1px solid #22D3EE', borderRadius: 6 }}&gt;&#10;                        &lt;Text style={{ fontSize: 11.5, color: '#0891B2' }}&gt;光伏出力&lt;/Text&gt;&#10;                    &lt;/Box&gt;&#10;                    &lt;Box style={{ padding: '3px 10px', border: '1px solid #22D3EE', borderRadius: 6 }}&gt;&#10;                        &lt;Text style={{ fontSize: 11.5, color: '#0891B2' }}&gt;气象&lt;/Text&gt;&#10;                    &lt;/Box&gt;&#10;                    &lt;Box style={{ padding: '3px 10px', border: '1px solid #22D3EE', borderRadius: 6 }}&gt;&#10;                        &lt;Text style={{ fontSize: 11.5, color: '#0891B2' }}&gt;水文&lt;/Text&gt;&#10;                    &lt;/Box&gt;&#10;                &lt;/Box&gt;&#10;            &lt;/Box&gt;&#10;            &lt;Box style={{ background: '#F8FAFC', borderRadius: 8, padding: 12 }}&gt;&#10;                &lt;Text style={{ fontSize: 12, color: '#64748B', lineHeight: 1.7 }}&gt;现场以 20–30 秒预录演示呈现，避免训练耗时与网络波动影响路演。&lt;/Text&gt;&#10;            &lt;/Box&gt;&#10;        &lt;/Box&gt;&#10;    &lt;/Box&gt;&#10;&#10;    &lt;Box style={{ flexDirection: 'row', marginTop: 14, alignItems: 'center' }}&gt;&#10;        &lt;Text style={{ fontSize: 12, color: '#94A3B8' }}&gt;负荷预测持续学习引擎 · 产品演示&lt;/Text&gt;&#10;        &lt;Box style={{ marginLeft: 'auto', flexDirection: 'row', alignItems: 'center', gap: 8 }}&gt;&#10;            &lt;Box style={{ width: 10, height: 10, background: '#22D3EE' }} /&gt;&#10;            &lt;Text style={{ fontSize: 13, color: '#64748B' }}&gt;CLE · 05 / 07&lt;/Text&gt;&#10;        &lt;/Box&gt;&#10;    &lt;/Box&gt;&#10;&lt;/Slide&gt;"/>
+        <p:cNvPr id="262" name="" descr="&lt;Slide style={{ width: 1280, height: 720, background: '#FFFFFF', display: 'flex', flexDirection: 'column', padding: '22px 64px 16px 64px' }}&gt;&#10;    &lt;Box style={{ flexDirection: 'row', alignItems: 'flex-end' }}&gt;&#10;        &lt;Box style={{ flex: 1 }}&gt;&#10;            &lt;Text style={{ fontSize: 32, fontWeight: 'bold', color: '#0A1D37' }}&gt;聊天与 Cron，让持续学习成为可运营能力&lt;/Text&gt;&#10;            &lt;Text style={{ fontSize: 16, color: '#64748B', marginTop: 6 }}&gt;演示产品入口：可用、可查、可审计的产品闭环&lt;/Text&gt;&#10;        &lt;/Box&gt;&#10;        &lt;Box style={{ padding: '4px 12px', border: '1px solid #22D3EE', borderRadius: 999 }}&gt;&#10;            &lt;Text style={{ fontSize: 12, color: '#0891B2' }}&gt;三帧演示 · 与现场演示一一对应&lt;/Text&gt;&#10;        &lt;/Box&gt;&#10;    &lt;/Box&gt;&#10;&#10;    &lt;Box style={{ flexDirection: 'row', gap: 26, flex: 1, marginTop: 16, alignItems: 'stretch' }}&gt;&#10;        &lt;Box style={{ width: 770, display: 'flex', flexDirection: 'column' }}&gt;&#10;            &lt;Box style={{ flexDirection: 'row', alignItems: 'stretch' }}&gt;&#10;                &lt;Box style={{ width: 218, background: '#FFFFFF', border: '1.5px solid #E2E8F0', borderRadius: 10, overflow: 'hidden', display: 'flex', flexDirection: 'column' }}&gt;&#10;                    &lt;Box style={{ background: '#0A1D37', padding: '8px 12px', flexDirection: 'row', alignItems: 'center', gap: 8 }}&gt;&#10;                        &lt;Text style={{ fontSize: 13, fontWeight: 'bold', color: '#22D3EE' }}&gt;①&lt;/Text&gt;&#10;                        &lt;Text style={{ fontSize: 14, fontWeight: 'bold', color: '#F8FAFC' }}&gt;聊天入口&lt;/Text&gt;&#10;                    &lt;/Box&gt;&#10;                    &lt;Box style={{ padding: 12, display: 'flex', flexDirection: 'column', gap: 10, flex: 1 }}&gt;&#10;                        &lt;Box style={{ alignSelf: 'flex-end', background: '#0A1D37', borderRadius: 8, padding: '8px 10px', maxWidth: 156 }}&gt;&#10;                            &lt;Text style={{ fontSize: 12, color: '#F8FAFC', lineHeight: 1.6 }}&gt;分析最新一周的负荷数据&lt;/Text&gt;&#10;                        &lt;/Box&gt;&#10;                        &lt;Box style={{ alignSelf: 'flex-start', background: '#F1F5F9', borderRadius: 8, padding: '8px 10px', maxWidth: 164 }}&gt;&#10;                            &lt;Text style={{ fontSize: 12, color: '#0F2039', lineHeight: 1.6 }}&gt;检测到夏季负荷水平上移，建议触发训练验证。&lt;/Text&gt;&#10;                        &lt;/Box&gt;&#10;                        &lt;Box style={{ marginTop: 'auto' }}&gt;&#10;                            &lt;Text style={{ fontSize: 11, color: '#94A3B8' }}&gt;自然语言驱动 · 无门槛&lt;/Text&gt;&#10;                            &lt;Text style={{ fontSize: 11, color: '#94A3B8', marginTop: 4 }}&gt;业务人员直接使用，无需算法背景&lt;/Text&gt;&#10;                        &lt;/Box&gt;&#10;                    &lt;/Box&gt;&#10;                &lt;/Box&gt;&#10;                &lt;Text style={{ fontSize: 16, color: '#94A3B8', alignSelf: 'center', margin: '0 2px' }}&gt;→&lt;/Text&gt;&#10;                &lt;Box style={{ width: 244, background: '#FFFFFF', border: '1.5px solid #E2E8F0', borderRadius: 10, overflow: 'hidden', display: 'flex', flexDirection: 'column' }}&gt;&#10;                    &lt;Box style={{ background: '#0A1D37', padding: '8px 12px', flexDirection: 'row', alignItems: 'center', gap: 8 }}&gt;&#10;                        &lt;Text style={{ fontSize: 13, fontWeight: 'bold', color: '#22D3EE' }}&gt;②&lt;/Text&gt;&#10;                        &lt;Text style={{ fontSize: 14, fontWeight: 'bold', color: '#F8FAFC' }}&gt;EDM 结论沉淀&lt;/Text&gt;&#10;                    &lt;/Box&gt;&#10;                    &lt;Box style={{ padding: 12, display: 'flex', flexDirection: 'column', gap: 10, flex: 1 }}&gt;&#10;                        &lt;Box&gt;&#10;                            &lt;Text style={{ fontSize: 12.5, fontWeight: 'bold', color: '#0F2039' }}&gt;2018-07 · 水平漂移&lt;/Text&gt;&#10;                            &lt;Text style={{ fontSize: 11.5, color: '#64748B', marginTop: 2 }}&gt;置信度高 · 建议重训&lt;/Text&gt;&#10;                        &lt;/Box&gt;&#10;                        &lt;Box style={{ height: 1, background: '#E2E8F0' }} /&gt;&#10;                        &lt;Box&gt;&#10;                            &lt;Text style={{ fontSize: 12.5, fontWeight: 'bold', color: '#0F2039' }}&gt;结论落盘&lt;/Text&gt;&#10;                            &lt;Text style={{ fontSize: 11.5, color: '#64748B', marginTop: 2 }}&gt;日志 + 上下文，训练前读取&lt;/Text&gt;&#10;                        &lt;/Box&gt;&#10;                        &lt;Text style={{ fontSize: 11, color: '#94A3B8', marginTop: 'auto' }}&gt;每次分析都可追溯 · 不依赖个人经验&lt;/Text&gt;&#10;                    &lt;/Box&gt;&#10;                &lt;/Box&gt;&#10;                &lt;Text style={{ fontSize: 16, color: '#94A3B8', alignSelf: 'center', margin: '0 2px' }}&gt;→&lt;/Text&gt;&#10;                &lt;Box style={{ width: 258, background: '#FFFFFF', border: '1.5px solid #E2E8F0', borderRadius: 10, overflow: 'hidden', display: 'flex', flexDirection: 'column' }}&gt;&#10;                    &lt;Box style={{ background: '#0A1D37', padding: '8px 12px', flexDirection: 'row', alignItems: 'center', gap: 8 }}&gt;&#10;                        &lt;Text style={{ fontSize: 13, fontWeight: 'bold', color: '#22D3EE' }}&gt;③&lt;/Text&gt;&#10;                        &lt;Text style={{ fontSize: 14, fontWeight: 'bold', color: '#F8FAFC' }}&gt;Cron 定时任务&lt;/Text&gt;&#10;                    &lt;/Box&gt;&#10;                    &lt;Box style={{ padding: 12, display: 'flex', flexDirection: 'column', gap: 8, flex: 1 }}&gt;&#10;                        &lt;Text style={{ fontSize: 12.5, color: '#0F2039' }}&gt;00:00 · 训练 Skill&lt;/Text&gt;&#10;                        &lt;Text style={{ fontSize: 12.5, color: '#0F2039' }}&gt;00:40 · 时序验证&lt;/Text&gt;&#10;                        &lt;Box style={{ background: 'rgba(34,211,238,0.12)', border: '1px solid #22D3EE', borderRadius: 6, padding: 8, marginTop: 'auto' }}&gt;&#10;                            &lt;Text style={{ fontSize: 12.5, fontWeight: 'bold', color: '#0A1D37' }}&gt;01:00 · 部署 v_35 → active&lt;/Text&gt;&#10;                            &lt;Text style={{ fontSize: 11, fontWeight: 'bold', color: '#0891B2', marginTop: 2 }}&gt;新版本成为 active ✓&lt;/Text&gt;&#10;                        &lt;/Box&gt;&#10;                    &lt;/Box&gt;&#10;                &lt;/Box&gt;&#10;            &lt;/Box&gt;&#10;            &lt;Box style={{ flexDirection: 'row', alignItems: 'center', justifyContent: 'center', gap: 8, marginTop: 16 }}&gt;&#10;                &lt;Box style={{ padding: '4px 12px', background: '#F1F5F9', borderRadius: 6 }}&gt;&#10;                    &lt;Text style={{ fontSize: 12, color: '#0F2039' }}&gt;① 自然语言提问&lt;/Text&gt;&#10;                &lt;/Box&gt;&#10;                &lt;Text style={{ fontSize: 14, color: '#94A3B8' }}&gt;→&lt;/Text&gt;&#10;                &lt;Box style={{ padding: '4px 12px', background: '#F1F5F9', borderRadius: 6 }}&gt;&#10;                    &lt;Text style={{ fontSize: 12, color: '#0F2039' }}&gt;② 结论沉淀为日志&lt;/Text&gt;&#10;                &lt;/Box&gt;&#10;                &lt;Text style={{ fontSize: 14, color: '#94A3B8' }}&gt;→&lt;/Text&gt;&#10;                &lt;Box style={{ padding: '4px 12px', background: '#F1F5F9', borderRadius: 6 }}&gt;&#10;                    &lt;Text style={{ fontSize: 12, color: '#0F2039' }}&gt;③ 定时训练 + 验证&lt;/Text&gt;&#10;                &lt;/Box&gt;&#10;                &lt;Text style={{ fontSize: 14, color: '#94A3B8' }}&gt;→&lt;/Text&gt;&#10;                &lt;Box style={{ padding: '4px 12px', background: 'rgba(34,211,238,0.12)', border: '1px solid #22D3EE', borderRadius: 6 }}&gt;&#10;                    &lt;Text style={{ fontSize: 12, fontWeight: 'bold', color: '#0891B2' }}&gt;新模型成为 active&lt;/Text&gt;&#10;                &lt;/Box&gt;&#10;            &lt;/Box&gt;&#10;            &lt;Text style={{ fontSize: 12, color: '#94A3B8', textAlign: 'center', marginTop: 8 }}&gt;同一套闭环 · 训练前 Agent 自动读取既有 EDM 日志 · 全程无人工干预&lt;/Text&gt;&#10;        &lt;/Box&gt;&#10;&#10;        &lt;Box style={{ flex: 1, display: 'flex', flexDirection: 'column', gap: 12 }}&gt;&#10;            &lt;Box style={{ background: '#0A1D37', borderRadius: 12, padding: 20, flex: 1 }}&gt;&#10;                &lt;Text style={{ fontSize: 17, fontWeight: 'bold', color: '#F8FAFC' }}&gt;产业客户看到&lt;/Text&gt;&#10;                &lt;Box style={{ flexDirection: 'row', alignItems: 'center', gap: 10, marginTop: 14 }}&gt;&#10;                    &lt;Box style={{ width: 6, height: 6, background: '#22D3EE', borderRadius: 3 }} /&gt;&#10;                    &lt;Box&gt;&#10;                        &lt;Text style={{ fontSize: 13.5, fontWeight: 'bold', color: '#F8FAFC' }}&gt;可用 —— 自然语言驱动学习&lt;/Text&gt;&#10;                        &lt;Text style={{ fontSize: 11.5, color: '#94A3B8', marginTop: 2 }}&gt;业务人员零门槛发起分析&lt;/Text&gt;&#10;                    &lt;/Box&gt;&#10;                &lt;/Box&gt;&#10;                &lt;Box style={{ flexDirection: 'row', alignItems: 'center', gap: 10, marginTop: 12 }}&gt;&#10;                    &lt;Box style={{ width: 6, height: 6, background: '#22D3EE', borderRadius: 3 }} /&gt;&#10;                    &lt;Box&gt;&#10;                        &lt;Text style={{ fontSize: 13.5, fontWeight: 'bold', color: '#F8FAFC' }}&gt;可查 —— 结论沉淀为日志&lt;/Text&gt;&#10;                        &lt;Text style={{ fontSize: 11.5, color: '#94A3B8', marginTop: 2 }}&gt;漂移结论与训练依据随时回看&lt;/Text&gt;&#10;                    &lt;/Box&gt;&#10;                &lt;/Box&gt;&#10;                &lt;Box style={{ flexDirection: 'row', alignItems: 'center', gap: 10, marginTop: 12 }}&gt;&#10;                    &lt;Box style={{ width: 6, height: 6, background: '#22D3EE', borderRadius: 3 }} /&gt;&#10;                    &lt;Box&gt;&#10;                        &lt;Text style={{ fontSize: 13.5, fontWeight: 'bold', color: '#F8FAFC' }}&gt;可审计 —— 行为可追溯&lt;/Text&gt;&#10;                        &lt;Text style={{ fontSize: 11.5, color: '#94A3B8', marginTop: 2 }}&gt;所有动作约束在 Harness 边界内&lt;/Text&gt;&#10;                    &lt;/Box&gt;&#10;                &lt;/Box&gt;&#10;            &lt;/Box&gt;&#10;            &lt;Box style={{ borderLeft: '4px solid #22D3EE', background: 'rgba(34,211,238,0.07)', borderRadius: '0 10px 10px 0', padding: 16 }}&gt;&#10;                &lt;Text style={{ fontSize: 17, fontWeight: 'bold', color: '#0A1D37' }}&gt;投资人看到&lt;/Text&gt;&#10;                &lt;Text style={{ fontSize: 13, color: '#0F2039', lineHeight: 1.8, marginTop: 6 }}&gt;可复制的产品闭环——同一套 Harness 结构，可迁移到其他时序预测场景。&lt;/Text&gt;&#10;                &lt;Box style={{ flexDirection: 'row', gap: 8, marginTop: 10 }}&gt;&#10;                    &lt;Box style={{ padding: '3px 10px', border: '1px solid #22D3EE', borderRadius: 6 }}&gt;&#10;                        &lt;Text style={{ fontSize: 11.5, color: '#0891B2' }}&gt;光伏出力&lt;/Text&gt;&#10;                    &lt;/Box&gt;&#10;                    &lt;Box style={{ padding: '3px 10px', border: '1px solid #22D3EE', borderRadius: 6 }}&gt;&#10;                        &lt;Text style={{ fontSize: 11.5, color: '#0891B2' }}&gt;气象&lt;/Text&gt;&#10;                    &lt;/Box&gt;&#10;                    &lt;Box style={{ padding: '3px 10px', border: '1px solid #22D3EE', borderRadius: 6 }}&gt;&#10;                        &lt;Text style={{ fontSize: 11.5, color: '#0891B2' }}&gt;水文&lt;/Text&gt;&#10;                    &lt;/Box&gt;&#10;                &lt;/Box&gt;&#10;            &lt;/Box&gt;&#10;            &lt;Box style={{ background: '#F8FAFC', borderRadius: 8, padding: 12 }}&gt;&#10;                &lt;Text style={{ fontSize: 12, color: '#64748B', lineHeight: 1.7 }}&gt;现场以 20–30 秒预录演示呈现，避免训练耗时与网络波动影响路演。&lt;/Text&gt;&#10;            &lt;/Box&gt;&#10;        &lt;/Box&gt;&#10;    &lt;/Box&gt;&#10;&#10;    &lt;Box style={{ flexDirection: 'row', marginTop: 14, alignItems: 'center' }}&gt;&#10;        &lt;Text style={{ fontSize: 12, color: '#94A3B8' }}&gt;负荷预测持续学习引擎 · 产品演示&lt;/Text&gt;&#10;        &lt;Box style={{ marginLeft: 'auto', flexDirection: 'row', alignItems: 'center', gap: 8 }}&gt;&#10;            &lt;Box style={{ width: 10, height: 10, background: '#22D3EE' }} /&gt;&#10;            &lt;Text style={{ fontSize: 13, color: '#64748B' }}&gt;CLE · 05 / 07&lt;/Text&gt;&#10;        &lt;/Box&gt;&#10;    &lt;/Box&gt;&#10;&lt;/Slide&gt;"/>
         <p:cNvGrpSpPr/>
         <p:nvPr/>
       </p:nvGrpSpPr>
@@ -10857,7 +12268,7 @@
       </p:grpSpPr>
       <p:sp>
         <p:nvSpPr>
-          <p:cNvPr id="229" name=""/>
+          <p:cNvPr id="263" name=""/>
           <p:cNvSpPr/>
           <p:nvPr/>
         </p:nvSpPr>
@@ -10881,7 +12292,7 @@
       </p:sp>
       <p:sp>
         <p:nvSpPr>
-          <p:cNvPr id="230" name="" descr="{&quot;isTemplate&quot;:true,&quot;type&quot;:&quot;text&quot;}"/>
+          <p:cNvPr id="264" name="" descr="{&quot;isTemplate&quot;:true,&quot;type&quot;:&quot;text&quot;}"/>
           <p:cNvSpPr txBox="1"/>
           <p:nvPr/>
         </p:nvSpPr>
@@ -10936,7 +12347,7 @@
       </p:sp>
       <p:sp>
         <p:nvSpPr>
-          <p:cNvPr id="231" name="" descr="{&quot;isTemplate&quot;:true,&quot;type&quot;:&quot;text&quot;}"/>
+          <p:cNvPr id="265" name="" descr="{&quot;isTemplate&quot;:true,&quot;type&quot;:&quot;text&quot;}"/>
           <p:cNvSpPr txBox="1"/>
           <p:nvPr/>
         </p:nvSpPr>
@@ -10971,7 +12382,7 @@
       </p:sp>
       <p:sp>
         <p:nvSpPr>
-          <p:cNvPr id="232" name=""/>
+          <p:cNvPr id="266" name=""/>
           <p:cNvSpPr/>
           <p:nvPr/>
         </p:nvSpPr>
@@ -10999,7 +12410,7 @@
       </p:sp>
       <p:sp>
         <p:nvSpPr>
-          <p:cNvPr id="233" name="" descr="{&quot;isTemplate&quot;:true,&quot;type&quot;:&quot;text&quot;}"/>
+          <p:cNvPr id="267" name="" descr="{&quot;isTemplate&quot;:true,&quot;type&quot;:&quot;text&quot;}"/>
           <p:cNvSpPr txBox="1"/>
           <p:nvPr/>
         </p:nvSpPr>
@@ -11054,7 +12465,7 @@
       </p:sp>
       <p:sp>
         <p:nvSpPr>
-          <p:cNvPr id="234" name=""/>
+          <p:cNvPr id="268" name=""/>
           <p:cNvSpPr/>
           <p:nvPr/>
         </p:nvSpPr>
@@ -11085,7 +12496,7 @@
       </p:sp>
       <p:sp>
         <p:nvSpPr>
-          <p:cNvPr id="235" name=""/>
+          <p:cNvPr id="269" name=""/>
           <p:cNvSpPr/>
           <p:nvPr/>
         </p:nvSpPr>
@@ -11138,7 +12549,7 @@
       </p:sp>
       <p:sp>
         <p:nvSpPr>
-          <p:cNvPr id="236" name="" descr="{&quot;isTemplate&quot;:true,&quot;type&quot;:&quot;text&quot;}"/>
+          <p:cNvPr id="270" name="" descr="{&quot;isTemplate&quot;:true,&quot;type&quot;:&quot;text&quot;}"/>
           <p:cNvSpPr txBox="1"/>
           <p:nvPr/>
         </p:nvSpPr>
@@ -11173,7 +12584,7 @@
       </p:sp>
       <p:sp>
         <p:nvSpPr>
-          <p:cNvPr id="237" name="" descr="{&quot;isTemplate&quot;:true,&quot;type&quot;:&quot;text&quot;}"/>
+          <p:cNvPr id="271" name="" descr="{&quot;isTemplate&quot;:true,&quot;type&quot;:&quot;text&quot;}"/>
           <p:cNvSpPr txBox="1"/>
           <p:nvPr/>
         </p:nvSpPr>
@@ -11208,7 +12619,7 @@
       </p:sp>
       <p:sp>
         <p:nvSpPr>
-          <p:cNvPr id="238" name=""/>
+          <p:cNvPr id="272" name=""/>
           <p:cNvSpPr/>
           <p:nvPr/>
         </p:nvSpPr>
@@ -11234,7 +12645,7 @@
       </p:sp>
       <p:sp>
         <p:nvSpPr>
-          <p:cNvPr id="239" name="" descr="{&quot;isTemplate&quot;:true,&quot;type&quot;:&quot;text&quot;}"/>
+          <p:cNvPr id="273" name="" descr="{&quot;isTemplate&quot;:true,&quot;type&quot;:&quot;text&quot;}"/>
           <p:cNvSpPr txBox="1"/>
           <p:nvPr/>
         </p:nvSpPr>
@@ -11269,7 +12680,7 @@
       </p:sp>
       <p:sp>
         <p:nvSpPr>
-          <p:cNvPr id="240" name=""/>
+          <p:cNvPr id="274" name=""/>
           <p:cNvSpPr/>
           <p:nvPr/>
         </p:nvSpPr>
@@ -11295,7 +12706,7 @@
       </p:sp>
       <p:sp>
         <p:nvSpPr>
-          <p:cNvPr id="241" name="" descr="{&quot;isTemplate&quot;:true,&quot;type&quot;:&quot;text&quot;}"/>
+          <p:cNvPr id="275" name="" descr="{&quot;isTemplate&quot;:true,&quot;type&quot;:&quot;text&quot;}"/>
           <p:cNvSpPr txBox="1"/>
           <p:nvPr/>
         </p:nvSpPr>
@@ -11332,7 +12743,7 @@
       </p:sp>
       <p:sp>
         <p:nvSpPr>
-          <p:cNvPr id="242" name="" descr="{&quot;isTemplate&quot;:true,&quot;type&quot;:&quot;text&quot;}"/>
+          <p:cNvPr id="276" name="" descr="{&quot;isTemplate&quot;:true,&quot;type&quot;:&quot;text&quot;}"/>
           <p:cNvSpPr txBox="1"/>
           <p:nvPr/>
         </p:nvSpPr>
@@ -11387,7 +12798,7 @@
       </p:sp>
       <p:sp>
         <p:nvSpPr>
-          <p:cNvPr id="243" name="" descr="{&quot;isTemplate&quot;:true,&quot;type&quot;:&quot;text&quot;}"/>
+          <p:cNvPr id="277" name="" descr="{&quot;isTemplate&quot;:true,&quot;type&quot;:&quot;text&quot;}"/>
           <p:cNvSpPr txBox="1"/>
           <p:nvPr/>
         </p:nvSpPr>
@@ -11422,7 +12833,7 @@
       </p:sp>
       <p:sp>
         <p:nvSpPr>
-          <p:cNvPr id="244" name="" descr="{&quot;isTemplate&quot;:true,&quot;type&quot;:&quot;text&quot;}"/>
+          <p:cNvPr id="278" name="" descr="{&quot;isTemplate&quot;:true,&quot;type&quot;:&quot;text&quot;}"/>
           <p:cNvSpPr txBox="1"/>
           <p:nvPr/>
         </p:nvSpPr>
@@ -11457,7 +12868,7 @@
       </p:sp>
       <p:sp>
         <p:nvSpPr>
-          <p:cNvPr id="245" name=""/>
+          <p:cNvPr id="279" name=""/>
           <p:cNvSpPr/>
           <p:nvPr/>
         </p:nvSpPr>
@@ -11488,7 +12899,7 @@
       </p:sp>
       <p:sp>
         <p:nvSpPr>
-          <p:cNvPr id="246" name=""/>
+          <p:cNvPr id="280" name=""/>
           <p:cNvSpPr/>
           <p:nvPr/>
         </p:nvSpPr>
@@ -11541,7 +12952,7 @@
       </p:sp>
       <p:sp>
         <p:nvSpPr>
-          <p:cNvPr id="247" name="" descr="{&quot;isTemplate&quot;:true,&quot;type&quot;:&quot;text&quot;}"/>
+          <p:cNvPr id="281" name="" descr="{&quot;isTemplate&quot;:true,&quot;type&quot;:&quot;text&quot;}"/>
           <p:cNvSpPr txBox="1"/>
           <p:nvPr/>
         </p:nvSpPr>
@@ -11576,7 +12987,7 @@
       </p:sp>
       <p:sp>
         <p:nvSpPr>
-          <p:cNvPr id="248" name="" descr="{&quot;isTemplate&quot;:true,&quot;type&quot;:&quot;text&quot;}"/>
+          <p:cNvPr id="282" name="" descr="{&quot;isTemplate&quot;:true,&quot;type&quot;:&quot;text&quot;}"/>
           <p:cNvSpPr txBox="1"/>
           <p:nvPr/>
         </p:nvSpPr>
@@ -11621,7 +13032,7 @@
       </p:sp>
       <p:sp>
         <p:nvSpPr>
-          <p:cNvPr id="249" name="" descr="{&quot;isTemplate&quot;:true,&quot;type&quot;:&quot;text&quot;}"/>
+          <p:cNvPr id="283" name="" descr="{&quot;isTemplate&quot;:true,&quot;type&quot;:&quot;text&quot;}"/>
           <p:cNvSpPr txBox="1"/>
           <p:nvPr/>
         </p:nvSpPr>
@@ -11666,7 +13077,7 @@
       </p:sp>
       <p:sp>
         <p:nvSpPr>
-          <p:cNvPr id="250" name="" descr="{&quot;isTemplate&quot;:true,&quot;type&quot;:&quot;text&quot;}"/>
+          <p:cNvPr id="284" name="" descr="{&quot;isTemplate&quot;:true,&quot;type&quot;:&quot;text&quot;}"/>
           <p:cNvSpPr txBox="1"/>
           <p:nvPr/>
         </p:nvSpPr>
@@ -11721,7 +13132,7 @@
       </p:sp>
       <p:sp>
         <p:nvSpPr>
-          <p:cNvPr id="251" name=""/>
+          <p:cNvPr id="285" name=""/>
           <p:cNvSpPr/>
           <p:nvPr/>
         </p:nvSpPr>
@@ -11745,7 +13156,7 @@
       </p:sp>
       <p:sp>
         <p:nvSpPr>
-          <p:cNvPr id="252" name="" descr="{&quot;isTemplate&quot;:true,&quot;type&quot;:&quot;text&quot;}"/>
+          <p:cNvPr id="286" name="" descr="{&quot;isTemplate&quot;:true,&quot;type&quot;:&quot;text&quot;}"/>
           <p:cNvSpPr txBox="1"/>
           <p:nvPr/>
         </p:nvSpPr>
@@ -11780,7 +13191,7 @@
       </p:sp>
       <p:sp>
         <p:nvSpPr>
-          <p:cNvPr id="253" name="" descr="{&quot;isTemplate&quot;:true,&quot;type&quot;:&quot;text&quot;}"/>
+          <p:cNvPr id="287" name="" descr="{&quot;isTemplate&quot;:true,&quot;type&quot;:&quot;text&quot;}"/>
           <p:cNvSpPr txBox="1"/>
           <p:nvPr/>
         </p:nvSpPr>
@@ -11835,7 +13246,7 @@
       </p:sp>
       <p:sp>
         <p:nvSpPr>
-          <p:cNvPr id="254" name="" descr="{&quot;isTemplate&quot;:true,&quot;type&quot;:&quot;text&quot;}"/>
+          <p:cNvPr id="288" name="" descr="{&quot;isTemplate&quot;:true,&quot;type&quot;:&quot;text&quot;}"/>
           <p:cNvSpPr txBox="1"/>
           <p:nvPr/>
         </p:nvSpPr>
@@ -11890,7 +13301,7 @@
       </p:sp>
       <p:sp>
         <p:nvSpPr>
-          <p:cNvPr id="255" name="" descr="{&quot;isTemplate&quot;:true,&quot;type&quot;:&quot;text&quot;}"/>
+          <p:cNvPr id="289" name="" descr="{&quot;isTemplate&quot;:true,&quot;type&quot;:&quot;text&quot;}"/>
           <p:cNvSpPr txBox="1"/>
           <p:nvPr/>
         </p:nvSpPr>
@@ -11925,7 +13336,7 @@
       </p:sp>
       <p:sp>
         <p:nvSpPr>
-          <p:cNvPr id="256" name=""/>
+          <p:cNvPr id="290" name=""/>
           <p:cNvSpPr/>
           <p:nvPr/>
         </p:nvSpPr>
@@ -11956,7 +13367,7 @@
       </p:sp>
       <p:sp>
         <p:nvSpPr>
-          <p:cNvPr id="257" name=""/>
+          <p:cNvPr id="291" name=""/>
           <p:cNvSpPr/>
           <p:nvPr/>
         </p:nvSpPr>
@@ -12009,7 +13420,7 @@
       </p:sp>
       <p:sp>
         <p:nvSpPr>
-          <p:cNvPr id="258" name="" descr="{&quot;isTemplate&quot;:true,&quot;type&quot;:&quot;text&quot;}"/>
+          <p:cNvPr id="292" name="" descr="{&quot;isTemplate&quot;:true,&quot;type&quot;:&quot;text&quot;}"/>
           <p:cNvSpPr txBox="1"/>
           <p:nvPr/>
         </p:nvSpPr>
@@ -12044,7 +13455,7 @@
       </p:sp>
       <p:sp>
         <p:nvSpPr>
-          <p:cNvPr id="259" name="" descr="{&quot;isTemplate&quot;:true,&quot;type&quot;:&quot;text&quot;}"/>
+          <p:cNvPr id="293" name="" descr="{&quot;isTemplate&quot;:true,&quot;type&quot;:&quot;text&quot;}"/>
           <p:cNvSpPr txBox="1"/>
           <p:nvPr/>
         </p:nvSpPr>
@@ -12089,7 +13500,7 @@
       </p:sp>
       <p:sp>
         <p:nvSpPr>
-          <p:cNvPr id="260" name="" descr="{&quot;isTemplate&quot;:true,&quot;type&quot;:&quot;text&quot;}"/>
+          <p:cNvPr id="294" name="" descr="{&quot;isTemplate&quot;:true,&quot;type&quot;:&quot;text&quot;}"/>
           <p:cNvSpPr txBox="1"/>
           <p:nvPr/>
         </p:nvSpPr>
@@ -12144,7 +13555,7 @@
       </p:sp>
       <p:sp>
         <p:nvSpPr>
-          <p:cNvPr id="261" name="" descr="{&quot;isTemplate&quot;:true,&quot;type&quot;:&quot;text&quot;}"/>
+          <p:cNvPr id="295" name="" descr="{&quot;isTemplate&quot;:true,&quot;type&quot;:&quot;text&quot;}"/>
           <p:cNvSpPr txBox="1"/>
           <p:nvPr/>
         </p:nvSpPr>
@@ -12189,7 +13600,7 @@
       </p:sp>
       <p:sp>
         <p:nvSpPr>
-          <p:cNvPr id="262" name=""/>
+          <p:cNvPr id="296" name=""/>
           <p:cNvSpPr/>
           <p:nvPr/>
         </p:nvSpPr>
@@ -12222,7 +13633,7 @@
       </p:sp>
       <p:sp>
         <p:nvSpPr>
-          <p:cNvPr id="263" name="" descr="{&quot;isTemplate&quot;:true,&quot;type&quot;:&quot;text&quot;}"/>
+          <p:cNvPr id="297" name="" descr="{&quot;isTemplate&quot;:true,&quot;type&quot;:&quot;text&quot;}"/>
           <p:cNvSpPr txBox="1"/>
           <p:nvPr/>
         </p:nvSpPr>
@@ -12277,7 +13688,7 @@
       </p:sp>
       <p:sp>
         <p:nvSpPr>
-          <p:cNvPr id="264" name="" descr="{&quot;isTemplate&quot;:true,&quot;type&quot;:&quot;text&quot;}"/>
+          <p:cNvPr id="298" name="" descr="{&quot;isTemplate&quot;:true,&quot;type&quot;:&quot;text&quot;}"/>
           <p:cNvSpPr txBox="1"/>
           <p:nvPr/>
         </p:nvSpPr>
@@ -12322,7 +13733,7 @@
       </p:sp>
       <p:sp>
         <p:nvSpPr>
-          <p:cNvPr id="265" name=""/>
+          <p:cNvPr id="299" name=""/>
           <p:cNvSpPr/>
           <p:nvPr/>
         </p:nvSpPr>
@@ -12348,7 +13759,7 @@
       </p:sp>
       <p:sp>
         <p:nvSpPr>
-          <p:cNvPr id="266" name="" descr="{&quot;isTemplate&quot;:true,&quot;type&quot;:&quot;text&quot;}"/>
+          <p:cNvPr id="300" name="" descr="{&quot;isTemplate&quot;:true,&quot;type&quot;:&quot;text&quot;}"/>
           <p:cNvSpPr txBox="1"/>
           <p:nvPr/>
         </p:nvSpPr>
@@ -12393,7 +13804,7 @@
       </p:sp>
       <p:sp>
         <p:nvSpPr>
-          <p:cNvPr id="267" name="" descr="{&quot;isTemplate&quot;:true,&quot;type&quot;:&quot;text&quot;}"/>
+          <p:cNvPr id="301" name="" descr="{&quot;isTemplate&quot;:true,&quot;type&quot;:&quot;text&quot;}"/>
           <p:cNvSpPr txBox="1"/>
           <p:nvPr/>
         </p:nvSpPr>
@@ -12428,7 +13839,7 @@
       </p:sp>
       <p:sp>
         <p:nvSpPr>
-          <p:cNvPr id="268" name=""/>
+          <p:cNvPr id="302" name=""/>
           <p:cNvSpPr/>
           <p:nvPr/>
         </p:nvSpPr>
@@ -12454,7 +13865,7 @@
       </p:sp>
       <p:sp>
         <p:nvSpPr>
-          <p:cNvPr id="269" name="" descr="{&quot;isTemplate&quot;:true,&quot;type&quot;:&quot;text&quot;}"/>
+          <p:cNvPr id="303" name="" descr="{&quot;isTemplate&quot;:true,&quot;type&quot;:&quot;text&quot;}"/>
           <p:cNvSpPr txBox="1"/>
           <p:nvPr/>
         </p:nvSpPr>
@@ -12499,7 +13910,7 @@
       </p:sp>
       <p:sp>
         <p:nvSpPr>
-          <p:cNvPr id="270" name="" descr="{&quot;isTemplate&quot;:true,&quot;type&quot;:&quot;text&quot;}"/>
+          <p:cNvPr id="304" name="" descr="{&quot;isTemplate&quot;:true,&quot;type&quot;:&quot;text&quot;}"/>
           <p:cNvSpPr txBox="1"/>
           <p:nvPr/>
         </p:nvSpPr>
@@ -12534,7 +13945,7 @@
       </p:sp>
       <p:sp>
         <p:nvSpPr>
-          <p:cNvPr id="271" name=""/>
+          <p:cNvPr id="305" name=""/>
           <p:cNvSpPr/>
           <p:nvPr/>
         </p:nvSpPr>
@@ -12560,7 +13971,7 @@
       </p:sp>
       <p:sp>
         <p:nvSpPr>
-          <p:cNvPr id="272" name="" descr="{&quot;isTemplate&quot;:true,&quot;type&quot;:&quot;text&quot;}"/>
+          <p:cNvPr id="306" name="" descr="{&quot;isTemplate&quot;:true,&quot;type&quot;:&quot;text&quot;}"/>
           <p:cNvSpPr txBox="1"/>
           <p:nvPr/>
         </p:nvSpPr>
@@ -12625,7 +14036,7 @@
       </p:sp>
       <p:sp>
         <p:nvSpPr>
-          <p:cNvPr id="273" name="" descr="{&quot;isTemplate&quot;:true,&quot;type&quot;:&quot;text&quot;}"/>
+          <p:cNvPr id="307" name="" descr="{&quot;isTemplate&quot;:true,&quot;type&quot;:&quot;text&quot;}"/>
           <p:cNvSpPr txBox="1"/>
           <p:nvPr/>
         </p:nvSpPr>
@@ -12660,7 +14071,7 @@
       </p:sp>
       <p:sp>
         <p:nvSpPr>
-          <p:cNvPr id="274" name=""/>
+          <p:cNvPr id="308" name=""/>
           <p:cNvSpPr/>
           <p:nvPr/>
         </p:nvSpPr>
@@ -12693,7 +14104,7 @@
       </p:sp>
       <p:sp>
         <p:nvSpPr>
-          <p:cNvPr id="275" name="" descr="{&quot;isTemplate&quot;:true,&quot;type&quot;:&quot;text&quot;}"/>
+          <p:cNvPr id="309" name="" descr="{&quot;isTemplate&quot;:true,&quot;type&quot;:&quot;text&quot;}"/>
           <p:cNvSpPr txBox="1"/>
           <p:nvPr/>
         </p:nvSpPr>
@@ -12738,7 +14149,7 @@
       </p:sp>
       <p:sp>
         <p:nvSpPr>
-          <p:cNvPr id="276" name="" descr="{&quot;isTemplate&quot;:true,&quot;type&quot;:&quot;text&quot;}"/>
+          <p:cNvPr id="310" name="" descr="{&quot;isTemplate&quot;:true,&quot;type&quot;:&quot;text&quot;}"/>
           <p:cNvSpPr txBox="1"/>
           <p:nvPr/>
         </p:nvSpPr>
@@ -12853,7 +14264,7 @@
       </p:sp>
       <p:sp>
         <p:nvSpPr>
-          <p:cNvPr id="277" name=""/>
+          <p:cNvPr id="311" name=""/>
           <p:cNvSpPr/>
           <p:nvPr/>
         </p:nvSpPr>
@@ -12879,7 +14290,7 @@
       </p:sp>
       <p:sp>
         <p:nvSpPr>
-          <p:cNvPr id="278" name="" descr="{&quot;isTemplate&quot;:true,&quot;type&quot;:&quot;text&quot;}"/>
+          <p:cNvPr id="312" name="" descr="{&quot;isTemplate&quot;:true,&quot;type&quot;:&quot;text&quot;}"/>
           <p:cNvSpPr txBox="1"/>
           <p:nvPr/>
         </p:nvSpPr>
@@ -12914,7 +14325,7 @@
       </p:sp>
       <p:sp>
         <p:nvSpPr>
-          <p:cNvPr id="279" name=""/>
+          <p:cNvPr id="313" name=""/>
           <p:cNvSpPr/>
           <p:nvPr/>
         </p:nvSpPr>
@@ -12940,7 +14351,7 @@
       </p:sp>
       <p:sp>
         <p:nvSpPr>
-          <p:cNvPr id="280" name="" descr="{&quot;isTemplate&quot;:true,&quot;type&quot;:&quot;text&quot;}"/>
+          <p:cNvPr id="314" name="" descr="{&quot;isTemplate&quot;:true,&quot;type&quot;:&quot;text&quot;}"/>
           <p:cNvSpPr txBox="1"/>
           <p:nvPr/>
         </p:nvSpPr>
@@ -12995,7 +14406,7 @@
       </p:sp>
       <p:sp>
         <p:nvSpPr>
-          <p:cNvPr id="281" name="" descr="{&quot;isTemplate&quot;:true,&quot;type&quot;:&quot;text&quot;}"/>
+          <p:cNvPr id="315" name="" descr="{&quot;isTemplate&quot;:true,&quot;type&quot;:&quot;text&quot;}"/>
           <p:cNvSpPr txBox="1"/>
           <p:nvPr/>
         </p:nvSpPr>
@@ -13030,7 +14441,7 @@
       </p:sp>
       <p:sp>
         <p:nvSpPr>
-          <p:cNvPr id="282" name=""/>
+          <p:cNvPr id="316" name=""/>
           <p:cNvSpPr/>
           <p:nvPr/>
         </p:nvSpPr>
@@ -13056,7 +14467,7 @@
       </p:sp>
       <p:sp>
         <p:nvSpPr>
-          <p:cNvPr id="283" name="" descr="{&quot;isTemplate&quot;:true,&quot;type&quot;:&quot;text&quot;}"/>
+          <p:cNvPr id="317" name="" descr="{&quot;isTemplate&quot;:true,&quot;type&quot;:&quot;text&quot;}"/>
           <p:cNvSpPr txBox="1"/>
           <p:nvPr/>
         </p:nvSpPr>
@@ -13111,7 +14522,7 @@
       </p:sp>
       <p:sp>
         <p:nvSpPr>
-          <p:cNvPr id="284" name="" descr="{&quot;isTemplate&quot;:true,&quot;type&quot;:&quot;text&quot;}"/>
+          <p:cNvPr id="318" name="" descr="{&quot;isTemplate&quot;:true,&quot;type&quot;:&quot;text&quot;}"/>
           <p:cNvSpPr txBox="1"/>
           <p:nvPr/>
         </p:nvSpPr>
@@ -13146,7 +14557,7 @@
       </p:sp>
       <p:sp>
         <p:nvSpPr>
-          <p:cNvPr id="285" name=""/>
+          <p:cNvPr id="319" name=""/>
           <p:cNvSpPr/>
           <p:nvPr/>
         </p:nvSpPr>
@@ -13172,7 +14583,7 @@
       </p:sp>
       <p:sp>
         <p:nvSpPr>
-          <p:cNvPr id="286" name="" descr="{&quot;isTemplate&quot;:true,&quot;type&quot;:&quot;text&quot;}"/>
+          <p:cNvPr id="320" name="" descr="{&quot;isTemplate&quot;:true,&quot;type&quot;:&quot;text&quot;}"/>
           <p:cNvSpPr txBox="1"/>
           <p:nvPr/>
         </p:nvSpPr>
@@ -13227,7 +14638,7 @@
       </p:sp>
       <p:sp>
         <p:nvSpPr>
-          <p:cNvPr id="287" name="" descr="{&quot;isTemplate&quot;:true,&quot;type&quot;:&quot;text&quot;}"/>
+          <p:cNvPr id="321" name="" descr="{&quot;isTemplate&quot;:true,&quot;type&quot;:&quot;text&quot;}"/>
           <p:cNvSpPr txBox="1"/>
           <p:nvPr/>
         </p:nvSpPr>
@@ -13282,7 +14693,7 @@
       </p:sp>
       <p:sp>
         <p:nvSpPr>
-          <p:cNvPr id="288" name=""/>
+          <p:cNvPr id="322" name=""/>
           <p:cNvSpPr/>
           <p:nvPr/>
         </p:nvSpPr>
@@ -13343,7 +14754,7 @@
       </p:sp>
       <p:sp>
         <p:nvSpPr>
-          <p:cNvPr id="289" name=""/>
+          <p:cNvPr id="323" name=""/>
           <p:cNvSpPr/>
           <p:nvPr/>
         </p:nvSpPr>
@@ -13383,7 +14794,7 @@
       </p:sp>
       <p:sp>
         <p:nvSpPr>
-          <p:cNvPr id="290" name="" descr="{&quot;isTemplate&quot;:true,&quot;type&quot;:&quot;text&quot;}"/>
+          <p:cNvPr id="324" name="" descr="{&quot;isTemplate&quot;:true,&quot;type&quot;:&quot;text&quot;}"/>
           <p:cNvSpPr txBox="1"/>
           <p:nvPr/>
         </p:nvSpPr>
@@ -13418,7 +14829,7 @@
       </p:sp>
       <p:sp>
         <p:nvSpPr>
-          <p:cNvPr id="291" name="" descr="{&quot;isTemplate&quot;:true,&quot;type&quot;:&quot;text&quot;}"/>
+          <p:cNvPr id="325" name="" descr="{&quot;isTemplate&quot;:true,&quot;type&quot;:&quot;text&quot;}"/>
           <p:cNvSpPr txBox="1"/>
           <p:nvPr/>
         </p:nvSpPr>
@@ -13475,7 +14886,7 @@
       </p:sp>
       <p:sp>
         <p:nvSpPr>
-          <p:cNvPr id="292" name=""/>
+          <p:cNvPr id="326" name=""/>
           <p:cNvSpPr/>
           <p:nvPr/>
         </p:nvSpPr>
@@ -13503,7 +14914,7 @@
       </p:sp>
       <p:sp>
         <p:nvSpPr>
-          <p:cNvPr id="293" name="" descr="{&quot;isTemplate&quot;:true,&quot;type&quot;:&quot;text&quot;}"/>
+          <p:cNvPr id="327" name="" descr="{&quot;isTemplate&quot;:true,&quot;type&quot;:&quot;text&quot;}"/>
           <p:cNvSpPr txBox="1"/>
           <p:nvPr/>
         </p:nvSpPr>
@@ -13538,7 +14949,7 @@
       </p:sp>
       <p:sp>
         <p:nvSpPr>
-          <p:cNvPr id="294" name=""/>
+          <p:cNvPr id="328" name=""/>
           <p:cNvSpPr/>
           <p:nvPr/>
         </p:nvSpPr>
@@ -13566,7 +14977,7 @@
       </p:sp>
       <p:sp>
         <p:nvSpPr>
-          <p:cNvPr id="295" name="" descr="{&quot;isTemplate&quot;:true,&quot;type&quot;:&quot;text&quot;}"/>
+          <p:cNvPr id="329" name="" descr="{&quot;isTemplate&quot;:true,&quot;type&quot;:&quot;text&quot;}"/>
           <p:cNvSpPr txBox="1"/>
           <p:nvPr/>
         </p:nvSpPr>
@@ -13601,7 +15012,7 @@
       </p:sp>
       <p:sp>
         <p:nvSpPr>
-          <p:cNvPr id="296" name=""/>
+          <p:cNvPr id="330" name=""/>
           <p:cNvSpPr/>
           <p:nvPr/>
         </p:nvSpPr>
@@ -13629,7 +15040,7 @@
       </p:sp>
       <p:sp>
         <p:nvSpPr>
-          <p:cNvPr id="297" name="" descr="{&quot;isTemplate&quot;:true,&quot;type&quot;:&quot;text&quot;}"/>
+          <p:cNvPr id="331" name="" descr="{&quot;isTemplate&quot;:true,&quot;type&quot;:&quot;text&quot;}"/>
           <p:cNvSpPr txBox="1"/>
           <p:nvPr/>
         </p:nvSpPr>
@@ -13664,7 +15075,7 @@
       </p:sp>
       <p:sp>
         <p:nvSpPr>
-          <p:cNvPr id="298" name=""/>
+          <p:cNvPr id="332" name=""/>
           <p:cNvSpPr/>
           <p:nvPr/>
         </p:nvSpPr>
@@ -13690,7 +15101,7 @@
       </p:sp>
       <p:sp>
         <p:nvSpPr>
-          <p:cNvPr id="299" name="" descr="{&quot;isTemplate&quot;:true,&quot;type&quot;:&quot;text&quot;}"/>
+          <p:cNvPr id="333" name="" descr="{&quot;isTemplate&quot;:true,&quot;type&quot;:&quot;text&quot;}"/>
           <p:cNvSpPr txBox="1"/>
           <p:nvPr/>
         </p:nvSpPr>
@@ -13747,7 +15158,7 @@
       </p:sp>
       <p:sp>
         <p:nvSpPr>
-          <p:cNvPr id="300" name="" descr="{&quot;isTemplate&quot;:true,&quot;type&quot;:&quot;text&quot;}"/>
+          <p:cNvPr id="334" name="" descr="{&quot;isTemplate&quot;:true,&quot;type&quot;:&quot;text&quot;}"/>
           <p:cNvSpPr txBox="1"/>
           <p:nvPr/>
         </p:nvSpPr>
@@ -13802,7 +15213,7 @@
       </p:sp>
       <p:sp>
         <p:nvSpPr>
-          <p:cNvPr id="301" name=""/>
+          <p:cNvPr id="335" name=""/>
           <p:cNvSpPr/>
           <p:nvPr/>
         </p:nvSpPr>
@@ -13826,7 +15237,7 @@
       </p:sp>
       <p:sp>
         <p:nvSpPr>
-          <p:cNvPr id="302" name="" descr="{&quot;isTemplate&quot;:true,&quot;type&quot;:&quot;text&quot;}"/>
+          <p:cNvPr id="336" name="" descr="{&quot;isTemplate&quot;:true,&quot;type&quot;:&quot;text&quot;}"/>
           <p:cNvSpPr txBox="1"/>
           <p:nvPr/>
         </p:nvSpPr>
@@ -13869,7 +15280,7 @@
   <p:cSld>
     <p:spTree>
       <p:nvGrpSpPr>
-        <p:cNvPr id="303" name="" descr="&lt;Slide style={{ width: 1280, height: 720, background: '#0A1D37', display: 'flex', flexDirection: 'column', padding: '44px 64px 16px 64px' }}&gt;&#10;    &lt;Text style={{ fontSize: 14, color: '#22D3EE', letterSpacing: 3 }}&gt;实证 · 相同数据 · 相同模型&lt;/Text&gt;&#10;    &lt;Text style={{ fontSize: 33, fontWeight: 'bold', color: '#F8FAFC', marginTop: 8 }}&gt;相同数据、相同模型下，持续学习验证指标改善约 5.6%&lt;/Text&gt;&#10;&#10;    &lt;Box style={{ flexDirection: 'row', gap: 40, flex: 1, marginTop: 20, alignItems: 'stretch' }}&gt;&#10;        &lt;Box style={{ width: 400, display: 'flex', flexDirection: 'column' }}&gt;&#10;            &lt;Text style={{ fontSize: 104, fontWeight: 'bold', color: '#22D3EE', fontFamily: 'Space Grotesk, Inter, sans-serif', lineHeight: 1.0 }}&gt;5.6%&lt;/Text&gt;&#10;            &lt;Text style={{ fontSize: 17, color: '#F8FAFC', marginTop: 8 }}&gt;WAPE 相对改善&lt;/Text&gt;&#10;            &lt;Box style={{ height: 1, background: '#123B63', margin: '20px 0' }} /&gt;&#10;            &lt;Box style={{ flexDirection: 'row', gap: 32 }}&gt;&#10;                &lt;Box&gt;&#10;                    &lt;Text style={{ fontSize: 34, fontWeight: 'bold', color: '#F8FAFC', fontFamily: 'Space Grotesk, Inter, sans-serif' }}&gt;31 / 32&lt;/Text&gt;&#10;                    &lt;Text style={{ fontSize: 12, color: '#94A3B8', marginTop: 4 }}&gt;个月动态模型更优&lt;/Text&gt;&#10;                &lt;/Box&gt;&#10;                &lt;Box&gt;&#10;                    &lt;Text style={{ fontSize: 34, fontWeight: 'bold', color: '#F8FAFC', fontFamily: 'Space Grotesk, Inter, sans-serif' }}&gt;68,040&lt;/Text&gt;&#10;                    &lt;Text style={{ fontSize: 12, color: '#94A3B8', marginTop: 4 }}&gt;共有预测主键 · 同口径对齐&lt;/Text&gt;&#10;                &lt;/Box&gt;&#10;            &lt;/Box&gt;&#10;            &lt;Box style={{ marginTop: 18, border: '1px solid #123B63', borderRadius: 8, padding: '10px 14px' }}&gt;&#10;                &lt;Text style={{ fontSize: 12, color: '#94A3B8', lineHeight: 1.7 }}&gt;唯一回退月份：2016-07（WAPE +0.02 pp）——32 个月中仅 1 次略差，仍纳入统计、不做剔除。&lt;/Text&gt;&#10;            &lt;/Box&gt;&#10;            &lt;Text style={{ fontSize: 13, color: '#94A3B8', lineHeight: 1.8, marginTop: 'auto' }}&gt;改善不靠更换模型——在相同模型条件下，由持续学习获得。&lt;/Text&gt;&#10;        &lt;/Box&gt;&#10;&#10;        &lt;Box style={{ flex: 1, background: '#123B63', borderRadius: 14, padding: 22, display: 'flex', flexDirection: 'column' }}&gt;&#10;            &lt;Box&gt;&#10;                &lt;Box style={{ flexDirection: 'row', alignItems: 'center' }}&gt;&#10;                    &lt;Text style={{ fontSize: 14.5, fontWeight: 'bold', color: '#F8FAFC' }}&gt;WAPE｜越低越好&lt;/Text&gt;&#10;                    &lt;Box style={{ marginLeft: 'auto', border: '1px solid #22D3EE', borderRadius: 999, padding: '2px 10px' }}&gt;&#10;                        &lt;Text style={{ fontSize: 12.5, fontWeight: 'bold', color: '#22D3EE' }}&gt;−0.2176 pp&lt;/Text&gt;&#10;                    &lt;/Box&gt;&#10;                &lt;/Box&gt;&#10;                &lt;Box style={{ flexDirection: 'row', alignItems: 'center', gap: 8, marginTop: 10 }}&gt;&#10;                    &lt;Text style={{ width: 76, fontSize: 12.5, color: '#94A3B8' }}&gt;静态模型&lt;/Text&gt;&#10;                    &lt;Box style={{ width: 400, height: 20, background: '#0A1D37', borderRadius: 4, position: 'relative' }}&gt;&#10;                        &lt;Box style={{ position: 'absolute', left: 0, top: 0, width: 390, height: 20, background: '#94A3B8', borderRadius: 4 }} /&gt;&#10;                    &lt;/Box&gt;&#10;                    &lt;Text style={{ fontSize: 12.5, fontWeight: 'bold', color: '#F8FAFC', marginLeft: 6 }}&gt;3.8876%&lt;/Text&gt;&#10;                &lt;/Box&gt;&#10;                &lt;Box style={{ flexDirection: 'row', alignItems: 'center', gap: 8, marginTop: 8 }}&gt;&#10;                    &lt;Text style={{ width: 76, fontSize: 12.5, color: '#F8FAFC' }}&gt;持续学习&lt;/Text&gt;&#10;                    &lt;Box style={{ width: 400, height: 20, background: '#0A1D37', borderRadius: 4, position: 'relative' }}&gt;&#10;                        &lt;Box style={{ position: 'absolute', left: 0, top: 0, width: 368, height: 20, background: '#22D3EE', borderRadius: 4 }} /&gt;&#10;                    &lt;/Box&gt;&#10;                    &lt;Text style={{ fontSize: 12.5, fontWeight: 'bold', color: '#22D3EE', marginLeft: 6 }}&gt;3.6700%&lt;/Text&gt;&#10;                &lt;/Box&gt;&#10;            &lt;/Box&gt;&#10;&#10;            &lt;Box style={{ height: 1, background: '#0A1D37', margin: '14px 0' }} /&gt;&#10;&#10;            &lt;Box&gt;&#10;                &lt;Box style={{ flexDirection: 'row', alignItems: 'center' }}&gt;&#10;                    &lt;Text style={{ fontSize: 14.5, fontWeight: 'bold', color: '#F8FAFC' }}&gt;MAE｜越低越好&lt;/Text&gt;&#10;                    &lt;Box style={{ marginLeft: 'auto', border: '1px solid #22D3EE', borderRadius: 999, padding: '2px 10px' }}&gt;&#10;                        &lt;Text style={{ fontSize: 12.5, fontWeight: 'bold', color: '#22D3EE' }}&gt;−20.34 MW&lt;/Text&gt;&#10;                    &lt;/Box&gt;&#10;                &lt;/Box&gt;&#10;                &lt;Box style={{ flexDirection: 'row', alignItems: 'center', gap: 8, marginTop: 10 }}&gt;&#10;                    &lt;Text style={{ width: 76, fontSize: 12.5, color: '#94A3B8' }}&gt;静态模型&lt;/Text&gt;&#10;                    &lt;Box style={{ width: 400, height: 20, background: '#0A1D37', borderRadius: 4, position: 'relative' }}&gt;&#10;                        &lt;Box style={{ position: 'absolute', left: 0, top: 0, width: 363, height: 20, background: '#94A3B8', borderRadius: 4 }} /&gt;&#10;                    &lt;/Box&gt;&#10;                    &lt;Text style={{ fontSize: 12.5, fontWeight: 'bold', color: '#F8FAFC', marginLeft: 6 }}&gt;363.33&lt;/Text&gt;&#10;                &lt;/Box&gt;&#10;                &lt;Box style={{ flexDirection: 'row', alignItems: 'center', gap: 8, marginTop: 8 }}&gt;&#10;                    &lt;Text style={{ width: 76, fontSize: 12.5, color: '#F8FAFC' }}&gt;持续学习&lt;/Text&gt;&#10;                    &lt;Box style={{ width: 400, height: 20, background: '#0A1D37', borderRadius: 4, position: 'relative' }}&gt;&#10;                        &lt;Box style={{ position: 'absolute', left: 0, top: 0, width: 343, height: 20, background: '#22D3EE', borderRadius: 4 }} /&gt;&#10;                    &lt;/Box&gt;&#10;                    &lt;Text style={{ fontSize: 12.5, fontWeight: 'bold', color: '#22D3EE', marginLeft: 6 }}&gt;342.99&lt;/Text&gt;&#10;                &lt;/Box&gt;&#10;            &lt;/Box&gt;&#10;&#10;            &lt;Box style={{ height: 1, background: '#0A1D37', margin: '14px 0' }} /&gt;&#10;&#10;            &lt;Box style={{ flexDirection: 'row', alignItems: 'center', marginBottom: 6 }}&gt;&#10;                &lt;Text style={{ fontSize: 14.5, fontWeight: 'bold', color: '#F8FAFC' }}&gt;月度 WAPE 走势&lt;/Text&gt;&#10;                &lt;Text style={{ marginLeft: 12, fontSize: 11.5, color: '#94A3B8' }}&gt;2016-01 → 2018-08 · 动态模型长期低于静态&lt;/Text&gt;&#10;            &lt;/Box&gt;&#10;            &lt;Chart&#10;                style={{ height: 200 }}&#10;                chartType='lineChart'&#10;                background='#123B63'&#10;                showLegend={true}&#10;                legendColor='#94A3B8'&#10;                axisColor='#64748B'&#10;                colors={['#94A3B8', '#22D3EE']}&#10;                data={[&#10;                    ['月份', '静态 WAPE', '动态 WAPE'],&#10;                    ['16-01', 4.5448, 4.5448],&#10;                    ['16-02', 4.4292, 4.2311],&#10;                    ['16-03', 3.2708, 3.0051],&#10;                    ['16-04', 3.3004, 3.1009],&#10;                    ['16-05', 2.8832, 2.7354],&#10;                    ['16-06', 3.9656, 3.6806],&#10;                    ['16-07', 3.5909, 3.6100],&#10;                    ['16-08', 3.5359, 3.3589],&#10;                    ['16-09', 4.2052, 4.0221],&#10;                    ['16-10', 2.8927, 2.6459],&#10;                    ['16-11', 3.2834, 2.8776],&#10;                    ['16-12', 4.0062, 3.9155],&#10;                    ['17-01', 4.3050, 4.0186],&#10;                    ['17-02', 4.5920, 4.2749],&#10;                    ['17-03', 3.8754, 3.6176],&#10;                    ['17-04', 3.4790, 3.1714],&#10;                    ['17-05', 3.9822, 3.6762],&#10;                    ['17-06', 3.7651, 3.6524],&#10;                    ['17-07', 3.7563, 3.4687],&#10;                    ['17-08', 3.2999, 3.2072],&#10;                    ['17-09', 3.6859, 3.3214],&#10;                    ['17-10', 3.2119, 2.9114],&#10;                    ['17-11', 3.6483, 3.3150],&#10;                    ['17-12', 4.1561, 3.9405],&#10;                    ['18-01', 4.8647, 4.8506],&#10;                    ['18-02', 4.2964, 4.1074],&#10;                    ['18-03', 4.3352, 4.0496],&#10;                    ['18-04', 4.1911, 3.8786],&#10;                    ['18-05', 4.3633, 4.0013],&#10;                    ['18-06', 4.2547, 3.8982],&#10;                    ['18-07', 3.8659, 3.7938],&#10;                    ['18-08', 3.5641, 3.1085],&#10;                ]}&#10;            /&gt;&#10;        &lt;/Box&gt;&#10;    &lt;/Box&gt;&#10;&#10;    &lt;Box style={{ flexDirection: 'row', marginTop: 14, alignItems: 'center' }}&gt;&#10;        &lt;Text style={{ fontSize: 11.5, color: '#94A3B8' }}&gt;Source: monthly_static_dynamic_validation_metrics.csv · 68,040 共有预测主键 · 按纽约本地预测月份统计 · 验证集结果，非真实生产承诺&lt;/Text&gt;&#10;        &lt;Box style={{ marginLeft: 'auto', flexDirection: 'row', alignItems: 'center', gap: 8 }}&gt;&#10;            &lt;Box style={{ width: 10, height: 10, background: '#22D3EE' }} /&gt;&#10;            &lt;Text style={{ fontSize: 13, color: '#94A3B8' }}&gt;CLE · 06 / 07&lt;/Text&gt;&#10;        &lt;/Box&gt;&#10;    &lt;/Box&gt;&#10;&lt;/Slide&gt;"/>
+        <p:cNvPr id="337" name="" descr="&lt;Slide style={{ width: 1280, height: 720, background: '#0A1D37', display: 'flex', flexDirection: 'column', padding: '44px 64px 16px 64px' }}&gt;&#10;    &lt;Text style={{ fontSize: 14, color: '#22D3EE', letterSpacing: 3 }}&gt;实证 · 相同数据 · 相同模型&lt;/Text&gt;&#10;    &lt;Text style={{ fontSize: 33, fontWeight: 'bold', color: '#F8FAFC', marginTop: 8 }}&gt;相同数据、相同模型下，持续学习验证指标改善约 5.6%&lt;/Text&gt;&#10;&#10;    &lt;Box style={{ flexDirection: 'row', gap: 40, flex: 1, marginTop: 20, alignItems: 'stretch' }}&gt;&#10;        &lt;Box style={{ width: 400, display: 'flex', flexDirection: 'column' }}&gt;&#10;            &lt;Text style={{ fontSize: 104, fontWeight: 'bold', color: '#22D3EE', fontFamily: 'Space Grotesk, Inter, sans-serif', lineHeight: 1.0 }}&gt;5.6%&lt;/Text&gt;&#10;            &lt;Text style={{ fontSize: 17, color: '#F8FAFC', marginTop: 8 }}&gt;WAPE 相对改善&lt;/Text&gt;&#10;            &lt;Box style={{ height: 1, background: '#123B63', margin: '20px 0' }} /&gt;&#10;            &lt;Box style={{ flexDirection: 'row', gap: 32 }}&gt;&#10;                &lt;Box&gt;&#10;                    &lt;Text style={{ fontSize: 34, fontWeight: 'bold', color: '#F8FAFC', fontFamily: 'Space Grotesk, Inter, sans-serif' }}&gt;31 / 32&lt;/Text&gt;&#10;                    &lt;Text style={{ fontSize: 12, color: '#94A3B8', marginTop: 4 }}&gt;个月动态模型更优&lt;/Text&gt;&#10;                &lt;/Box&gt;&#10;                &lt;Box&gt;&#10;                    &lt;Text style={{ fontSize: 34, fontWeight: 'bold', color: '#F8FAFC', fontFamily: 'Space Grotesk, Inter, sans-serif' }}&gt;68,040&lt;/Text&gt;&#10;                    &lt;Text style={{ fontSize: 12, color: '#94A3B8', marginTop: 4 }}&gt;共有预测主键 · 同口径对齐&lt;/Text&gt;&#10;                &lt;/Box&gt;&#10;            &lt;/Box&gt;&#10;            &lt;Box style={{ marginTop: 18, border: '1px solid #123B63', borderRadius: 8, padding: '10px 14px' }}&gt;&#10;                &lt;Text style={{ fontSize: 12, color: '#94A3B8', lineHeight: 1.7 }}&gt;唯一回退月份：2016-07（WAPE +0.02 pp）——32 个月中仅 1 次略差，仍纳入统计、不做剔除。&lt;/Text&gt;&#10;            &lt;/Box&gt;&#10;            &lt;Text style={{ fontSize: 13, color: '#94A3B8', lineHeight: 1.8, marginTop: 'auto' }}&gt;改善不靠更换模型——在相同模型条件下，由持续学习获得。&lt;/Text&gt;&#10;        &lt;/Box&gt;&#10;&#10;        &lt;Box style={{ flex: 1, background: '#123B63', borderRadius: 14, padding: 22, display: 'flex', flexDirection: 'column' }}&gt;&#10;            &lt;Box&gt;&#10;                &lt;Box style={{ flexDirection: 'row', alignItems: 'center' }}&gt;&#10;                    &lt;Text style={{ fontSize: 14.5, fontWeight: 'bold', color: '#F8FAFC' }}&gt;WAPE｜越低越好&lt;/Text&gt;&#10;                    &lt;Box style={{ marginLeft: 'auto', border: '1px solid #22D3EE', borderRadius: 999, padding: '2px 10px' }}&gt;&#10;                        &lt;Text style={{ fontSize: 12.5, fontWeight: 'bold', color: '#22D3EE' }}&gt;−0.2176 pp&lt;/Text&gt;&#10;                    &lt;/Box&gt;&#10;                &lt;/Box&gt;&#10;                &lt;Box style={{ flexDirection: 'row', alignItems: 'center', gap: 8, marginTop: 10 }}&gt;&#10;                    &lt;Text style={{ width: 76, fontSize: 12.5, color: '#94A3B8' }}&gt;静态模型&lt;/Text&gt;&#10;                    &lt;Box style={{ width: 400, height: 20, background: '#0A1D37', borderRadius: 4, position: 'relative' }}&gt;&#10;                        &lt;Box style={{ position: 'absolute', left: 0, top: 0, width: 390, height: 20, background: '#94A3B8', borderRadius: 4 }} /&gt;&#10;                    &lt;/Box&gt;&#10;                    &lt;Text style={{ fontSize: 12.5, fontWeight: 'bold', color: '#F8FAFC', marginLeft: 6 }}&gt;3.8876%&lt;/Text&gt;&#10;                &lt;/Box&gt;&#10;                &lt;Box style={{ flexDirection: 'row', alignItems: 'center', gap: 8, marginTop: 8 }}&gt;&#10;                    &lt;Text style={{ width: 76, fontSize: 12.5, color: '#F8FAFC' }}&gt;持续学习&lt;/Text&gt;&#10;                    &lt;Box style={{ width: 400, height: 20, background: '#0A1D37', borderRadius: 4, position: 'relative' }}&gt;&#10;                        &lt;Box style={{ position: 'absolute', left: 0, top: 0, width: 368, height: 20, background: '#22D3EE', borderRadius: 4 }} /&gt;&#10;                    &lt;/Box&gt;&#10;                    &lt;Text style={{ fontSize: 12.5, fontWeight: 'bold', color: '#22D3EE', marginLeft: 6 }}&gt;3.6700%&lt;/Text&gt;&#10;                &lt;/Box&gt;&#10;            &lt;/Box&gt;&#10;&#10;            &lt;Box style={{ height: 1, background: '#0A1D37', margin: '14px 0' }} /&gt;&#10;&#10;            &lt;Box&gt;&#10;                &lt;Box style={{ flexDirection: 'row', alignItems: 'center' }}&gt;&#10;                    &lt;Text style={{ fontSize: 14.5, fontWeight: 'bold', color: '#F8FAFC' }}&gt;MAE｜越低越好&lt;/Text&gt;&#10;                    &lt;Box style={{ marginLeft: 'auto', border: '1px solid #22D3EE', borderRadius: 999, padding: '2px 10px' }}&gt;&#10;                        &lt;Text style={{ fontSize: 12.5, fontWeight: 'bold', color: '#22D3EE' }}&gt;−20.34 MW&lt;/Text&gt;&#10;                    &lt;/Box&gt;&#10;                &lt;/Box&gt;&#10;                &lt;Box style={{ flexDirection: 'row', alignItems: 'center', gap: 8, marginTop: 10 }}&gt;&#10;                    &lt;Text style={{ width: 76, fontSize: 12.5, color: '#94A3B8' }}&gt;静态模型&lt;/Text&gt;&#10;                    &lt;Box style={{ width: 400, height: 20, background: '#0A1D37', borderRadius: 4, position: 'relative' }}&gt;&#10;                        &lt;Box style={{ position: 'absolute', left: 0, top: 0, width: 363, height: 20, background: '#94A3B8', borderRadius: 4 }} /&gt;&#10;                    &lt;/Box&gt;&#10;                    &lt;Text style={{ fontSize: 12.5, fontWeight: 'bold', color: '#F8FAFC', marginLeft: 6 }}&gt;363.33&lt;/Text&gt;&#10;                &lt;/Box&gt;&#10;                &lt;Box style={{ flexDirection: 'row', alignItems: 'center', gap: 8, marginTop: 8 }}&gt;&#10;                    &lt;Text style={{ width: 76, fontSize: 12.5, color: '#F8FAFC' }}&gt;持续学习&lt;/Text&gt;&#10;                    &lt;Box style={{ width: 400, height: 20, background: '#0A1D37', borderRadius: 4, position: 'relative' }}&gt;&#10;                        &lt;Box style={{ position: 'absolute', left: 0, top: 0, width: 343, height: 20, background: '#22D3EE', borderRadius: 4 }} /&gt;&#10;                    &lt;/Box&gt;&#10;                    &lt;Text style={{ fontSize: 12.5, fontWeight: 'bold', color: '#22D3EE', marginLeft: 6 }}&gt;342.99&lt;/Text&gt;&#10;                &lt;/Box&gt;&#10;            &lt;/Box&gt;&#10;&#10;            &lt;Box style={{ height: 1, background: '#0A1D37', margin: '14px 0' }} /&gt;&#10;&#10;            &lt;Box style={{ flexDirection: 'row', alignItems: 'center', marginBottom: 6 }}&gt;&#10;                &lt;Text style={{ fontSize: 14.5, fontWeight: 'bold', color: '#F8FAFC' }}&gt;月度 WAPE 走势&lt;/Text&gt;&#10;                &lt;Text style={{ marginLeft: 12, fontSize: 11.5, color: '#94A3B8' }}&gt;2016-01 → 2018-08 · 动态模型长期低于静态&lt;/Text&gt;&#10;            &lt;/Box&gt;&#10;            &lt;Chart&#10;                style={{ height: 200 }}&#10;                chartType='lineChart'&#10;                background='#123B63'&#10;                showLegend={true}&#10;                legendColor='#94A3B8'&#10;                axisColor='#64748B'&#10;                colors={['#94A3B8', '#22D3EE']}&#10;                data={[&#10;                    ['月份', '静态 WAPE', '动态 WAPE'],&#10;                    ['16-01', 4.5448, 4.5448],&#10;                    ['16-02', 4.4292, 4.2311],&#10;                    ['16-03', 3.2708, 3.0051],&#10;                    ['16-04', 3.3004, 3.1009],&#10;                    ['16-05', 2.8832, 2.7354],&#10;                    ['16-06', 3.9656, 3.6806],&#10;                    ['16-07', 3.5909, 3.6100],&#10;                    ['16-08', 3.5359, 3.3589],&#10;                    ['16-09', 4.2052, 4.0221],&#10;                    ['16-10', 2.8927, 2.6459],&#10;                    ['16-11', 3.2834, 2.8776],&#10;                    ['16-12', 4.0062, 3.9155],&#10;                    ['17-01', 4.3050, 4.0186],&#10;                    ['17-02', 4.5920, 4.2749],&#10;                    ['17-03', 3.8754, 3.6176],&#10;                    ['17-04', 3.4790, 3.1714],&#10;                    ['17-05', 3.9822, 3.6762],&#10;                    ['17-06', 3.7651, 3.6524],&#10;                    ['17-07', 3.7563, 3.4687],&#10;                    ['17-08', 3.2999, 3.2072],&#10;                    ['17-09', 3.6859, 3.3214],&#10;                    ['17-10', 3.2119, 2.9114],&#10;                    ['17-11', 3.6483, 3.3150],&#10;                    ['17-12', 4.1561, 3.9405],&#10;                    ['18-01', 4.8647, 4.8506],&#10;                    ['18-02', 4.2964, 4.1074],&#10;                    ['18-03', 4.3352, 4.0496],&#10;                    ['18-04', 4.1911, 3.8786],&#10;                    ['18-05', 4.3633, 4.0013],&#10;                    ['18-06', 4.2547, 3.8982],&#10;                    ['18-07', 3.8659, 3.7938],&#10;                    ['18-08', 3.5641, 3.1085],&#10;                ]}&#10;            /&gt;&#10;        &lt;/Box&gt;&#10;    &lt;/Box&gt;&#10;&#10;    &lt;Box style={{ flexDirection: 'row', marginTop: 14, alignItems: 'center' }}&gt;&#10;        &lt;Text style={{ fontSize: 11.5, color: '#94A3B8' }}&gt;Source: monthly_static_dynamic_validation_metrics.csv · 68,040 共有预测主键 · 按纽约本地预测月份统计 · 验证集结果，非真实生产承诺&lt;/Text&gt;&#10;        &lt;Box style={{ marginLeft: 'auto', flexDirection: 'row', alignItems: 'center', gap: 8 }}&gt;&#10;            &lt;Box style={{ width: 10, height: 10, background: '#22D3EE' }} /&gt;&#10;            &lt;Text style={{ fontSize: 13, color: '#94A3B8' }}&gt;CLE · 06 / 07&lt;/Text&gt;&#10;        &lt;/Box&gt;&#10;    &lt;/Box&gt;&#10;&lt;/Slide&gt;"/>
         <p:cNvGrpSpPr/>
         <p:nvPr/>
       </p:nvGrpSpPr>
@@ -13883,7 +15294,7 @@
       </p:grpSpPr>
       <p:sp>
         <p:nvSpPr>
-          <p:cNvPr id="304" name=""/>
+          <p:cNvPr id="338" name=""/>
           <p:cNvSpPr/>
           <p:nvPr/>
         </p:nvSpPr>
@@ -13907,7 +15318,7 @@
       </p:sp>
       <p:sp>
         <p:nvSpPr>
-          <p:cNvPr id="305" name="" descr="{&quot;isTemplate&quot;:true,&quot;type&quot;:&quot;text&quot;}"/>
+          <p:cNvPr id="339" name="" descr="{&quot;isTemplate&quot;:true,&quot;type&quot;:&quot;text&quot;}"/>
           <p:cNvSpPr txBox="1"/>
           <p:nvPr/>
         </p:nvSpPr>
@@ -13982,7 +15393,7 @@
       </p:sp>
       <p:sp>
         <p:nvSpPr>
-          <p:cNvPr id="306" name="" descr="{&quot;isTemplate&quot;:true,&quot;type&quot;:&quot;text&quot;}"/>
+          <p:cNvPr id="340" name="" descr="{&quot;isTemplate&quot;:true,&quot;type&quot;:&quot;text&quot;}"/>
           <p:cNvSpPr txBox="1"/>
           <p:nvPr/>
         </p:nvSpPr>
@@ -14027,7 +15438,7 @@
       </p:sp>
       <p:sp>
         <p:nvSpPr>
-          <p:cNvPr id="307" name="" descr="{&quot;isTemplate&quot;:true,&quot;type&quot;:&quot;text&quot;}"/>
+          <p:cNvPr id="341" name="" descr="{&quot;isTemplate&quot;:true,&quot;type&quot;:&quot;text&quot;}"/>
           <p:cNvSpPr txBox="1"/>
           <p:nvPr/>
         </p:nvSpPr>
@@ -14062,7 +15473,7 @@
       </p:sp>
       <p:sp>
         <p:nvSpPr>
-          <p:cNvPr id="308" name="" descr="{&quot;isTemplate&quot;:true,&quot;type&quot;:&quot;text&quot;}"/>
+          <p:cNvPr id="342" name="" descr="{&quot;isTemplate&quot;:true,&quot;type&quot;:&quot;text&quot;}"/>
           <p:cNvSpPr txBox="1"/>
           <p:nvPr/>
         </p:nvSpPr>
@@ -14107,7 +15518,7 @@
       </p:sp>
       <p:sp>
         <p:nvSpPr>
-          <p:cNvPr id="309" name=""/>
+          <p:cNvPr id="343" name=""/>
           <p:cNvSpPr/>
           <p:nvPr/>
         </p:nvSpPr>
@@ -14131,7 +15542,7 @@
       </p:sp>
       <p:sp>
         <p:nvSpPr>
-          <p:cNvPr id="310" name="" descr="{&quot;isTemplate&quot;:true,&quot;type&quot;:&quot;text&quot;}"/>
+          <p:cNvPr id="344" name="" descr="{&quot;isTemplate&quot;:true,&quot;type&quot;:&quot;text&quot;}"/>
           <p:cNvSpPr txBox="1"/>
           <p:nvPr/>
         </p:nvSpPr>
@@ -14166,7 +15577,7 @@
       </p:sp>
       <p:sp>
         <p:nvSpPr>
-          <p:cNvPr id="311" name="" descr="{&quot;isTemplate&quot;:true,&quot;type&quot;:&quot;text&quot;}"/>
+          <p:cNvPr id="345" name="" descr="{&quot;isTemplate&quot;:true,&quot;type&quot;:&quot;text&quot;}"/>
           <p:cNvSpPr txBox="1"/>
           <p:nvPr/>
         </p:nvSpPr>
@@ -14201,7 +15612,7 @@
       </p:sp>
       <p:sp>
         <p:nvSpPr>
-          <p:cNvPr id="312" name="" descr="{&quot;isTemplate&quot;:true,&quot;type&quot;:&quot;text&quot;}"/>
+          <p:cNvPr id="346" name="" descr="{&quot;isTemplate&quot;:true,&quot;type&quot;:&quot;text&quot;}"/>
           <p:cNvSpPr txBox="1"/>
           <p:nvPr/>
         </p:nvSpPr>
@@ -14236,7 +15647,7 @@
       </p:sp>
       <p:sp>
         <p:nvSpPr>
-          <p:cNvPr id="313" name="" descr="{&quot;isTemplate&quot;:true,&quot;type&quot;:&quot;text&quot;}"/>
+          <p:cNvPr id="347" name="" descr="{&quot;isTemplate&quot;:true,&quot;type&quot;:&quot;text&quot;}"/>
           <p:cNvSpPr txBox="1"/>
           <p:nvPr/>
         </p:nvSpPr>
@@ -14291,7 +15702,7 @@
       </p:sp>
       <p:sp>
         <p:nvSpPr>
-          <p:cNvPr id="314" name=""/>
+          <p:cNvPr id="348" name=""/>
           <p:cNvSpPr/>
           <p:nvPr/>
         </p:nvSpPr>
@@ -14319,7 +15730,7 @@
       </p:sp>
       <p:sp>
         <p:nvSpPr>
-          <p:cNvPr id="315" name="" descr="{&quot;isTemplate&quot;:true,&quot;type&quot;:&quot;text&quot;}"/>
+          <p:cNvPr id="349" name="" descr="{&quot;isTemplate&quot;:true,&quot;type&quot;:&quot;text&quot;}"/>
           <p:cNvSpPr txBox="1"/>
           <p:nvPr/>
         </p:nvSpPr>
@@ -14436,7 +15847,7 @@
       </p:sp>
       <p:sp>
         <p:nvSpPr>
-          <p:cNvPr id="316" name="" descr="{&quot;isTemplate&quot;:true,&quot;type&quot;:&quot;text&quot;}"/>
+          <p:cNvPr id="350" name="" descr="{&quot;isTemplate&quot;:true,&quot;type&quot;:&quot;text&quot;}"/>
           <p:cNvSpPr txBox="1"/>
           <p:nvPr/>
         </p:nvSpPr>
@@ -14471,7 +15882,7 @@
       </p:sp>
       <p:sp>
         <p:nvSpPr>
-          <p:cNvPr id="317" name=""/>
+          <p:cNvPr id="351" name=""/>
           <p:cNvSpPr/>
           <p:nvPr/>
         </p:nvSpPr>
@@ -14497,7 +15908,7 @@
       </p:sp>
       <p:sp>
         <p:nvSpPr>
-          <p:cNvPr id="318" name="" descr="{&quot;isTemplate&quot;:true,&quot;type&quot;:&quot;text&quot;}"/>
+          <p:cNvPr id="352" name="" descr="{&quot;isTemplate&quot;:true,&quot;type&quot;:&quot;text&quot;}"/>
           <p:cNvSpPr txBox="1"/>
           <p:nvPr/>
         </p:nvSpPr>
@@ -14542,7 +15953,7 @@
       </p:sp>
       <p:sp>
         <p:nvSpPr>
-          <p:cNvPr id="319" name=""/>
+          <p:cNvPr id="353" name=""/>
           <p:cNvSpPr/>
           <p:nvPr/>
         </p:nvSpPr>
@@ -14570,7 +15981,7 @@
       </p:sp>
       <p:sp>
         <p:nvSpPr>
-          <p:cNvPr id="320" name="" descr="{&quot;isTemplate&quot;:true,&quot;type&quot;:&quot;text&quot;}"/>
+          <p:cNvPr id="354" name="" descr="{&quot;isTemplate&quot;:true,&quot;type&quot;:&quot;text&quot;}"/>
           <p:cNvSpPr txBox="1"/>
           <p:nvPr/>
         </p:nvSpPr>
@@ -14605,7 +16016,7 @@
       </p:sp>
       <p:sp>
         <p:nvSpPr>
-          <p:cNvPr id="321" name="" descr="{&quot;isTemplate&quot;:true,&quot;type&quot;:&quot;text&quot;}"/>
+          <p:cNvPr id="355" name="" descr="{&quot;isTemplate&quot;:true,&quot;type&quot;:&quot;text&quot;}"/>
           <p:cNvSpPr txBox="1"/>
           <p:nvPr/>
         </p:nvSpPr>
@@ -14640,7 +16051,7 @@
       </p:sp>
       <p:sp>
         <p:nvSpPr>
-          <p:cNvPr id="322" name="" descr="{&quot;isTemplate&quot;:true,&quot;type&quot;:&quot;text&quot;}"/>
+          <p:cNvPr id="356" name="" descr="{&quot;isTemplate&quot;:true,&quot;type&quot;:&quot;text&quot;}"/>
           <p:cNvSpPr txBox="1"/>
           <p:nvPr/>
         </p:nvSpPr>
@@ -14675,7 +16086,7 @@
       </p:sp>
       <p:sp>
         <p:nvSpPr>
-          <p:cNvPr id="323" name="" descr="{&quot;isTemplate&quot;:true,&quot;type&quot;:&quot;text&quot;}"/>
+          <p:cNvPr id="357" name="" descr="{&quot;isTemplate&quot;:true,&quot;type&quot;:&quot;text&quot;}"/>
           <p:cNvSpPr txBox="1"/>
           <p:nvPr/>
         </p:nvSpPr>
@@ -14710,7 +16121,7 @@
       </p:sp>
       <p:sp>
         <p:nvSpPr>
-          <p:cNvPr id="324" name="" descr="{&quot;isTemplate&quot;:true,&quot;type&quot;:&quot;text&quot;}"/>
+          <p:cNvPr id="358" name="" descr="{&quot;isTemplate&quot;:true,&quot;type&quot;:&quot;text&quot;}"/>
           <p:cNvSpPr txBox="1"/>
           <p:nvPr/>
         </p:nvSpPr>
@@ -14745,7 +16156,7 @@
       </p:sp>
       <p:sp>
         <p:nvSpPr>
-          <p:cNvPr id="325" name=""/>
+          <p:cNvPr id="359" name=""/>
           <p:cNvSpPr/>
           <p:nvPr/>
         </p:nvSpPr>
@@ -14769,7 +16180,7 @@
       </p:sp>
       <p:sp>
         <p:nvSpPr>
-          <p:cNvPr id="326" name="" descr="{&quot;isTemplate&quot;:true,&quot;type&quot;:&quot;text&quot;}"/>
+          <p:cNvPr id="360" name="" descr="{&quot;isTemplate&quot;:true,&quot;type&quot;:&quot;text&quot;}"/>
           <p:cNvSpPr txBox="1"/>
           <p:nvPr/>
         </p:nvSpPr>
@@ -14814,7 +16225,7 @@
       </p:sp>
       <p:sp>
         <p:nvSpPr>
-          <p:cNvPr id="327" name=""/>
+          <p:cNvPr id="361" name=""/>
           <p:cNvSpPr/>
           <p:nvPr/>
         </p:nvSpPr>
@@ -14842,7 +16253,7 @@
       </p:sp>
       <p:sp>
         <p:nvSpPr>
-          <p:cNvPr id="328" name="" descr="{&quot;isTemplate&quot;:true,&quot;type&quot;:&quot;text&quot;}"/>
+          <p:cNvPr id="362" name="" descr="{&quot;isTemplate&quot;:true,&quot;type&quot;:&quot;text&quot;}"/>
           <p:cNvSpPr txBox="1"/>
           <p:nvPr/>
         </p:nvSpPr>
@@ -14877,7 +16288,7 @@
       </p:sp>
       <p:sp>
         <p:nvSpPr>
-          <p:cNvPr id="329" name="" descr="{&quot;isTemplate&quot;:true,&quot;type&quot;:&quot;text&quot;}"/>
+          <p:cNvPr id="363" name="" descr="{&quot;isTemplate&quot;:true,&quot;type&quot;:&quot;text&quot;}"/>
           <p:cNvSpPr txBox="1"/>
           <p:nvPr/>
         </p:nvSpPr>
@@ -14912,7 +16323,7 @@
       </p:sp>
       <p:sp>
         <p:nvSpPr>
-          <p:cNvPr id="330" name="" descr="{&quot;isTemplate&quot;:true,&quot;type&quot;:&quot;text&quot;}"/>
+          <p:cNvPr id="364" name="" descr="{&quot;isTemplate&quot;:true,&quot;type&quot;:&quot;text&quot;}"/>
           <p:cNvSpPr txBox="1"/>
           <p:nvPr/>
         </p:nvSpPr>
@@ -14947,7 +16358,7 @@
       </p:sp>
       <p:sp>
         <p:nvSpPr>
-          <p:cNvPr id="331" name="" descr="{&quot;isTemplate&quot;:true,&quot;type&quot;:&quot;text&quot;}"/>
+          <p:cNvPr id="365" name="" descr="{&quot;isTemplate&quot;:true,&quot;type&quot;:&quot;text&quot;}"/>
           <p:cNvSpPr txBox="1"/>
           <p:nvPr/>
         </p:nvSpPr>
@@ -14982,7 +16393,7 @@
       </p:sp>
       <p:sp>
         <p:nvSpPr>
-          <p:cNvPr id="332" name="" descr="{&quot;isTemplate&quot;:true,&quot;type&quot;:&quot;text&quot;}"/>
+          <p:cNvPr id="366" name="" descr="{&quot;isTemplate&quot;:true,&quot;type&quot;:&quot;text&quot;}"/>
           <p:cNvSpPr txBox="1"/>
           <p:nvPr/>
         </p:nvSpPr>
@@ -15017,7 +16428,7 @@
       </p:sp>
       <p:sp>
         <p:nvSpPr>
-          <p:cNvPr id="333" name=""/>
+          <p:cNvPr id="367" name=""/>
           <p:cNvSpPr/>
           <p:nvPr/>
         </p:nvSpPr>
@@ -15041,7 +16452,7 @@
       </p:sp>
       <p:sp>
         <p:nvSpPr>
-          <p:cNvPr id="334" name="" descr="{&quot;isTemplate&quot;:true,&quot;type&quot;:&quot;text&quot;}"/>
+          <p:cNvPr id="368" name="" descr="{&quot;isTemplate&quot;:true,&quot;type&quot;:&quot;text&quot;}"/>
           <p:cNvSpPr txBox="1"/>
           <p:nvPr/>
         </p:nvSpPr>
@@ -15096,7 +16507,7 @@
       </p:sp>
       <p:sp>
         <p:nvSpPr>
-          <p:cNvPr id="335" name="" descr="{&quot;isTemplate&quot;:true,&quot;type&quot;:&quot;text&quot;}"/>
+          <p:cNvPr id="369" name="" descr="{&quot;isTemplate&quot;:true,&quot;type&quot;:&quot;text&quot;}"/>
           <p:cNvSpPr txBox="1"/>
           <p:nvPr/>
         </p:nvSpPr>
@@ -15141,7 +16552,7 @@
       </p:sp>
       <p:graphicFrame>
         <p:nvGraphicFramePr>
-          <p:cNvPr id="336" name="336"/>
+          <p:cNvPr id="370" name="370"/>
           <p:cNvGraphicFramePr/>
           <p:nvPr/>
         </p:nvGraphicFramePr>
@@ -15157,7 +16568,7 @@
       </p:graphicFrame>
       <p:sp>
         <p:nvSpPr>
-          <p:cNvPr id="337" name="" descr="{&quot;isTemplate&quot;:true,&quot;type&quot;:&quot;text&quot;}"/>
+          <p:cNvPr id="371" name="" descr="{&quot;isTemplate&quot;:true,&quot;type&quot;:&quot;text&quot;}"/>
           <p:cNvSpPr txBox="1"/>
           <p:nvPr/>
         </p:nvSpPr>
@@ -15242,7 +16653,7 @@
       </p:sp>
       <p:sp>
         <p:nvSpPr>
-          <p:cNvPr id="338" name=""/>
+          <p:cNvPr id="372" name=""/>
           <p:cNvSpPr/>
           <p:nvPr/>
         </p:nvSpPr>
@@ -15266,7 +16677,7 @@
       </p:sp>
       <p:sp>
         <p:nvSpPr>
-          <p:cNvPr id="339" name="" descr="{&quot;isTemplate&quot;:true,&quot;type&quot;:&quot;text&quot;}"/>
+          <p:cNvPr id="373" name="" descr="{&quot;isTemplate&quot;:true,&quot;type&quot;:&quot;text&quot;}"/>
           <p:cNvSpPr txBox="1"/>
           <p:nvPr/>
         </p:nvSpPr>
@@ -15301,7 +16712,7 @@
       </p:sp>
       <p:sp>
         <p:nvSpPr>
-          <p:cNvPr id="340" name=""/>
+          <p:cNvPr id="374" name=""/>
           <p:cNvSpPr/>
           <p:nvPr/>
         </p:nvSpPr>
@@ -15327,7 +16738,7 @@
       </p:sp>
       <p:sp>
         <p:nvSpPr>
-          <p:cNvPr id="341" name=""/>
+          <p:cNvPr id="375" name=""/>
           <p:cNvSpPr/>
           <p:nvPr/>
         </p:nvSpPr>
@@ -15353,7 +16764,7 @@
       </p:sp>
       <p:sp>
         <p:nvSpPr>
-          <p:cNvPr id="342" name=""/>
+          <p:cNvPr id="376" name=""/>
           <p:cNvSpPr/>
           <p:nvPr/>
         </p:nvSpPr>
@@ -15379,7 +16790,7 @@
       </p:sp>
       <p:sp>
         <p:nvSpPr>
-          <p:cNvPr id="343" name=""/>
+          <p:cNvPr id="377" name=""/>
           <p:cNvSpPr/>
           <p:nvPr/>
         </p:nvSpPr>
@@ -15405,7 +16816,7 @@
       </p:sp>
       <p:sp>
         <p:nvSpPr>
-          <p:cNvPr id="344" name=""/>
+          <p:cNvPr id="378" name=""/>
           <p:cNvSpPr/>
           <p:nvPr/>
         </p:nvSpPr>
@@ -15431,7 +16842,7 @@
       </p:sp>
       <p:sp>
         <p:nvSpPr>
-          <p:cNvPr id="345" name=""/>
+          <p:cNvPr id="379" name=""/>
           <p:cNvSpPr/>
           <p:nvPr/>
         </p:nvSpPr>
@@ -15457,7 +16868,7 @@
       </p:sp>
       <p:sp>
         <p:nvSpPr>
-          <p:cNvPr id="346" name=""/>
+          <p:cNvPr id="380" name=""/>
           <p:cNvSpPr/>
           <p:nvPr/>
         </p:nvSpPr>
@@ -15483,7 +16894,7 @@
       </p:sp>
       <p:sp>
         <p:nvSpPr>
-          <p:cNvPr id="347" name=""/>
+          <p:cNvPr id="381" name=""/>
           <p:cNvSpPr/>
           <p:nvPr/>
         </p:nvSpPr>
@@ -15517,7 +16928,7 @@
   <p:cSld>
     <p:spTree>
       <p:nvGrpSpPr>
-        <p:cNvPr id="348" name="" descr="&lt;Slide style={{ width: 1280, height: 720, background: '#0A1D37', display: 'flex', flexDirection: 'column', padding: '42px 64px 16px 64px' }}&gt;&#10;    &lt;Text style={{ fontSize: 14, color: '#22D3EE', letterSpacing: 3 }}&gt;路线图 · 未来 100 天&lt;/Text&gt;&#10;    &lt;Text style={{ fontSize: 33, fontWeight: 'bold', color: '#F8FAFC', marginTop: 8 }}&gt;先补强工具，再以科研项目验证价值&lt;/Text&gt;&#10;&#10;    &lt;Box style={{ flexDirection: 'row', gap: 28, flex: 1, marginTop: 22, alignItems: 'flex-start' }}&gt;&#10;        &lt;Box style={{ width: 400, display: 'flex', flexDirection: 'column' }}&gt;&#10;            &lt;Box style={{ flexDirection: 'row', alignItems: 'center', gap: 12 }}&gt;&#10;                &lt;Box style={{ borderLeft: '4px solid #22D3EE', paddingLeft: 10 }}&gt;&#10;                    &lt;Text style={{ fontSize: 15, fontWeight: 'bold', color: '#F8FAFC' }}&gt;技术 · 补强工具&lt;/Text&gt;&#10;                &lt;/Box&gt;&#10;                &lt;Box style={{ padding: '2px 10px', border: '1px solid #123B63', borderRadius: 999 }}&gt;&#10;                    &lt;Text style={{ fontSize: 11.5, color: '#94A3B8' }}&gt;产出：可比较的候选方案集&lt;/Text&gt;&#10;                &lt;/Box&gt;&#10;            &lt;/Box&gt;&#10;            &lt;Box style={{ flexDirection: 'column', gap: 12, marginTop: 14 }}&gt;&#10;                &lt;Box style={{ background: '#123B63', borderRadius: 8, padding: '12px 16px', flexDirection: 'row', alignItems: 'center', gap: 14 }}&gt;&#10;                    &lt;Text style={{ fontSize: 20, fontWeight: 'bold', color: '#22D3EE', fontFamily: 'Space Grotesk, Inter, sans-serif' }}&gt;1&lt;/Text&gt;&#10;                    &lt;Box style={{ flex: 1 }}&gt;&#10;                        &lt;Text style={{ fontSize: 14, color: '#F8FAFC' }}&gt;补足当前有限的 EDM 方法&lt;/Text&gt;&#10;                        &lt;Text style={{ fontSize: 11.5, color: '#94A3B8', marginTop: 3 }}&gt;漂移检测更敏感，减少漏判&lt;/Text&gt;&#10;                    &lt;/Box&gt;&#10;                    &lt;Text style={{ fontSize: 11.5, color: '#22D3EE' }}&gt;0–30 天&lt;/Text&gt;&#10;                &lt;/Box&gt;&#10;                &lt;Box style={{ background: '#123B63', borderRadius: 8, padding: '12px 16px', flexDirection: 'row', alignItems: 'center', gap: 14 }}&gt;&#10;                    &lt;Text style={{ fontSize: 20, fontWeight: 'bold', color: '#22D3EE', fontFamily: 'Space Grotesk, Inter, sans-serif' }}&gt;2&lt;/Text&gt;&#10;                    &lt;Box style={{ flex: 1 }}&gt;&#10;                        &lt;Text style={{ fontSize: 14, color: '#F8FAFC' }}&gt;自然语言调用更多数据分析与训练工具&lt;/Text&gt;&#10;                        &lt;Text style={{ fontSize: 11.5, color: '#94A3B8', marginTop: 3 }}&gt;工具覆盖训练全流程&lt;/Text&gt;&#10;                    &lt;/Box&gt;&#10;                    &lt;Text style={{ fontSize: 11.5, color: '#22D3EE' }}&gt;30–60 天&lt;/Text&gt;&#10;                &lt;/Box&gt;&#10;                &lt;Box style={{ background: '#123B63', borderRadius: 8, padding: '12px 16px', flexDirection: 'row', alignItems: 'center', gap: 14 }}&gt;&#10;                    &lt;Text style={{ fontSize: 20, fontWeight: 'bold', color: '#22D3EE', fontFamily: 'Space Grotesk, Inter, sans-serif' }}&gt;3&lt;/Text&gt;&#10;                    &lt;Box style={{ flex: 1 }}&gt;&#10;                        &lt;Text style={{ fontSize: 14, color: '#F8FAFC' }}&gt;统一时序验证口径下比较候选方案&lt;/Text&gt;&#10;                        &lt;Text style={{ fontSize: 11.5, color: '#94A3B8', marginTop: 3 }}&gt;模型能力可横向对比&lt;/Text&gt;&#10;                    &lt;/Box&gt;&#10;                    &lt;Text style={{ fontSize: 11.5, color: '#22D3EE' }}&gt;60–100 天&lt;/Text&gt;&#10;                &lt;/Box&gt;&#10;            &lt;/Box&gt;&#10;            &lt;Text style={{ fontSize: 12.5, color: '#94A3B8', marginTop: 12, lineHeight: 1.7 }}&gt;模型能力从单一模型，扩展为可比较的候选方案集。&lt;/Text&gt;&#10;        &lt;/Box&gt;&#10;&#10;        &lt;Box style={{ flex: 1, display: 'flex', flexDirection: 'column' }}&gt;&#10;            &lt;Box style={{ flexDirection: 'row', alignItems: 'center', gap: 12 }}&gt;&#10;                &lt;Box style={{ borderLeft: '4px solid #94A3B8', paddingLeft: 10 }}&gt;&#10;                    &lt;Text style={{ fontSize: 15, fontWeight: 'bold', color: '#F8FAFC' }}&gt;商业 · 科研验证&lt;/Text&gt;&#10;                &lt;/Box&gt;&#10;                &lt;Box style={{ padding: '2px 10px', border: '1px solid #123B63', borderRadius: 999 }}&gt;&#10;                    &lt;Text style={{ fontSize: 11.5, color: '#94A3B8' }}&gt;量化收益后再灰度&lt;/Text&gt;&#10;                &lt;/Box&gt;&#10;            &lt;/Box&gt;&#10;            &lt;Box style={{ flexDirection: 'row', alignItems: 'center', marginTop: 14, justifyContent: 'space-between' }}&gt;&#10;                &lt;Box style={{ width: 168, height: 96, background: '#123B63', borderRadius: 8, padding: 12, justifyContent: 'center', alignItems: 'center' }}&gt;&#10;                    &lt;Text style={{ fontSize: 14.5, fontWeight: 'bold', color: '#F8FAFC', textAlign: 'center' }}&gt;① 科研合作&lt;/Text&gt;&#10;                    &lt;Text style={{ fontSize: 11.5, color: '#94A3B8', marginTop: 6, textAlign: 'center' }}&gt;电科院 · 数字电网研究院&lt;/Text&gt;&#10;                &lt;/Box&gt;&#10;                &lt;Text style={{ fontSize: 20, color: '#94A3B8' }}&gt;→&lt;/Text&gt;&#10;                &lt;Box style={{ width: 168, height: 96, background: '#123B63', borderRadius: 8, padding: 12, justifyContent: 'center', alignItems: 'center' }}&gt;&#10;                    &lt;Text style={{ fontSize: 14.5, fontWeight: 'bold', color: '#F8FAFC', textAlign: 'center' }}&gt;② 影子模式验证&lt;/Text&gt;&#10;                    &lt;Text style={{ fontSize: 11.5, color: '#94A3B8', marginTop: 6, textAlign: 'center' }}&gt;接入真实数据&lt;/Text&gt;&#10;                &lt;/Box&gt;&#10;                &lt;Text style={{ fontSize: 20, color: '#94A3B8' }}&gt;→&lt;/Text&gt;&#10;                &lt;Box style={{ width: 168, height: 96, background: '#123B63', borderRadius: 8, padding: 12, justifyContent: 'center', alignItems: 'center' }}&gt;&#10;                    &lt;Text style={{ fontSize: 14.5, fontWeight: 'bold', color: '#F8FAFC', textAlign: 'center' }}&gt;③ 局部试点&lt;/Text&gt;&#10;                    &lt;Text style={{ fontSize: 11.5, color: '#94A3B8', marginTop: 6, textAlign: 'center' }}&gt;量化收益&lt;/Text&gt;&#10;                &lt;/Box&gt;&#10;                &lt;Text style={{ fontSize: 20, color: '#94A3B8' }}&gt;→&lt;/Text&gt;&#10;                &lt;Box style={{ width: 168, height: 96, background: 'rgba(34,211,238,0.14)', border: '1.5px solid #22D3EE', borderRadius: 8, padding: 12, justifyContent: 'center', alignItems: 'center' }}&gt;&#10;                    &lt;Text style={{ fontSize: 14.5, fontWeight: 'bold', color: '#22D3EE', textAlign: 'center' }}&gt;④ 灰度发布&lt;/Text&gt;&#10;                    &lt;Text style={{ fontSize: 11.5, color: '#94A3B8', marginTop: 6, textAlign: 'center' }}&gt;量化后再放量&lt;/Text&gt;&#10;                &lt;/Box&gt;&#10;            &lt;/Box&gt;&#10;            &lt;Text style={{ fontSize: 12.5, color: '#94A3B8', marginTop: 12, lineHeight: 1.7 }}&gt;方法仍较新，不直接进入生产环境——以科技项目形式先行，量化收益后再灰度发布。&lt;/Text&gt;&#10;            &lt;Box style={{ marginTop: 12, border: '1px solid #123B63', borderRadius: 8, padding: '10px 14px' }}&gt;&#10;                &lt;Text style={{ fontSize: 12.5, color: '#CBD5E1', lineHeight: 1.7 }}&gt;100 天目标：工具补强完成 · 签署科研合作 · 影子模式接入真实数据&lt;/Text&gt;&#10;            &lt;/Box&gt;&#10;        &lt;/Box&gt;&#10;    &lt;/Box&gt;&#10;&#10;    &lt;Box style={{ flexDirection: 'row', alignItems: 'center', gap: 18, marginTop: 'auto', marginBottom: 22 }}&gt;&#10;        &lt;Box style={{ width: 6, height: 56, background: '#22D3EE' }} /&gt;&#10;        &lt;Box&gt;&#10;            &lt;Text style={{ fontSize: 25, fontWeight: 'bold', color: '#F8FAFC', lineHeight: 1.5 }}&gt;让负荷预测，从一次性项目，&lt;/Text&gt;&#10;            &lt;Text style={{ fontSize: 25, fontWeight: 'bold', color: '#F8FAFC', lineHeight: 1.5 }}&gt;变成持续自我适应的基础能力。&lt;/Text&gt;&#10;        &lt;/Box&gt;&#10;    &lt;/Box&gt;&#10;&#10;    &lt;Box style={{ flexDirection: 'row', marginTop: 10, alignItems: 'center' }}&gt;&#10;        &lt;Text style={{ fontSize: 12, color: '#64748B' }}&gt;负荷预测持续学习引擎 · 路线图&lt;/Text&gt;&#10;        &lt;Box style={{ marginLeft: 'auto', flexDirection: 'row', alignItems: 'center', gap: 8 }}&gt;&#10;            &lt;Box style={{ width: 10, height: 10, background: '#22D3EE' }} /&gt;&#10;            &lt;Text style={{ fontSize: 13, color: '#94A3B8' }}&gt;CLE · 07 / 07&lt;/Text&gt;&#10;        &lt;/Box&gt;&#10;    &lt;/Box&gt;&#10;&lt;/Slide&gt;"/>
+        <p:cNvPr id="382" name="" descr="&lt;Slide style={{ width: 1280, height: 720, background: '#0A1D37', display: 'flex', flexDirection: 'column', padding: '42px 64px 16px 64px' }}&gt;&#10;    &lt;Text style={{ fontSize: 14, color: '#22D3EE', letterSpacing: 3 }}&gt;路线图 · 未来 100 天&lt;/Text&gt;&#10;    &lt;Text style={{ fontSize: 33, fontWeight: 'bold', color: '#F8FAFC', marginTop: 8 }}&gt;先补强工具，再以科研项目验证价值&lt;/Text&gt;&#10;&#10;    &lt;Box style={{ flexDirection: 'row', gap: 28, flex: 1, marginTop: 22, alignItems: 'flex-start' }}&gt;&#10;        &lt;Box style={{ width: 400, display: 'flex', flexDirection: 'column' }}&gt;&#10;            &lt;Box style={{ flexDirection: 'row', alignItems: 'center', gap: 12 }}&gt;&#10;                &lt;Box style={{ borderLeft: '4px solid #22D3EE', paddingLeft: 10 }}&gt;&#10;                    &lt;Text style={{ fontSize: 15, fontWeight: 'bold', color: '#F8FAFC' }}&gt;技术 · 补强工具&lt;/Text&gt;&#10;                &lt;/Box&gt;&#10;                &lt;Box style={{ padding: '2px 10px', border: '1px solid #123B63', borderRadius: 999 }}&gt;&#10;                    &lt;Text style={{ fontSize: 11.5, color: '#94A3B8' }}&gt;产出：可比较的候选方案集&lt;/Text&gt;&#10;                &lt;/Box&gt;&#10;            &lt;/Box&gt;&#10;            &lt;Box style={{ flexDirection: 'column', gap: 12, marginTop: 14 }}&gt;&#10;                &lt;Box style={{ background: '#123B63', borderRadius: 8, padding: '12px 16px', flexDirection: 'row', alignItems: 'center', gap: 14 }}&gt;&#10;                    &lt;Text style={{ fontSize: 20, fontWeight: 'bold', color: '#22D3EE', fontFamily: 'Space Grotesk, Inter, sans-serif' }}&gt;1&lt;/Text&gt;&#10;                    &lt;Box style={{ flex: 1 }}&gt;&#10;                        &lt;Text style={{ fontSize: 14, color: '#F8FAFC' }}&gt;补足当前有限的 EDM 方法&lt;/Text&gt;&#10;                        &lt;Text style={{ fontSize: 11.5, color: '#94A3B8', marginTop: 3 }}&gt;漂移检测更敏感，减少漏判&lt;/Text&gt;&#10;                    &lt;/Box&gt;&#10;                    &lt;Text style={{ fontSize: 11.5, color: '#22D3EE' }}&gt;0–30 天&lt;/Text&gt;&#10;                &lt;/Box&gt;&#10;                &lt;Box style={{ background: '#123B63', borderRadius: 8, padding: '12px 16px', flexDirection: 'row', alignItems: 'center', gap: 14 }}&gt;&#10;                    &lt;Text style={{ fontSize: 20, fontWeight: 'bold', color: '#22D3EE', fontFamily: 'Space Grotesk, Inter, sans-serif' }}&gt;2&lt;/Text&gt;&#10;                    &lt;Box style={{ flex: 1 }}&gt;&#10;                        &lt;Text style={{ fontSize: 14, color: '#F8FAFC' }}&gt;自然语言调用更多数据分析与训练工具&lt;/Text&gt;&#10;                        &lt;Text style={{ fontSize: 11.5, color: '#94A3B8', marginTop: 3 }}&gt;工具覆盖训练全流程&lt;/Text&gt;&#10;                    &lt;/Box&gt;&#10;                    &lt;Text style={{ fontSize: 11.5, color: '#22D3EE' }}&gt;30–60 天&lt;/Text&gt;&#10;                &lt;/Box&gt;&#10;                &lt;Box style={{ background: '#123B63', borderRadius: 8, padding: '12px 16px', flexDirection: 'row', alignItems: 'center', gap: 14 }}&gt;&#10;                    &lt;Text style={{ fontSize: 20, fontWeight: 'bold', color: '#22D3EE', fontFamily: 'Space Grotesk, Inter, sans-serif' }}&gt;3&lt;/Text&gt;&#10;                    &lt;Box style={{ flex: 1 }}&gt;&#10;                        &lt;Text style={{ fontSize: 14, color: '#F8FAFC' }}&gt;统一时序验证口径下比较候选方案&lt;/Text&gt;&#10;                        &lt;Text style={{ fontSize: 11.5, color: '#94A3B8', marginTop: 3 }}&gt;模型能力可横向对比&lt;/Text&gt;&#10;                    &lt;/Box&gt;&#10;                    &lt;Text style={{ fontSize: 11.5, color: '#22D3EE' }}&gt;60–100 天&lt;/Text&gt;&#10;                &lt;/Box&gt;&#10;            &lt;/Box&gt;&#10;            &lt;Text style={{ fontSize: 12.5, color: '#94A3B8', marginTop: 12, lineHeight: 1.7 }}&gt;模型能力从单一模型，扩展为可比较的候选方案集。&lt;/Text&gt;&#10;        &lt;/Box&gt;&#10;&#10;        &lt;Box style={{ flex: 1, display: 'flex', flexDirection: 'column' }}&gt;&#10;            &lt;Box style={{ flexDirection: 'row', alignItems: 'center', gap: 12 }}&gt;&#10;                &lt;Box style={{ borderLeft: '4px solid #94A3B8', paddingLeft: 10 }}&gt;&#10;                    &lt;Text style={{ fontSize: 15, fontWeight: 'bold', color: '#F8FAFC' }}&gt;商业 · 科研验证&lt;/Text&gt;&#10;                &lt;/Box&gt;&#10;                &lt;Box style={{ padding: '2px 10px', border: '1px solid #123B63', borderRadius: 999 }}&gt;&#10;                    &lt;Text style={{ fontSize: 11.5, color: '#94A3B8' }}&gt;量化收益后再灰度&lt;/Text&gt;&#10;                &lt;/Box&gt;&#10;            &lt;/Box&gt;&#10;            &lt;Box style={{ flexDirection: 'row', alignItems: 'center', marginTop: 14, justifyContent: 'space-between' }}&gt;&#10;                &lt;Box style={{ width: 168, height: 96, background: '#123B63', borderRadius: 8, padding: 12, justifyContent: 'center', alignItems: 'center' }}&gt;&#10;                    &lt;Text style={{ fontSize: 14.5, fontWeight: 'bold', color: '#F8FAFC', textAlign: 'center' }}&gt;① 科研合作&lt;/Text&gt;&#10;                    &lt;Text style={{ fontSize: 11.5, color: '#94A3B8', marginTop: 6, textAlign: 'center' }}&gt;电科院 · 数字电网研究院&lt;/Text&gt;&#10;                &lt;/Box&gt;&#10;                &lt;Text style={{ fontSize: 20, color: '#94A3B8' }}&gt;→&lt;/Text&gt;&#10;                &lt;Box style={{ width: 168, height: 96, background: '#123B63', borderRadius: 8, padding: 12, justifyContent: 'center', alignItems: 'center' }}&gt;&#10;                    &lt;Text style={{ fontSize: 14.5, fontWeight: 'bold', color: '#F8FAFC', textAlign: 'center' }}&gt;② 影子模式验证&lt;/Text&gt;&#10;                    &lt;Text style={{ fontSize: 11.5, color: '#94A3B8', marginTop: 6, textAlign: 'center' }}&gt;接入真实数据&lt;/Text&gt;&#10;                &lt;/Box&gt;&#10;                &lt;Text style={{ fontSize: 20, color: '#94A3B8' }}&gt;→&lt;/Text&gt;&#10;                &lt;Box style={{ width: 168, height: 96, background: '#123B63', borderRadius: 8, padding: 12, justifyContent: 'center', alignItems: 'center' }}&gt;&#10;                    &lt;Text style={{ fontSize: 14.5, fontWeight: 'bold', color: '#F8FAFC', textAlign: 'center' }}&gt;③ 局部试点&lt;/Text&gt;&#10;                    &lt;Text style={{ fontSize: 11.5, color: '#94A3B8', marginTop: 6, textAlign: 'center' }}&gt;量化收益&lt;/Text&gt;&#10;                &lt;/Box&gt;&#10;                &lt;Text style={{ fontSize: 20, color: '#94A3B8' }}&gt;→&lt;/Text&gt;&#10;                &lt;Box style={{ width: 168, height: 96, background: 'rgba(34,211,238,0.14)', border: '1.5px solid #22D3EE', borderRadius: 8, padding: 12, justifyContent: 'center', alignItems: 'center' }}&gt;&#10;                    &lt;Text style={{ fontSize: 14.5, fontWeight: 'bold', color: '#22D3EE', textAlign: 'center' }}&gt;④ 灰度发布&lt;/Text&gt;&#10;                    &lt;Text style={{ fontSize: 11.5, color: '#94A3B8', marginTop: 6, textAlign: 'center' }}&gt;量化后再放量&lt;/Text&gt;&#10;                &lt;/Box&gt;&#10;            &lt;/Box&gt;&#10;            &lt;Text style={{ fontSize: 12.5, color: '#94A3B8', marginTop: 12, lineHeight: 1.7 }}&gt;方法仍较新，不直接进入生产环境——以科技项目形式先行，量化收益后再灰度发布。&lt;/Text&gt;&#10;            &lt;Box style={{ marginTop: 12, border: '1px solid #123B63', borderRadius: 8, padding: '10px 14px' }}&gt;&#10;                &lt;Text style={{ fontSize: 12.5, color: '#CBD5E1', lineHeight: 1.7 }}&gt;100 天目标：工具补强完成 · 签署科研合作 · 影子模式接入真实数据&lt;/Text&gt;&#10;            &lt;/Box&gt;&#10;        &lt;/Box&gt;&#10;    &lt;/Box&gt;&#10;&#10;    &lt;Box style={{ flexDirection: 'row', alignItems: 'center', gap: 18, marginTop: 'auto', marginBottom: 22 }}&gt;&#10;        &lt;Box style={{ width: 6, height: 56, background: '#22D3EE' }} /&gt;&#10;        &lt;Box&gt;&#10;            &lt;Text style={{ fontSize: 25, fontWeight: 'bold', color: '#F8FAFC', lineHeight: 1.5 }}&gt;让负荷预测，从一次性项目，&lt;/Text&gt;&#10;            &lt;Text style={{ fontSize: 25, fontWeight: 'bold', color: '#F8FAFC', lineHeight: 1.5 }}&gt;变成持续自我适应的基础能力。&lt;/Text&gt;&#10;        &lt;/Box&gt;&#10;    &lt;/Box&gt;&#10;&#10;    &lt;Box style={{ flexDirection: 'row', marginTop: 10, alignItems: 'center' }}&gt;&#10;        &lt;Text style={{ fontSize: 12, color: '#64748B' }}&gt;负荷预测持续学习引擎 · 路线图&lt;/Text&gt;&#10;        &lt;Box style={{ marginLeft: 'auto', flexDirection: 'row', alignItems: 'center', gap: 8 }}&gt;&#10;            &lt;Box style={{ width: 10, height: 10, background: '#22D3EE' }} /&gt;&#10;            &lt;Text style={{ fontSize: 13, color: '#94A3B8' }}&gt;CLE · 07 / 07&lt;/Text&gt;&#10;        &lt;/Box&gt;&#10;    &lt;/Box&gt;&#10;&lt;/Slide&gt;"/>
         <p:cNvGrpSpPr/>
         <p:nvPr/>
       </p:nvGrpSpPr>
@@ -15531,7 +16942,7 @@
       </p:grpSpPr>
       <p:sp>
         <p:nvSpPr>
-          <p:cNvPr id="349" name=""/>
+          <p:cNvPr id="383" name=""/>
           <p:cNvSpPr/>
           <p:nvPr/>
         </p:nvSpPr>
@@ -15555,7 +16966,7 @@
       </p:sp>
       <p:sp>
         <p:nvSpPr>
-          <p:cNvPr id="350" name="" descr="{&quot;isTemplate&quot;:true,&quot;type&quot;:&quot;text&quot;}"/>
+          <p:cNvPr id="384" name="" descr="{&quot;isTemplate&quot;:true,&quot;type&quot;:&quot;text&quot;}"/>
           <p:cNvSpPr txBox="1"/>
           <p:nvPr/>
         </p:nvSpPr>
@@ -15630,7 +17041,7 @@
       </p:sp>
       <p:sp>
         <p:nvSpPr>
-          <p:cNvPr id="351" name="" descr="{&quot;isTemplate&quot;:true,&quot;type&quot;:&quot;text&quot;}"/>
+          <p:cNvPr id="385" name="" descr="{&quot;isTemplate&quot;:true,&quot;type&quot;:&quot;text&quot;}"/>
           <p:cNvSpPr txBox="1"/>
           <p:nvPr/>
         </p:nvSpPr>
@@ -15665,7 +17076,7 @@
       </p:sp>
       <p:sp>
         <p:nvSpPr>
-          <p:cNvPr id="352" name=""/>
+          <p:cNvPr id="386" name=""/>
           <p:cNvSpPr/>
           <p:nvPr/>
         </p:nvSpPr>
@@ -15705,7 +17116,7 @@
       </p:sp>
       <p:sp>
         <p:nvSpPr>
-          <p:cNvPr id="353" name="" descr="{&quot;isTemplate&quot;:true,&quot;type&quot;:&quot;text&quot;}"/>
+          <p:cNvPr id="387" name="" descr="{&quot;isTemplate&quot;:true,&quot;type&quot;:&quot;text&quot;}"/>
           <p:cNvSpPr txBox="1"/>
           <p:nvPr/>
         </p:nvSpPr>
@@ -15760,7 +17171,7 @@
       </p:sp>
       <p:sp>
         <p:nvSpPr>
-          <p:cNvPr id="354" name=""/>
+          <p:cNvPr id="388" name=""/>
           <p:cNvSpPr/>
           <p:nvPr/>
         </p:nvSpPr>
@@ -15788,7 +17199,7 @@
       </p:sp>
       <p:sp>
         <p:nvSpPr>
-          <p:cNvPr id="355" name="" descr="{&quot;isTemplate&quot;:true,&quot;type&quot;:&quot;text&quot;}"/>
+          <p:cNvPr id="389" name="" descr="{&quot;isTemplate&quot;:true,&quot;type&quot;:&quot;text&quot;}"/>
           <p:cNvSpPr txBox="1"/>
           <p:nvPr/>
         </p:nvSpPr>
@@ -15823,7 +17234,7 @@
       </p:sp>
       <p:sp>
         <p:nvSpPr>
-          <p:cNvPr id="356" name=""/>
+          <p:cNvPr id="390" name=""/>
           <p:cNvSpPr/>
           <p:nvPr/>
         </p:nvSpPr>
@@ -15849,7 +17260,7 @@
       </p:sp>
       <p:sp>
         <p:nvSpPr>
-          <p:cNvPr id="357" name="" descr="{&quot;isTemplate&quot;:true,&quot;type&quot;:&quot;text&quot;}"/>
+          <p:cNvPr id="391" name="" descr="{&quot;isTemplate&quot;:true,&quot;type&quot;:&quot;text&quot;}"/>
           <p:cNvSpPr txBox="1"/>
           <p:nvPr/>
         </p:nvSpPr>
@@ -15884,7 +17295,7 @@
       </p:sp>
       <p:sp>
         <p:nvSpPr>
-          <p:cNvPr id="358" name="" descr="{&quot;isTemplate&quot;:true,&quot;type&quot;:&quot;text&quot;}"/>
+          <p:cNvPr id="392" name="" descr="{&quot;isTemplate&quot;:true,&quot;type&quot;:&quot;text&quot;}"/>
           <p:cNvSpPr txBox="1"/>
           <p:nvPr/>
         </p:nvSpPr>
@@ -15939,7 +17350,7 @@
       </p:sp>
       <p:sp>
         <p:nvSpPr>
-          <p:cNvPr id="359" name="" descr="{&quot;isTemplate&quot;:true,&quot;type&quot;:&quot;text&quot;}"/>
+          <p:cNvPr id="393" name="" descr="{&quot;isTemplate&quot;:true,&quot;type&quot;:&quot;text&quot;}"/>
           <p:cNvSpPr txBox="1"/>
           <p:nvPr/>
         </p:nvSpPr>
@@ -15974,7 +17385,7 @@
       </p:sp>
       <p:sp>
         <p:nvSpPr>
-          <p:cNvPr id="360" name="" descr="{&quot;isTemplate&quot;:true,&quot;type&quot;:&quot;text&quot;}"/>
+          <p:cNvPr id="394" name="" descr="{&quot;isTemplate&quot;:true,&quot;type&quot;:&quot;text&quot;}"/>
           <p:cNvSpPr txBox="1"/>
           <p:nvPr/>
         </p:nvSpPr>
@@ -16019,7 +17430,7 @@
       </p:sp>
       <p:sp>
         <p:nvSpPr>
-          <p:cNvPr id="361" name=""/>
+          <p:cNvPr id="395" name=""/>
           <p:cNvSpPr/>
           <p:nvPr/>
         </p:nvSpPr>
@@ -16045,7 +17456,7 @@
       </p:sp>
       <p:sp>
         <p:nvSpPr>
-          <p:cNvPr id="362" name="" descr="{&quot;isTemplate&quot;:true,&quot;type&quot;:&quot;text&quot;}"/>
+          <p:cNvPr id="396" name="" descr="{&quot;isTemplate&quot;:true,&quot;type&quot;:&quot;text&quot;}"/>
           <p:cNvSpPr txBox="1"/>
           <p:nvPr/>
         </p:nvSpPr>
@@ -16080,7 +17491,7 @@
       </p:sp>
       <p:sp>
         <p:nvSpPr>
-          <p:cNvPr id="363" name="" descr="{&quot;isTemplate&quot;:true,&quot;type&quot;:&quot;text&quot;}"/>
+          <p:cNvPr id="397" name="" descr="{&quot;isTemplate&quot;:true,&quot;type&quot;:&quot;text&quot;}"/>
           <p:cNvSpPr txBox="1"/>
           <p:nvPr/>
         </p:nvSpPr>
@@ -16115,7 +17526,7 @@
       </p:sp>
       <p:sp>
         <p:nvSpPr>
-          <p:cNvPr id="364" name="" descr="{&quot;isTemplate&quot;:true,&quot;type&quot;:&quot;text&quot;}"/>
+          <p:cNvPr id="398" name="" descr="{&quot;isTemplate&quot;:true,&quot;type&quot;:&quot;text&quot;}"/>
           <p:cNvSpPr txBox="1"/>
           <p:nvPr/>
         </p:nvSpPr>
@@ -16150,7 +17561,7 @@
       </p:sp>
       <p:sp>
         <p:nvSpPr>
-          <p:cNvPr id="365" name="" descr="{&quot;isTemplate&quot;:true,&quot;type&quot;:&quot;text&quot;}"/>
+          <p:cNvPr id="399" name="" descr="{&quot;isTemplate&quot;:true,&quot;type&quot;:&quot;text&quot;}"/>
           <p:cNvSpPr txBox="1"/>
           <p:nvPr/>
         </p:nvSpPr>
@@ -16195,7 +17606,7 @@
       </p:sp>
       <p:sp>
         <p:nvSpPr>
-          <p:cNvPr id="366" name=""/>
+          <p:cNvPr id="400" name=""/>
           <p:cNvSpPr/>
           <p:nvPr/>
         </p:nvSpPr>
@@ -16221,7 +17632,7 @@
       </p:sp>
       <p:sp>
         <p:nvSpPr>
-          <p:cNvPr id="367" name="" descr="{&quot;isTemplate&quot;:true,&quot;type&quot;:&quot;text&quot;}"/>
+          <p:cNvPr id="401" name="" descr="{&quot;isTemplate&quot;:true,&quot;type&quot;:&quot;text&quot;}"/>
           <p:cNvSpPr txBox="1"/>
           <p:nvPr/>
         </p:nvSpPr>
@@ -16256,7 +17667,7 @@
       </p:sp>
       <p:sp>
         <p:nvSpPr>
-          <p:cNvPr id="368" name="" descr="{&quot;isTemplate&quot;:true,&quot;type&quot;:&quot;text&quot;}"/>
+          <p:cNvPr id="402" name="" descr="{&quot;isTemplate&quot;:true,&quot;type&quot;:&quot;text&quot;}"/>
           <p:cNvSpPr txBox="1"/>
           <p:nvPr/>
         </p:nvSpPr>
@@ -16291,7 +17702,7 @@
       </p:sp>
       <p:sp>
         <p:nvSpPr>
-          <p:cNvPr id="369" name="" descr="{&quot;isTemplate&quot;:true,&quot;type&quot;:&quot;text&quot;}"/>
+          <p:cNvPr id="403" name="" descr="{&quot;isTemplate&quot;:true,&quot;type&quot;:&quot;text&quot;}"/>
           <p:cNvSpPr txBox="1"/>
           <p:nvPr/>
         </p:nvSpPr>
@@ -16326,7 +17737,7 @@
       </p:sp>
       <p:sp>
         <p:nvSpPr>
-          <p:cNvPr id="370" name="" descr="{&quot;isTemplate&quot;:true,&quot;type&quot;:&quot;text&quot;}"/>
+          <p:cNvPr id="404" name="" descr="{&quot;isTemplate&quot;:true,&quot;type&quot;:&quot;text&quot;}"/>
           <p:cNvSpPr txBox="1"/>
           <p:nvPr/>
         </p:nvSpPr>
@@ -16371,7 +17782,7 @@
       </p:sp>
       <p:sp>
         <p:nvSpPr>
-          <p:cNvPr id="371" name="" descr="{&quot;isTemplate&quot;:true,&quot;type&quot;:&quot;text&quot;}"/>
+          <p:cNvPr id="405" name="" descr="{&quot;isTemplate&quot;:true,&quot;type&quot;:&quot;text&quot;}"/>
           <p:cNvSpPr txBox="1"/>
           <p:nvPr/>
         </p:nvSpPr>
@@ -16406,7 +17817,7 @@
       </p:sp>
       <p:sp>
         <p:nvSpPr>
-          <p:cNvPr id="372" name=""/>
+          <p:cNvPr id="406" name=""/>
           <p:cNvSpPr/>
           <p:nvPr/>
         </p:nvSpPr>
@@ -16446,7 +17857,7 @@
       </p:sp>
       <p:sp>
         <p:nvSpPr>
-          <p:cNvPr id="373" name="" descr="{&quot;isTemplate&quot;:true,&quot;type&quot;:&quot;text&quot;}"/>
+          <p:cNvPr id="407" name="" descr="{&quot;isTemplate&quot;:true,&quot;type&quot;:&quot;text&quot;}"/>
           <p:cNvSpPr txBox="1"/>
           <p:nvPr/>
         </p:nvSpPr>
@@ -16501,7 +17912,7 @@
       </p:sp>
       <p:sp>
         <p:nvSpPr>
-          <p:cNvPr id="374" name=""/>
+          <p:cNvPr id="408" name=""/>
           <p:cNvSpPr/>
           <p:nvPr/>
         </p:nvSpPr>
@@ -16529,7 +17940,7 @@
       </p:sp>
       <p:sp>
         <p:nvSpPr>
-          <p:cNvPr id="375" name="" descr="{&quot;isTemplate&quot;:true,&quot;type&quot;:&quot;text&quot;}"/>
+          <p:cNvPr id="409" name="" descr="{&quot;isTemplate&quot;:true,&quot;type&quot;:&quot;text&quot;}"/>
           <p:cNvSpPr txBox="1"/>
           <p:nvPr/>
         </p:nvSpPr>
@@ -16564,7 +17975,7 @@
       </p:sp>
       <p:sp>
         <p:nvSpPr>
-          <p:cNvPr id="376" name=""/>
+          <p:cNvPr id="410" name=""/>
           <p:cNvSpPr/>
           <p:nvPr/>
         </p:nvSpPr>
@@ -16590,7 +18001,7 @@
       </p:sp>
       <p:sp>
         <p:nvSpPr>
-          <p:cNvPr id="377" name="" descr="{&quot;isTemplate&quot;:true,&quot;type&quot;:&quot;text&quot;}"/>
+          <p:cNvPr id="411" name="" descr="{&quot;isTemplate&quot;:true,&quot;type&quot;:&quot;text&quot;}"/>
           <p:cNvSpPr txBox="1"/>
           <p:nvPr/>
         </p:nvSpPr>
@@ -16635,7 +18046,7 @@
       </p:sp>
       <p:sp>
         <p:nvSpPr>
-          <p:cNvPr id="378" name="" descr="{&quot;isTemplate&quot;:true,&quot;type&quot;:&quot;text&quot;}"/>
+          <p:cNvPr id="412" name="" descr="{&quot;isTemplate&quot;:true,&quot;type&quot;:&quot;text&quot;}"/>
           <p:cNvSpPr txBox="1"/>
           <p:nvPr/>
         </p:nvSpPr>
@@ -16690,7 +18101,7 @@
       </p:sp>
       <p:sp>
         <p:nvSpPr>
-          <p:cNvPr id="379" name="" descr="{&quot;isTemplate&quot;:true,&quot;type&quot;:&quot;text&quot;}"/>
+          <p:cNvPr id="413" name="" descr="{&quot;isTemplate&quot;:true,&quot;type&quot;:&quot;text&quot;}"/>
           <p:cNvSpPr txBox="1"/>
           <p:nvPr/>
         </p:nvSpPr>
@@ -16725,7 +18136,7 @@
       </p:sp>
       <p:sp>
         <p:nvSpPr>
-          <p:cNvPr id="380" name=""/>
+          <p:cNvPr id="414" name=""/>
           <p:cNvSpPr/>
           <p:nvPr/>
         </p:nvSpPr>
@@ -16751,7 +18162,7 @@
       </p:sp>
       <p:sp>
         <p:nvSpPr>
-          <p:cNvPr id="381" name="" descr="{&quot;isTemplate&quot;:true,&quot;type&quot;:&quot;text&quot;}"/>
+          <p:cNvPr id="415" name="" descr="{&quot;isTemplate&quot;:true,&quot;type&quot;:&quot;text&quot;}"/>
           <p:cNvSpPr txBox="1"/>
           <p:nvPr/>
         </p:nvSpPr>
@@ -16796,7 +18207,7 @@
       </p:sp>
       <p:sp>
         <p:nvSpPr>
-          <p:cNvPr id="382" name="" descr="{&quot;isTemplate&quot;:true,&quot;type&quot;:&quot;text&quot;}"/>
+          <p:cNvPr id="416" name="" descr="{&quot;isTemplate&quot;:true,&quot;type&quot;:&quot;text&quot;}"/>
           <p:cNvSpPr txBox="1"/>
           <p:nvPr/>
         </p:nvSpPr>
@@ -16831,7 +18242,7 @@
       </p:sp>
       <p:sp>
         <p:nvSpPr>
-          <p:cNvPr id="383" name="" descr="{&quot;isTemplate&quot;:true,&quot;type&quot;:&quot;text&quot;}"/>
+          <p:cNvPr id="417" name="" descr="{&quot;isTemplate&quot;:true,&quot;type&quot;:&quot;text&quot;}"/>
           <p:cNvSpPr txBox="1"/>
           <p:nvPr/>
         </p:nvSpPr>
@@ -16866,7 +18277,7 @@
       </p:sp>
       <p:sp>
         <p:nvSpPr>
-          <p:cNvPr id="384" name=""/>
+          <p:cNvPr id="418" name=""/>
           <p:cNvSpPr/>
           <p:nvPr/>
         </p:nvSpPr>
@@ -16892,7 +18303,7 @@
       </p:sp>
       <p:sp>
         <p:nvSpPr>
-          <p:cNvPr id="385" name="" descr="{&quot;isTemplate&quot;:true,&quot;type&quot;:&quot;text&quot;}"/>
+          <p:cNvPr id="419" name="" descr="{&quot;isTemplate&quot;:true,&quot;type&quot;:&quot;text&quot;}"/>
           <p:cNvSpPr txBox="1"/>
           <p:nvPr/>
         </p:nvSpPr>
@@ -16937,7 +18348,7 @@
       </p:sp>
       <p:sp>
         <p:nvSpPr>
-          <p:cNvPr id="386" name="" descr="{&quot;isTemplate&quot;:true,&quot;type&quot;:&quot;text&quot;}"/>
+          <p:cNvPr id="420" name="" descr="{&quot;isTemplate&quot;:true,&quot;type&quot;:&quot;text&quot;}"/>
           <p:cNvSpPr txBox="1"/>
           <p:nvPr/>
         </p:nvSpPr>
@@ -16972,7 +18383,7 @@
       </p:sp>
       <p:sp>
         <p:nvSpPr>
-          <p:cNvPr id="387" name="" descr="{&quot;isTemplate&quot;:true,&quot;type&quot;:&quot;text&quot;}"/>
+          <p:cNvPr id="421" name="" descr="{&quot;isTemplate&quot;:true,&quot;type&quot;:&quot;text&quot;}"/>
           <p:cNvSpPr txBox="1"/>
           <p:nvPr/>
         </p:nvSpPr>
@@ -17007,7 +18418,7 @@
       </p:sp>
       <p:sp>
         <p:nvSpPr>
-          <p:cNvPr id="388" name=""/>
+          <p:cNvPr id="422" name=""/>
           <p:cNvSpPr/>
           <p:nvPr/>
         </p:nvSpPr>
@@ -17040,7 +18451,7 @@
       </p:sp>
       <p:sp>
         <p:nvSpPr>
-          <p:cNvPr id="389" name="" descr="{&quot;isTemplate&quot;:true,&quot;type&quot;:&quot;text&quot;}"/>
+          <p:cNvPr id="423" name="" descr="{&quot;isTemplate&quot;:true,&quot;type&quot;:&quot;text&quot;}"/>
           <p:cNvSpPr txBox="1"/>
           <p:nvPr/>
         </p:nvSpPr>
@@ -17085,7 +18496,7 @@
       </p:sp>
       <p:sp>
         <p:nvSpPr>
-          <p:cNvPr id="390" name="" descr="{&quot;isTemplate&quot;:true,&quot;type&quot;:&quot;text&quot;}"/>
+          <p:cNvPr id="424" name="" descr="{&quot;isTemplate&quot;:true,&quot;type&quot;:&quot;text&quot;}"/>
           <p:cNvSpPr txBox="1"/>
           <p:nvPr/>
         </p:nvSpPr>
@@ -17120,7 +18531,7 @@
       </p:sp>
       <p:sp>
         <p:nvSpPr>
-          <p:cNvPr id="391" name="" descr="{&quot;isTemplate&quot;:true,&quot;type&quot;:&quot;text&quot;}"/>
+          <p:cNvPr id="425" name="" descr="{&quot;isTemplate&quot;:true,&quot;type&quot;:&quot;text&quot;}"/>
           <p:cNvSpPr txBox="1"/>
           <p:nvPr/>
         </p:nvSpPr>
@@ -17155,7 +18566,7 @@
       </p:sp>
       <p:sp>
         <p:nvSpPr>
-          <p:cNvPr id="392" name=""/>
+          <p:cNvPr id="426" name=""/>
           <p:cNvSpPr/>
           <p:nvPr/>
         </p:nvSpPr>
@@ -17183,7 +18594,7 @@
       </p:sp>
       <p:sp>
         <p:nvSpPr>
-          <p:cNvPr id="393" name="" descr="{&quot;isTemplate&quot;:true,&quot;type&quot;:&quot;text&quot;}"/>
+          <p:cNvPr id="427" name="" descr="{&quot;isTemplate&quot;:true,&quot;type&quot;:&quot;text&quot;}"/>
           <p:cNvSpPr txBox="1"/>
           <p:nvPr/>
         </p:nvSpPr>
@@ -17268,7 +18679,7 @@
       </p:sp>
       <p:sp>
         <p:nvSpPr>
-          <p:cNvPr id="394" name=""/>
+          <p:cNvPr id="428" name=""/>
           <p:cNvSpPr/>
           <p:nvPr/>
         </p:nvSpPr>
@@ -17292,7 +18703,7 @@
       </p:sp>
       <p:sp>
         <p:nvSpPr>
-          <p:cNvPr id="395" name="" descr="{&quot;isTemplate&quot;:true,&quot;type&quot;:&quot;text&quot;}"/>
+          <p:cNvPr id="429" name="" descr="{&quot;isTemplate&quot;:true,&quot;type&quot;:&quot;text&quot;}"/>
           <p:cNvSpPr txBox="1"/>
           <p:nvPr/>
         </p:nvSpPr>
@@ -17327,7 +18738,7 @@
       </p:sp>
       <p:sp>
         <p:nvSpPr>
-          <p:cNvPr id="396" name="" descr="{&quot;isTemplate&quot;:true,&quot;type&quot;:&quot;text&quot;}"/>
+          <p:cNvPr id="430" name="" descr="{&quot;isTemplate&quot;:true,&quot;type&quot;:&quot;text&quot;}"/>
           <p:cNvSpPr txBox="1"/>
           <p:nvPr/>
         </p:nvSpPr>
@@ -17362,7 +18773,7 @@
       </p:sp>
       <p:sp>
         <p:nvSpPr>
-          <p:cNvPr id="397" name="" descr="{&quot;isTemplate&quot;:true,&quot;type&quot;:&quot;text&quot;}"/>
+          <p:cNvPr id="431" name="" descr="{&quot;isTemplate&quot;:true,&quot;type&quot;:&quot;text&quot;}"/>
           <p:cNvSpPr txBox="1"/>
           <p:nvPr/>
         </p:nvSpPr>
@@ -17417,7 +18828,7 @@
       </p:sp>
       <p:sp>
         <p:nvSpPr>
-          <p:cNvPr id="398" name=""/>
+          <p:cNvPr id="432" name=""/>
           <p:cNvSpPr/>
           <p:nvPr/>
         </p:nvSpPr>
@@ -17441,7 +18852,7 @@
       </p:sp>
       <p:sp>
         <p:nvSpPr>
-          <p:cNvPr id="399" name="" descr="{&quot;isTemplate&quot;:true,&quot;type&quot;:&quot;text&quot;}"/>
+          <p:cNvPr id="433" name="" descr="{&quot;isTemplate&quot;:true,&quot;type&quot;:&quot;text&quot;}"/>
           <p:cNvSpPr txBox="1"/>
           <p:nvPr/>
         </p:nvSpPr>
